--- a/presentation.pptx
+++ b/presentation.pptx
@@ -286,7 +286,9 @@
           <a:bodyPr/>
           <a:lstStyle/>
           <a:p>
-            <a:endParaRPr lang="de-DE"/>
+            <a:endParaRPr lang="de-DE" dirty="0">
+              <a:latin typeface="Aptos Narrow" panose="020B0004020202020204" pitchFamily="34" charset="0"/>
+            </a:endParaRPr>
           </a:p>
         </p:txBody>
       </p:sp>
@@ -305,7 +307,9 @@
           <a:bodyPr/>
           <a:lstStyle/>
           <a:p>
-            <a:endParaRPr lang="en-US" dirty="0"/>
+            <a:endParaRPr lang="en-US" dirty="0">
+              <a:latin typeface="Aptos Narrow" panose="020B0004020202020204" pitchFamily="34" charset="0"/>
+            </a:endParaRPr>
           </a:p>
         </p:txBody>
       </p:sp>
@@ -325,10 +329,14 @@
           <a:lstStyle/>
           <a:p>
             <a:fld id="{F7021451-1387-4CA6-816F-3879F97B5CBC}" type="slidenum">
-              <a:rPr lang="en-US"/>
+              <a:rPr lang="en-US">
+                <a:latin typeface="Aptos Narrow" panose="020B0004020202020204" pitchFamily="34" charset="0"/>
+              </a:rPr>
               <a:t>1</a:t>
             </a:fld>
-            <a:endParaRPr lang="en-US"/>
+            <a:endParaRPr lang="en-US">
+              <a:latin typeface="Aptos Narrow" panose="020B0004020202020204" pitchFamily="34" charset="0"/>
+            </a:endParaRPr>
           </a:p>
         </p:txBody>
       </p:sp>
@@ -377,7 +385,9 @@
           <a:bodyPr/>
           <a:lstStyle/>
           <a:p>
-            <a:endParaRPr lang="de-DE"/>
+            <a:endParaRPr lang="de-DE" dirty="0">
+              <a:latin typeface="Aptos Narrow" panose="020B0004020202020204" pitchFamily="34" charset="0"/>
+            </a:endParaRPr>
           </a:p>
         </p:txBody>
       </p:sp>
@@ -396,7 +406,9 @@
           <a:bodyPr/>
           <a:lstStyle/>
           <a:p>
-            <a:endParaRPr lang="en-US" dirty="0"/>
+            <a:endParaRPr lang="en-US" dirty="0">
+              <a:latin typeface="Aptos Narrow" panose="020B0004020202020204" pitchFamily="34" charset="0"/>
+            </a:endParaRPr>
           </a:p>
         </p:txBody>
       </p:sp>
@@ -416,10 +428,14 @@
           <a:lstStyle/>
           <a:p>
             <a:fld id="{F7021451-1387-4CA6-816F-3879F97B5CBC}" type="slidenum">
-              <a:rPr lang="en-US"/>
+              <a:rPr lang="en-US">
+                <a:latin typeface="Aptos Narrow" panose="020B0004020202020204" pitchFamily="34" charset="0"/>
+              </a:rPr>
               <a:t>10</a:t>
             </a:fld>
-            <a:endParaRPr lang="en-US"/>
+            <a:endParaRPr lang="en-US">
+              <a:latin typeface="Aptos Narrow" panose="020B0004020202020204" pitchFamily="34" charset="0"/>
+            </a:endParaRPr>
           </a:p>
         </p:txBody>
       </p:sp>
@@ -468,7 +484,9 @@
           <a:bodyPr/>
           <a:lstStyle/>
           <a:p>
-            <a:endParaRPr lang="de-DE"/>
+            <a:endParaRPr lang="de-DE" dirty="0">
+              <a:latin typeface="Aptos Narrow" panose="020B0004020202020204" pitchFamily="34" charset="0"/>
+            </a:endParaRPr>
           </a:p>
         </p:txBody>
       </p:sp>
@@ -491,7 +509,9 @@
               <a:buFontTx/>
               <a:buNone/>
             </a:pPr>
-            <a:endParaRPr lang="en-US" dirty="0"/>
+            <a:endParaRPr lang="en-US" dirty="0">
+              <a:latin typeface="Aptos Narrow" panose="020B0004020202020204" pitchFamily="34" charset="0"/>
+            </a:endParaRPr>
           </a:p>
         </p:txBody>
       </p:sp>
@@ -511,10 +531,14 @@
           <a:lstStyle/>
           <a:p>
             <a:fld id="{F7021451-1387-4CA6-816F-3879F97B5CBC}" type="slidenum">
-              <a:rPr lang="en-US"/>
+              <a:rPr lang="en-US">
+                <a:latin typeface="Aptos Narrow" panose="020B0004020202020204" pitchFamily="34" charset="0"/>
+              </a:rPr>
               <a:t>11</a:t>
             </a:fld>
-            <a:endParaRPr lang="en-US"/>
+            <a:endParaRPr lang="en-US">
+              <a:latin typeface="Aptos Narrow" panose="020B0004020202020204" pitchFamily="34" charset="0"/>
+            </a:endParaRPr>
           </a:p>
         </p:txBody>
       </p:sp>
@@ -563,7 +587,9 @@
           <a:bodyPr/>
           <a:lstStyle/>
           <a:p>
-            <a:endParaRPr lang="de-DE"/>
+            <a:endParaRPr lang="de-DE" dirty="0">
+              <a:latin typeface="Aptos Narrow" panose="020B0004020202020204" pitchFamily="34" charset="0"/>
+            </a:endParaRPr>
           </a:p>
         </p:txBody>
       </p:sp>
@@ -582,7 +608,13 @@
           <a:bodyPr/>
           <a:lstStyle/>
           <a:p>
-            <a:endParaRPr lang="en-US" dirty="0"/>
+            <a:pPr marL="0" indent="0">
+              <a:buFontTx/>
+              <a:buNone/>
+            </a:pPr>
+            <a:endParaRPr lang="en-US" dirty="0">
+              <a:latin typeface="Aptos Narrow" panose="020B0004020202020204" pitchFamily="34" charset="0"/>
+            </a:endParaRPr>
           </a:p>
         </p:txBody>
       </p:sp>
@@ -602,10 +634,14 @@
           <a:lstStyle/>
           <a:p>
             <a:fld id="{F7021451-1387-4CA6-816F-3879F97B5CBC}" type="slidenum">
-              <a:rPr lang="en-US"/>
+              <a:rPr lang="en-US">
+                <a:latin typeface="Aptos Narrow" panose="020B0004020202020204" pitchFamily="34" charset="0"/>
+              </a:rPr>
               <a:t>2</a:t>
             </a:fld>
-            <a:endParaRPr lang="en-US"/>
+            <a:endParaRPr lang="en-US">
+              <a:latin typeface="Aptos Narrow" panose="020B0004020202020204" pitchFamily="34" charset="0"/>
+            </a:endParaRPr>
           </a:p>
         </p:txBody>
       </p:sp>
@@ -654,7 +690,9 @@
           <a:bodyPr/>
           <a:lstStyle/>
           <a:p>
-            <a:endParaRPr lang="de-DE"/>
+            <a:endParaRPr lang="de-DE" dirty="0">
+              <a:latin typeface="Aptos Narrow" panose="020B0004020202020204" pitchFamily="34" charset="0"/>
+            </a:endParaRPr>
           </a:p>
         </p:txBody>
       </p:sp>
@@ -673,7 +711,9 @@
           <a:bodyPr/>
           <a:lstStyle/>
           <a:p>
-            <a:endParaRPr lang="en-US" dirty="0"/>
+            <a:endParaRPr lang="en-US" dirty="0">
+              <a:latin typeface="Aptos Narrow" panose="020B0004020202020204" pitchFamily="34" charset="0"/>
+            </a:endParaRPr>
           </a:p>
         </p:txBody>
       </p:sp>
@@ -693,10 +733,14 @@
           <a:lstStyle/>
           <a:p>
             <a:fld id="{F7021451-1387-4CA6-816F-3879F97B5CBC}" type="slidenum">
-              <a:rPr lang="en-US"/>
+              <a:rPr lang="en-US">
+                <a:latin typeface="Aptos Narrow" panose="020B0004020202020204" pitchFamily="34" charset="0"/>
+              </a:rPr>
               <a:t>3</a:t>
             </a:fld>
-            <a:endParaRPr lang="en-US"/>
+            <a:endParaRPr lang="en-US">
+              <a:latin typeface="Aptos Narrow" panose="020B0004020202020204" pitchFamily="34" charset="0"/>
+            </a:endParaRPr>
           </a:p>
         </p:txBody>
       </p:sp>
@@ -745,7 +789,9 @@
           <a:bodyPr/>
           <a:lstStyle/>
           <a:p>
-            <a:endParaRPr lang="de-DE"/>
+            <a:endParaRPr lang="de-DE" dirty="0">
+              <a:latin typeface="Aptos Narrow" panose="020B0004020202020204" pitchFamily="34" charset="0"/>
+            </a:endParaRPr>
           </a:p>
         </p:txBody>
       </p:sp>
@@ -768,7 +814,9 @@
               <a:buFontTx/>
               <a:buNone/>
             </a:pPr>
-            <a:endParaRPr lang="en-US" dirty="0"/>
+            <a:endParaRPr lang="en-US" dirty="0">
+              <a:latin typeface="Aptos Narrow" panose="020B0004020202020204" pitchFamily="34" charset="0"/>
+            </a:endParaRPr>
           </a:p>
         </p:txBody>
       </p:sp>
@@ -788,10 +836,14 @@
           <a:lstStyle/>
           <a:p>
             <a:fld id="{F7021451-1387-4CA6-816F-3879F97B5CBC}" type="slidenum">
-              <a:rPr lang="en-US"/>
+              <a:rPr lang="en-US">
+                <a:latin typeface="Aptos Narrow" panose="020B0004020202020204" pitchFamily="34" charset="0"/>
+              </a:rPr>
               <a:t>4</a:t>
             </a:fld>
-            <a:endParaRPr lang="en-US"/>
+            <a:endParaRPr lang="en-US">
+              <a:latin typeface="Aptos Narrow" panose="020B0004020202020204" pitchFamily="34" charset="0"/>
+            </a:endParaRPr>
           </a:p>
         </p:txBody>
       </p:sp>
@@ -840,7 +892,9 @@
           <a:bodyPr/>
           <a:lstStyle/>
           <a:p>
-            <a:endParaRPr lang="de-DE"/>
+            <a:endParaRPr lang="de-DE" dirty="0">
+              <a:latin typeface="Aptos Narrow" panose="020B0004020202020204" pitchFamily="34" charset="0"/>
+            </a:endParaRPr>
           </a:p>
         </p:txBody>
       </p:sp>
@@ -863,7 +917,9 @@
               <a:buFontTx/>
               <a:buNone/>
             </a:pPr>
-            <a:endParaRPr lang="en-US" b="0" dirty="0"/>
+            <a:endParaRPr lang="de-DE" b="0" dirty="0">
+              <a:latin typeface="Aptos Narrow" panose="020B0004020202020204" pitchFamily="34" charset="0"/>
+            </a:endParaRPr>
           </a:p>
         </p:txBody>
       </p:sp>
@@ -883,10 +939,14 @@
           <a:lstStyle/>
           <a:p>
             <a:fld id="{F7021451-1387-4CA6-816F-3879F97B5CBC}" type="slidenum">
-              <a:rPr lang="en-US"/>
+              <a:rPr lang="en-US">
+                <a:latin typeface="Aptos Narrow" panose="020B0004020202020204" pitchFamily="34" charset="0"/>
+              </a:rPr>
               <a:t>5</a:t>
             </a:fld>
-            <a:endParaRPr lang="en-US"/>
+            <a:endParaRPr lang="en-US">
+              <a:latin typeface="Aptos Narrow" panose="020B0004020202020204" pitchFamily="34" charset="0"/>
+            </a:endParaRPr>
           </a:p>
         </p:txBody>
       </p:sp>
@@ -935,7 +995,9 @@
           <a:bodyPr/>
           <a:lstStyle/>
           <a:p>
-            <a:endParaRPr lang="de-DE"/>
+            <a:endParaRPr lang="de-DE" dirty="0">
+              <a:latin typeface="Aptos Narrow" panose="020B0004020202020204" pitchFamily="34" charset="0"/>
+            </a:endParaRPr>
           </a:p>
         </p:txBody>
       </p:sp>
@@ -954,7 +1016,9 @@
           <a:bodyPr/>
           <a:lstStyle/>
           <a:p>
-            <a:endParaRPr lang="en-US" dirty="0"/>
+            <a:endParaRPr lang="en-US" dirty="0">
+              <a:latin typeface="Aptos Narrow" panose="020B0004020202020204" pitchFamily="34" charset="0"/>
+            </a:endParaRPr>
           </a:p>
         </p:txBody>
       </p:sp>
@@ -974,10 +1038,14 @@
           <a:lstStyle/>
           <a:p>
             <a:fld id="{F7021451-1387-4CA6-816F-3879F97B5CBC}" type="slidenum">
-              <a:rPr lang="en-US"/>
+              <a:rPr lang="en-US">
+                <a:latin typeface="Aptos Narrow" panose="020B0004020202020204" pitchFamily="34" charset="0"/>
+              </a:rPr>
               <a:t>6</a:t>
             </a:fld>
-            <a:endParaRPr lang="en-US"/>
+            <a:endParaRPr lang="en-US">
+              <a:latin typeface="Aptos Narrow" panose="020B0004020202020204" pitchFamily="34" charset="0"/>
+            </a:endParaRPr>
           </a:p>
         </p:txBody>
       </p:sp>
@@ -1026,7 +1094,9 @@
           <a:bodyPr/>
           <a:lstStyle/>
           <a:p>
-            <a:endParaRPr lang="de-DE"/>
+            <a:endParaRPr lang="de-DE" dirty="0">
+              <a:latin typeface="Aptos Narrow" panose="020B0004020202020204" pitchFamily="34" charset="0"/>
+            </a:endParaRPr>
           </a:p>
         </p:txBody>
       </p:sp>
@@ -1049,7 +1119,9 @@
               <a:buFontTx/>
               <a:buNone/>
             </a:pPr>
-            <a:endParaRPr lang="en-US" dirty="0"/>
+            <a:endParaRPr lang="en-US" dirty="0">
+              <a:latin typeface="Aptos Narrow" panose="020B0004020202020204" pitchFamily="34" charset="0"/>
+            </a:endParaRPr>
           </a:p>
         </p:txBody>
       </p:sp>
@@ -1069,10 +1141,14 @@
           <a:lstStyle/>
           <a:p>
             <a:fld id="{F7021451-1387-4CA6-816F-3879F97B5CBC}" type="slidenum">
-              <a:rPr lang="en-US"/>
+              <a:rPr lang="en-US">
+                <a:latin typeface="Aptos Narrow" panose="020B0004020202020204" pitchFamily="34" charset="0"/>
+              </a:rPr>
               <a:t>7</a:t>
             </a:fld>
-            <a:endParaRPr lang="en-US"/>
+            <a:endParaRPr lang="en-US">
+              <a:latin typeface="Aptos Narrow" panose="020B0004020202020204" pitchFamily="34" charset="0"/>
+            </a:endParaRPr>
           </a:p>
         </p:txBody>
       </p:sp>
@@ -1121,7 +1197,9 @@
           <a:bodyPr/>
           <a:lstStyle/>
           <a:p>
-            <a:endParaRPr lang="de-DE"/>
+            <a:endParaRPr lang="de-DE" dirty="0">
+              <a:latin typeface="Aptos Narrow" panose="020B0004020202020204" pitchFamily="34" charset="0"/>
+            </a:endParaRPr>
           </a:p>
         </p:txBody>
       </p:sp>
@@ -1144,7 +1222,9 @@
               <a:buFontTx/>
               <a:buNone/>
             </a:pPr>
-            <a:endParaRPr lang="en-US" dirty="0"/>
+            <a:endParaRPr lang="en-US" dirty="0">
+              <a:latin typeface="Aptos Narrow" panose="020B0004020202020204" pitchFamily="34" charset="0"/>
+            </a:endParaRPr>
           </a:p>
         </p:txBody>
       </p:sp>
@@ -1164,10 +1244,14 @@
           <a:lstStyle/>
           <a:p>
             <a:fld id="{F7021451-1387-4CA6-816F-3879F97B5CBC}" type="slidenum">
-              <a:rPr lang="en-US"/>
+              <a:rPr lang="en-US">
+                <a:latin typeface="Aptos Narrow" panose="020B0004020202020204" pitchFamily="34" charset="0"/>
+              </a:rPr>
               <a:t>8</a:t>
             </a:fld>
-            <a:endParaRPr lang="en-US"/>
+            <a:endParaRPr lang="en-US">
+              <a:latin typeface="Aptos Narrow" panose="020B0004020202020204" pitchFamily="34" charset="0"/>
+            </a:endParaRPr>
           </a:p>
         </p:txBody>
       </p:sp>
@@ -1216,7 +1300,9 @@
           <a:bodyPr/>
           <a:lstStyle/>
           <a:p>
-            <a:endParaRPr lang="de-DE"/>
+            <a:endParaRPr lang="de-DE" dirty="0">
+              <a:latin typeface="Aptos Narrow" panose="020B0004020202020204" pitchFamily="34" charset="0"/>
+            </a:endParaRPr>
           </a:p>
         </p:txBody>
       </p:sp>
@@ -1235,7 +1321,9 @@
           <a:bodyPr/>
           <a:lstStyle/>
           <a:p>
-            <a:endParaRPr lang="en-US" dirty="0"/>
+            <a:endParaRPr lang="en-US" dirty="0">
+              <a:latin typeface="Aptos Narrow" panose="020B0004020202020204" pitchFamily="34" charset="0"/>
+            </a:endParaRPr>
           </a:p>
         </p:txBody>
       </p:sp>
@@ -1255,10 +1343,14 @@
           <a:lstStyle/>
           <a:p>
             <a:fld id="{F7021451-1387-4CA6-816F-3879F97B5CBC}" type="slidenum">
-              <a:rPr lang="en-US"/>
+              <a:rPr lang="en-US">
+                <a:latin typeface="Aptos Narrow" panose="020B0004020202020204" pitchFamily="34" charset="0"/>
+              </a:rPr>
               <a:t>9</a:t>
             </a:fld>
-            <a:endParaRPr lang="en-US"/>
+            <a:endParaRPr lang="en-US">
+              <a:latin typeface="Aptos Narrow" panose="020B0004020202020204" pitchFamily="34" charset="0"/>
+            </a:endParaRPr>
           </a:p>
         </p:txBody>
       </p:sp>
@@ -3048,7 +3140,7 @@
         <p:spPr>
           <a:xfrm>
             <a:off x="719814" y="5529417"/>
-            <a:ext cx="6293189" cy="805061"/>
+            <a:ext cx="6293189" cy="1052358"/>
           </a:xfrm>
           <a:prstGeom prst="roundRect">
             <a:avLst>
@@ -3101,7 +3193,7 @@
         <p:spPr>
           <a:xfrm>
             <a:off x="1246057" y="5615242"/>
-            <a:ext cx="5605025" cy="633412"/>
+            <a:ext cx="5605025" cy="892024"/>
           </a:xfrm>
           <a:prstGeom prst="rect">
             <a:avLst/>
@@ -3207,7 +3299,125 @@
                 <a:ea typeface="Source Sans 3" pitchFamily="34" charset="-122"/>
                 <a:cs typeface="Source Sans 3" pitchFamily="34" charset="-120"/>
               </a:rPr>
-              <a:t> fallen bemerkenswert zusammen.</a:t>
+              <a:t> fallen </a:t>
+            </a:r>
+            <a:r>
+              <a:rPr lang="en-US" sz="1600" dirty="0" err="1">
+                <a:solidFill>
+                  <a:srgbClr val="000000"/>
+                </a:solidFill>
+                <a:latin typeface="Aptos Narrow" panose="020B0004020202020204" pitchFamily="34" charset="0"/>
+                <a:ea typeface="Source Sans 3" pitchFamily="34" charset="-122"/>
+                <a:cs typeface="Source Sans 3" pitchFamily="34" charset="-120"/>
+              </a:rPr>
+              <a:t>bemerkenswert</a:t>
+            </a:r>
+            <a:r>
+              <a:rPr lang="en-US" sz="1600" dirty="0">
+                <a:solidFill>
+                  <a:srgbClr val="000000"/>
+                </a:solidFill>
+                <a:latin typeface="Aptos Narrow" panose="020B0004020202020204" pitchFamily="34" charset="0"/>
+                <a:ea typeface="Source Sans 3" pitchFamily="34" charset="-122"/>
+                <a:cs typeface="Source Sans 3" pitchFamily="34" charset="-120"/>
+              </a:rPr>
+              <a:t> </a:t>
+            </a:r>
+            <a:r>
+              <a:rPr lang="en-US" sz="1600" dirty="0" err="1">
+                <a:solidFill>
+                  <a:srgbClr val="000000"/>
+                </a:solidFill>
+                <a:latin typeface="Aptos Narrow" panose="020B0004020202020204" pitchFamily="34" charset="0"/>
+                <a:ea typeface="Source Sans 3" pitchFamily="34" charset="-122"/>
+                <a:cs typeface="Source Sans 3" pitchFamily="34" charset="-120"/>
+              </a:rPr>
+              <a:t>zusammen</a:t>
+            </a:r>
+            <a:r>
+              <a:rPr lang="en-US" sz="1600" dirty="0">
+                <a:solidFill>
+                  <a:srgbClr val="000000"/>
+                </a:solidFill>
+                <a:latin typeface="Aptos Narrow" panose="020B0004020202020204" pitchFamily="34" charset="0"/>
+                <a:ea typeface="Source Sans 3" pitchFamily="34" charset="-122"/>
+                <a:cs typeface="Source Sans 3" pitchFamily="34" charset="-120"/>
+              </a:rPr>
+              <a:t> –  </a:t>
+            </a:r>
+          </a:p>
+          <a:p>
+            <a:pPr marL="0" indent="0" algn="l">
+              <a:lnSpc>
+                <a:spcPct val="119000"/>
+              </a:lnSpc>
+              <a:buNone/>
+            </a:pPr>
+            <a:r>
+              <a:rPr lang="en-US" sz="1600" dirty="0">
+                <a:solidFill>
+                  <a:srgbClr val="000000"/>
+                </a:solidFill>
+                <a:latin typeface="Aptos Narrow" panose="020B0004020202020204" pitchFamily="34" charset="0"/>
+                <a:ea typeface="Source Sans 3" pitchFamily="34" charset="-122"/>
+                <a:cs typeface="Source Sans 3" pitchFamily="34" charset="-120"/>
+              </a:rPr>
+              <a:t>Grund: </a:t>
+            </a:r>
+            <a:r>
+              <a:rPr lang="de-DE" sz="1600" dirty="0">
+                <a:solidFill>
+                  <a:srgbClr val="000000"/>
+                </a:solidFill>
+                <a:latin typeface="Aptos Narrow" panose="020B0004020202020204" pitchFamily="34" charset="0"/>
+                <a:ea typeface="Source Sans 3" pitchFamily="34" charset="-122"/>
+                <a:cs typeface="Source Sans 3" pitchFamily="34" charset="-120"/>
+              </a:rPr>
+              <a:t>E</a:t>
+            </a:r>
+            <a:r>
+              <a:rPr lang="de-DE" sz="1600">
+                <a:solidFill>
+                  <a:srgbClr val="000000"/>
+                </a:solidFill>
+                <a:latin typeface="Aptos Narrow" panose="020B0004020202020204" pitchFamily="34" charset="0"/>
+                <a:ea typeface="Source Sans 3" pitchFamily="34" charset="-122"/>
+                <a:cs typeface="Source Sans 3" pitchFamily="34" charset="-120"/>
+              </a:rPr>
+              <a:t>igene </a:t>
+            </a:r>
+            <a:r>
+              <a:rPr lang="de-DE" sz="1600" dirty="0">
+                <a:solidFill>
+                  <a:srgbClr val="000000"/>
+                </a:solidFill>
+                <a:latin typeface="Aptos Narrow" panose="020B0004020202020204" pitchFamily="34" charset="0"/>
+                <a:ea typeface="Source Sans 3" pitchFamily="34" charset="-122"/>
+                <a:cs typeface="Source Sans 3" pitchFamily="34" charset="-120"/>
+              </a:rPr>
+              <a:t>Met-Ausgrabungen in </a:t>
+            </a:r>
+            <a:r>
+              <a:rPr lang="de-DE" sz="1600" dirty="0" err="1">
+                <a:solidFill>
+                  <a:srgbClr val="000000"/>
+                </a:solidFill>
+                <a:latin typeface="Aptos Narrow" panose="020B0004020202020204" pitchFamily="34" charset="0"/>
+                <a:ea typeface="Source Sans 3" pitchFamily="34" charset="-122"/>
+                <a:cs typeface="Source Sans 3" pitchFamily="34" charset="-120"/>
+              </a:rPr>
+              <a:t>Nishapur</a:t>
+            </a:r>
+            <a:r>
+              <a:rPr lang="de-DE" sz="1600" dirty="0">
+                <a:solidFill>
+                  <a:srgbClr val="000000"/>
+                </a:solidFill>
+                <a:latin typeface="Aptos Narrow" panose="020B0004020202020204" pitchFamily="34" charset="0"/>
+                <a:ea typeface="Source Sans 3" pitchFamily="34" charset="-122"/>
+                <a:cs typeface="Source Sans 3" pitchFamily="34" charset="-120"/>
+              </a:rPr>
+              <a:t> (1935–1940er Jahre).</a:t>
             </a:r>
             <a:endParaRPr lang="en-US" sz="1600" dirty="0"/>
           </a:p>

--- a/presentation.pptx
+++ b/presentation.pptx
@@ -5,7 +5,7 @@
     <p:sldMasterId id="2147483648" r:id="rId1"/>
   </p:sldMasterIdLst>
   <p:notesMasterIdLst>
-    <p:notesMasterId r:id="rId13"/>
+    <p:notesMasterId r:id="rId14"/>
   </p:notesMasterIdLst>
   <p:sldIdLst>
     <p:sldId id="256" r:id="rId2"/>
@@ -15,18 +15,19 @@
     <p:sldId id="260" r:id="rId6"/>
     <p:sldId id="261" r:id="rId7"/>
     <p:sldId id="262" r:id="rId8"/>
-    <p:sldId id="263" r:id="rId9"/>
-    <p:sldId id="264" r:id="rId10"/>
-    <p:sldId id="265" r:id="rId11"/>
-    <p:sldId id="266" r:id="rId12"/>
+    <p:sldId id="267" r:id="rId9"/>
+    <p:sldId id="263" r:id="rId10"/>
+    <p:sldId id="264" r:id="rId11"/>
+    <p:sldId id="265" r:id="rId12"/>
+    <p:sldId id="266" r:id="rId13"/>
   </p:sldIdLst>
   <p:sldSz cx="12192000" cy="6858000"/>
   <p:notesSz cx="6858000" cy="12192000"/>
   <p:embeddedFontLst>
     <p:embeddedFont>
       <p:font typeface="Aptos Narrow" panose="020B0004020202020204" pitchFamily="34" charset="0"/>
-      <p:regular r:id="rId14"/>
-      <p:bold r:id="rId15"/>
+      <p:regular r:id="rId15"/>
+      <p:bold r:id="rId16"/>
     </p:embeddedFont>
   </p:embeddedFontLst>
   <p:defaultTextStyle>
@@ -505,6 +506,105 @@
           <a:bodyPr/>
           <a:lstStyle/>
           <a:p>
+            <a:endParaRPr lang="en-US" dirty="0">
+              <a:latin typeface="Aptos Narrow" panose="020B0004020202020204" pitchFamily="34" charset="0"/>
+            </a:endParaRPr>
+          </a:p>
+        </p:txBody>
+      </p:sp>
+      <p:sp>
+        <p:nvSpPr>
+          <p:cNvPr id="4" name="Slide Number Placeholder 3"/>
+          <p:cNvSpPr>
+            <a:spLocks noGrp="1"/>
+          </p:cNvSpPr>
+          <p:nvPr>
+            <p:ph type="sldNum" sz="quarter" idx="10"/>
+          </p:nvPr>
+        </p:nvSpPr>
+        <p:spPr/>
+        <p:txBody>
+          <a:bodyPr/>
+          <a:lstStyle/>
+          <a:p>
+            <a:fld id="{F7021451-1387-4CA6-816F-3879F97B5CBC}" type="slidenum">
+              <a:rPr lang="en-US">
+                <a:latin typeface="Aptos Narrow" panose="020B0004020202020204" pitchFamily="34" charset="0"/>
+              </a:rPr>
+              <a:t>11</a:t>
+            </a:fld>
+            <a:endParaRPr lang="en-US">
+              <a:latin typeface="Aptos Narrow" panose="020B0004020202020204" pitchFamily="34" charset="0"/>
+            </a:endParaRPr>
+          </a:p>
+        </p:txBody>
+      </p:sp>
+    </p:spTree>
+    <p:extLst>
+      <p:ext uri="{BB962C8B-B14F-4D97-AF65-F5344CB8AC3E}">
+        <p14:creationId xmlns:p14="http://schemas.microsoft.com/office/powerpoint/2010/main" val="1024086991"/>
+      </p:ext>
+    </p:extLst>
+  </p:cSld>
+  <p:clrMapOvr>
+    <a:masterClrMapping/>
+  </p:clrMapOvr>
+</p:notes>
+</file>
+
+<file path=ppt/notesSlides/notesSlide12.xml><?xml version="1.0" encoding="utf-8"?>
+<p:notes xmlns:a="http://schemas.openxmlformats.org/drawingml/2006/main" xmlns:r="http://schemas.openxmlformats.org/officeDocument/2006/relationships" xmlns:p="http://schemas.openxmlformats.org/presentationml/2006/main">
+  <p:cSld>
+    <p:spTree>
+      <p:nvGrpSpPr>
+        <p:cNvPr id="1" name=""/>
+        <p:cNvGrpSpPr/>
+        <p:nvPr/>
+      </p:nvGrpSpPr>
+      <p:grpSpPr>
+        <a:xfrm>
+          <a:off x="0" y="0"/>
+          <a:ext cx="0" cy="0"/>
+          <a:chOff x="0" y="0"/>
+          <a:chExt cx="0" cy="0"/>
+        </a:xfrm>
+      </p:grpSpPr>
+      <p:sp>
+        <p:nvSpPr>
+          <p:cNvPr id="2" name="Slide Image Placeholder 1"/>
+          <p:cNvSpPr>
+            <a:spLocks noGrp="1" noRot="1" noChangeAspect="1"/>
+          </p:cNvSpPr>
+          <p:nvPr>
+            <p:ph type="sldImg"/>
+          </p:nvPr>
+        </p:nvSpPr>
+        <p:spPr/>
+        <p:txBody>
+          <a:bodyPr/>
+          <a:lstStyle/>
+          <a:p>
+            <a:endParaRPr lang="de-DE" dirty="0">
+              <a:latin typeface="Aptos Narrow" panose="020B0004020202020204" pitchFamily="34" charset="0"/>
+            </a:endParaRPr>
+          </a:p>
+        </p:txBody>
+      </p:sp>
+      <p:sp>
+        <p:nvSpPr>
+          <p:cNvPr id="3" name="Notes Placeholder 2"/>
+          <p:cNvSpPr>
+            <a:spLocks noGrp="1"/>
+          </p:cNvSpPr>
+          <p:nvPr>
+            <p:ph type="body" idx="1"/>
+          </p:nvPr>
+        </p:nvSpPr>
+        <p:spPr/>
+        <p:txBody>
+          <a:bodyPr/>
+          <a:lstStyle/>
+          <a:p>
             <a:pPr marL="0" indent="0">
               <a:buFontTx/>
               <a:buNone/>
@@ -534,7 +634,7 @@
               <a:rPr lang="en-US">
                 <a:latin typeface="Aptos Narrow" panose="020B0004020202020204" pitchFamily="34" charset="0"/>
               </a:rPr>
-              <a:t>11</a:t>
+              <a:t>12</a:t>
             </a:fld>
             <a:endParaRPr lang="en-US">
               <a:latin typeface="Aptos Narrow" panose="020B0004020202020204" pitchFamily="34" charset="0"/>
@@ -1016,6 +1116,10 @@
           <a:bodyPr/>
           <a:lstStyle/>
           <a:p>
+            <a:pPr marL="0" indent="0">
+              <a:buFontTx/>
+              <a:buNone/>
+            </a:pPr>
             <a:endParaRPr lang="en-US" dirty="0">
               <a:latin typeface="Aptos Narrow" panose="020B0004020202020204" pitchFamily="34" charset="0"/>
             </a:endParaRPr>
@@ -1119,7 +1223,7 @@
               <a:buFontTx/>
               <a:buNone/>
             </a:pPr>
-            <a:endParaRPr lang="en-US" dirty="0">
+            <a:endParaRPr lang="en-US" b="0" dirty="0">
               <a:latin typeface="Aptos Narrow" panose="020B0004020202020204" pitchFamily="34" charset="0"/>
             </a:endParaRPr>
           </a:p>
@@ -1170,7 +1274,13 @@
   <p:cSld>
     <p:spTree>
       <p:nvGrpSpPr>
-        <p:cNvPr id="1" name=""/>
+        <p:cNvPr id="1" name="">
+          <a:extLst>
+            <a:ext uri="{FF2B5EF4-FFF2-40B4-BE49-F238E27FC236}">
+              <a16:creationId xmlns:a16="http://schemas.microsoft.com/office/drawing/2014/main" id="{FCFB0E3B-40B9-A45C-D1E1-CEC00D9D5BB0}"/>
+            </a:ext>
+          </a:extLst>
+        </p:cNvPr>
         <p:cNvGrpSpPr/>
         <p:nvPr/>
       </p:nvGrpSpPr>
@@ -1184,7 +1294,13 @@
       </p:grpSpPr>
       <p:sp>
         <p:nvSpPr>
-          <p:cNvPr id="2" name="Slide Image Placeholder 1"/>
+          <p:cNvPr id="2" name="Slide Image Placeholder 1">
+            <a:extLst>
+              <a:ext uri="{FF2B5EF4-FFF2-40B4-BE49-F238E27FC236}">
+                <a16:creationId xmlns:a16="http://schemas.microsoft.com/office/drawing/2014/main" id="{ADD6FC82-4908-7A3B-FF31-89BFB3888F59}"/>
+              </a:ext>
+            </a:extLst>
+          </p:cNvPr>
           <p:cNvSpPr>
             <a:spLocks noGrp="1" noRot="1" noChangeAspect="1"/>
           </p:cNvSpPr>
@@ -1205,7 +1321,13 @@
       </p:sp>
       <p:sp>
         <p:nvSpPr>
-          <p:cNvPr id="3" name="Notes Placeholder 2"/>
+          <p:cNvPr id="3" name="Notes Placeholder 2">
+            <a:extLst>
+              <a:ext uri="{FF2B5EF4-FFF2-40B4-BE49-F238E27FC236}">
+                <a16:creationId xmlns:a16="http://schemas.microsoft.com/office/drawing/2014/main" id="{2B48D829-6B3E-ACE7-0091-25BC501EC459}"/>
+              </a:ext>
+            </a:extLst>
+          </p:cNvPr>
           <p:cNvSpPr>
             <a:spLocks noGrp="1"/>
           </p:cNvSpPr>
@@ -1218,10 +1340,268 @@
           <a:bodyPr/>
           <a:lstStyle/>
           <a:p>
-            <a:pPr marL="0" indent="0">
+            <a:pPr marL="171450" indent="-171450">
               <a:buFontTx/>
-              <a:buNone/>
+              <a:buChar char="-"/>
             </a:pPr>
+            <a:r>
+              <a:rPr lang="en-US" b="0" dirty="0" err="1">
+                <a:latin typeface="Aptos Narrow" panose="020B0004020202020204" pitchFamily="34" charset="0"/>
+              </a:rPr>
+              <a:t>Übergang</a:t>
+            </a:r>
+            <a:r>
+              <a:rPr lang="en-US" b="0" dirty="0">
+                <a:latin typeface="Aptos Narrow" panose="020B0004020202020204" pitchFamily="34" charset="0"/>
+              </a:rPr>
+              <a:t> </a:t>
+            </a:r>
+            <a:r>
+              <a:rPr lang="en-US" b="0" dirty="0" err="1">
+                <a:latin typeface="Aptos Narrow" panose="020B0004020202020204" pitchFamily="34" charset="0"/>
+              </a:rPr>
+              <a:t>zum</a:t>
+            </a:r>
+            <a:r>
+              <a:rPr lang="en-US" b="0" dirty="0">
+                <a:latin typeface="Aptos Narrow" panose="020B0004020202020204" pitchFamily="34" charset="0"/>
+              </a:rPr>
+              <a:t> Dashboard für die </a:t>
+            </a:r>
+            <a:r>
+              <a:rPr lang="en-US" b="0" dirty="0" err="1">
+                <a:latin typeface="Aptos Narrow" panose="020B0004020202020204" pitchFamily="34" charset="0"/>
+              </a:rPr>
+              <a:t>Analyse</a:t>
+            </a:r>
+            <a:r>
+              <a:rPr lang="en-US" b="0" dirty="0">
+                <a:latin typeface="Aptos Narrow" panose="020B0004020202020204" pitchFamily="34" charset="0"/>
+              </a:rPr>
+              <a:t>.</a:t>
+            </a:r>
+          </a:p>
+          <a:p>
+            <a:pPr marL="171450" indent="-171450">
+              <a:buFontTx/>
+              <a:buChar char="-"/>
+            </a:pPr>
+            <a:r>
+              <a:rPr lang="en-US" b="0" dirty="0" err="1">
+                <a:latin typeface="Aptos Narrow" panose="020B0004020202020204" pitchFamily="34" charset="0"/>
+              </a:rPr>
+              <a:t>Fünf</a:t>
+            </a:r>
+            <a:r>
+              <a:rPr lang="en-US" b="0" dirty="0">
+                <a:latin typeface="Aptos Narrow" panose="020B0004020202020204" pitchFamily="34" charset="0"/>
+              </a:rPr>
+              <a:t> </a:t>
+            </a:r>
+            <a:r>
+              <a:rPr lang="en-US" b="0" dirty="0" err="1">
+                <a:latin typeface="Aptos Narrow" panose="020B0004020202020204" pitchFamily="34" charset="0"/>
+              </a:rPr>
+              <a:t>Analysen</a:t>
+            </a:r>
+            <a:r>
+              <a:rPr lang="en-US" b="0" dirty="0">
+                <a:latin typeface="Aptos Narrow" panose="020B0004020202020204" pitchFamily="34" charset="0"/>
+              </a:rPr>
+              <a:t> und </a:t>
+            </a:r>
+            <a:r>
+              <a:rPr lang="en-US" b="0" dirty="0" err="1">
+                <a:latin typeface="Aptos Narrow" panose="020B0004020202020204" pitchFamily="34" charset="0"/>
+              </a:rPr>
+              <a:t>eine</a:t>
+            </a:r>
+            <a:r>
+              <a:rPr lang="en-US" b="0" dirty="0">
+                <a:latin typeface="Aptos Narrow" panose="020B0004020202020204" pitchFamily="34" charset="0"/>
+              </a:rPr>
+              <a:t> </a:t>
+            </a:r>
+            <a:r>
+              <a:rPr lang="en-US" b="0" dirty="0" err="1">
+                <a:latin typeface="Aptos Narrow" panose="020B0004020202020204" pitchFamily="34" charset="0"/>
+              </a:rPr>
+              <a:t>deskriptive</a:t>
+            </a:r>
+            <a:r>
+              <a:rPr lang="en-US" b="0" dirty="0">
+                <a:latin typeface="Aptos Narrow" panose="020B0004020202020204" pitchFamily="34" charset="0"/>
+              </a:rPr>
+              <a:t> Vor-</a:t>
+            </a:r>
+            <a:r>
+              <a:rPr lang="en-US" b="0" dirty="0" err="1">
+                <a:latin typeface="Aptos Narrow" panose="020B0004020202020204" pitchFamily="34" charset="0"/>
+              </a:rPr>
+              <a:t>Analyse</a:t>
+            </a:r>
+            <a:r>
+              <a:rPr lang="en-US" b="0" dirty="0">
+                <a:latin typeface="Aptos Narrow" panose="020B0004020202020204" pitchFamily="34" charset="0"/>
+              </a:rPr>
+              <a:t>, </a:t>
+            </a:r>
+            <a:r>
+              <a:rPr lang="en-US" b="0" dirty="0" err="1">
+                <a:latin typeface="Aptos Narrow" panose="020B0004020202020204" pitchFamily="34" charset="0"/>
+              </a:rPr>
+              <a:t>deren</a:t>
+            </a:r>
+            <a:r>
+              <a:rPr lang="en-US" b="0" dirty="0">
+                <a:latin typeface="Aptos Narrow" panose="020B0004020202020204" pitchFamily="34" charset="0"/>
+              </a:rPr>
+              <a:t> </a:t>
+            </a:r>
+            <a:r>
+              <a:rPr lang="en-US" b="0" dirty="0" err="1">
+                <a:latin typeface="Aptos Narrow" panose="020B0004020202020204" pitchFamily="34" charset="0"/>
+              </a:rPr>
+              <a:t>Ergebnisse</a:t>
+            </a:r>
+            <a:r>
+              <a:rPr lang="en-US" b="0" dirty="0">
+                <a:latin typeface="Aptos Narrow" panose="020B0004020202020204" pitchFamily="34" charset="0"/>
+              </a:rPr>
+              <a:t> </a:t>
+            </a:r>
+            <a:r>
+              <a:rPr lang="en-US" b="0" dirty="0" err="1">
+                <a:latin typeface="Aptos Narrow" panose="020B0004020202020204" pitchFamily="34" charset="0"/>
+              </a:rPr>
+              <a:t>zur</a:t>
+            </a:r>
+            <a:r>
+              <a:rPr lang="en-US" b="0" dirty="0">
+                <a:latin typeface="Aptos Narrow" panose="020B0004020202020204" pitchFamily="34" charset="0"/>
+              </a:rPr>
+              <a:t> </a:t>
+            </a:r>
+            <a:r>
+              <a:rPr lang="en-US" b="0" dirty="0" err="1">
+                <a:latin typeface="Aptos Narrow" panose="020B0004020202020204" pitchFamily="34" charset="0"/>
+              </a:rPr>
+              <a:t>Beantwortung</a:t>
+            </a:r>
+            <a:r>
+              <a:rPr lang="en-US" b="0" dirty="0">
+                <a:latin typeface="Aptos Narrow" panose="020B0004020202020204" pitchFamily="34" charset="0"/>
+              </a:rPr>
+              <a:t> der </a:t>
+            </a:r>
+            <a:r>
+              <a:rPr lang="en-US" b="0" dirty="0" err="1">
+                <a:latin typeface="Aptos Narrow" panose="020B0004020202020204" pitchFamily="34" charset="0"/>
+              </a:rPr>
+              <a:t>drei</a:t>
+            </a:r>
+            <a:r>
+              <a:rPr lang="en-US" b="0" dirty="0">
+                <a:latin typeface="Aptos Narrow" panose="020B0004020202020204" pitchFamily="34" charset="0"/>
+              </a:rPr>
+              <a:t> </a:t>
+            </a:r>
+            <a:r>
+              <a:rPr lang="en-US" b="0" dirty="0" err="1">
+                <a:latin typeface="Aptos Narrow" panose="020B0004020202020204" pitchFamily="34" charset="0"/>
+              </a:rPr>
+              <a:t>Leitfragen</a:t>
+            </a:r>
+            <a:r>
+              <a:rPr lang="en-US" b="0" dirty="0">
+                <a:latin typeface="Aptos Narrow" panose="020B0004020202020204" pitchFamily="34" charset="0"/>
+              </a:rPr>
+              <a:t> </a:t>
+            </a:r>
+            <a:r>
+              <a:rPr lang="en-US" b="0" dirty="0" err="1">
+                <a:latin typeface="Aptos Narrow" panose="020B0004020202020204" pitchFamily="34" charset="0"/>
+              </a:rPr>
+              <a:t>sortiert</a:t>
+            </a:r>
+            <a:r>
+              <a:rPr lang="en-US" b="0" dirty="0">
+                <a:latin typeface="Aptos Narrow" panose="020B0004020202020204" pitchFamily="34" charset="0"/>
+              </a:rPr>
+              <a:t> </a:t>
+            </a:r>
+            <a:r>
+              <a:rPr lang="en-US" b="0" dirty="0" err="1">
+                <a:latin typeface="Aptos Narrow" panose="020B0004020202020204" pitchFamily="34" charset="0"/>
+              </a:rPr>
+              <a:t>wurden</a:t>
+            </a:r>
+            <a:r>
+              <a:rPr lang="en-US" b="0" dirty="0">
+                <a:latin typeface="Aptos Narrow" panose="020B0004020202020204" pitchFamily="34" charset="0"/>
+              </a:rPr>
+              <a:t>.</a:t>
+            </a:r>
+          </a:p>
+          <a:p>
+            <a:pPr marL="171450" indent="-171450">
+              <a:buFontTx/>
+              <a:buChar char="-"/>
+            </a:pPr>
+            <a:r>
+              <a:rPr lang="de-DE" b="0" dirty="0">
+                <a:latin typeface="Aptos Narrow" panose="020B0004020202020204" pitchFamily="34" charset="0"/>
+              </a:rPr>
+              <a:t>Analyse 1: Überblick über die Gesamtsammlung (bzw. die aufgenommenen Objekte) → Leitfrage 1</a:t>
+            </a:r>
+          </a:p>
+          <a:p>
+            <a:pPr marL="171450" indent="-171450">
+              <a:buFontTx/>
+              <a:buChar char="-"/>
+            </a:pPr>
+            <a:r>
+              <a:rPr lang="de-DE" b="0" dirty="0">
+                <a:latin typeface="Aptos Narrow" panose="020B0004020202020204" pitchFamily="34" charset="0"/>
+              </a:rPr>
+              <a:t>Analyse 2: Der iranisch-persische Kultur- bzw. Herkunftsraum im Kontext der Gesamtsammlung → Leitfrage 2.</a:t>
+            </a:r>
+          </a:p>
+          <a:p>
+            <a:pPr marL="171450" indent="-171450">
+              <a:buFontTx/>
+              <a:buChar char="-"/>
+            </a:pPr>
+            <a:r>
+              <a:rPr lang="de-DE" b="0" dirty="0">
+                <a:latin typeface="Aptos Narrow" panose="020B0004020202020204" pitchFamily="34" charset="0"/>
+              </a:rPr>
+              <a:t>Analyse 3: Zeitliche Schwerpunkte und historische Epochen → Leitfrage 3.</a:t>
+            </a:r>
+          </a:p>
+          <a:p>
+            <a:pPr marL="171450" indent="-171450">
+              <a:buFontTx/>
+              <a:buChar char="-"/>
+            </a:pPr>
+            <a:r>
+              <a:rPr lang="de-DE" b="0" dirty="0">
+                <a:latin typeface="Aptos Narrow" panose="020B0004020202020204" pitchFamily="34" charset="0"/>
+              </a:rPr>
+              <a:t>Analyse 4: Materielle und funktionale Zusammensetzung → Leitfrage 3.</a:t>
+            </a:r>
+          </a:p>
+          <a:p>
+            <a:pPr marL="171450" indent="-171450">
+              <a:buFontTx/>
+              <a:buChar char="-"/>
+            </a:pPr>
+            <a:r>
+              <a:rPr lang="de-DE" b="0" dirty="0">
+                <a:latin typeface="Aptos Narrow" panose="020B0004020202020204" pitchFamily="34" charset="0"/>
+              </a:rPr>
+              <a:t>Analyse 5: Institutionelle Schwerpunkte und Muster → Leitfrage 3.</a:t>
+            </a:r>
             <a:endParaRPr lang="en-US" dirty="0">
               <a:latin typeface="Aptos Narrow" panose="020B0004020202020204" pitchFamily="34" charset="0"/>
             </a:endParaRPr>
@@ -1230,7 +1610,13 @@
       </p:sp>
       <p:sp>
         <p:nvSpPr>
-          <p:cNvPr id="4" name="Slide Number Placeholder 3"/>
+          <p:cNvPr id="4" name="Slide Number Placeholder 3">
+            <a:extLst>
+              <a:ext uri="{FF2B5EF4-FFF2-40B4-BE49-F238E27FC236}">
+                <a16:creationId xmlns:a16="http://schemas.microsoft.com/office/drawing/2014/main" id="{DBD42C75-6A60-44F8-1491-323430D2F52C}"/>
+              </a:ext>
+            </a:extLst>
+          </p:cNvPr>
           <p:cNvSpPr>
             <a:spLocks noGrp="1"/>
           </p:cNvSpPr>
@@ -1258,7 +1644,7 @@
     </p:spTree>
     <p:extLst>
       <p:ext uri="{BB962C8B-B14F-4D97-AF65-F5344CB8AC3E}">
-        <p14:creationId xmlns:p14="http://schemas.microsoft.com/office/powerpoint/2010/main" val="1024086991"/>
+        <p14:creationId xmlns:p14="http://schemas.microsoft.com/office/powerpoint/2010/main" val="3984183931"/>
       </p:ext>
     </p:extLst>
   </p:cSld>
@@ -1321,6 +1707,10 @@
           <a:bodyPr/>
           <a:lstStyle/>
           <a:p>
+            <a:pPr marL="0" indent="0">
+              <a:buFontTx/>
+              <a:buNone/>
+            </a:pPr>
             <a:endParaRPr lang="en-US" dirty="0">
               <a:latin typeface="Aptos Narrow" panose="020B0004020202020204" pitchFamily="34" charset="0"/>
             </a:endParaRPr>
@@ -2084,6 +2474,41 @@
               <a:solidFill>
                 <a:srgbClr val="3D3838"/>
               </a:solidFill>
+              <a:latin typeface="Aptos Narrow" panose="020B0004020202020204" pitchFamily="34" charset="0"/>
+              <a:ea typeface="Source Sans 3" pitchFamily="34" charset="-122"/>
+              <a:cs typeface="Source Sans 3" pitchFamily="34" charset="-120"/>
+            </a:endParaRPr>
+          </a:p>
+          <a:p>
+            <a:pPr>
+              <a:lnSpc>
+                <a:spcPct val="125000"/>
+              </a:lnSpc>
+            </a:pPr>
+            <a:r>
+              <a:rPr lang="en-US" sz="1600" dirty="0" err="1">
+                <a:solidFill>
+                  <a:srgbClr val="3D3838"/>
+                </a:solidFill>
+                <a:latin typeface="Aptos Narrow" panose="020B0004020202020204" pitchFamily="34" charset="0"/>
+                <a:ea typeface="Source Sans 3" pitchFamily="34" charset="-122"/>
+              </a:rPr>
+              <a:t>Präsentationsdatum</a:t>
+            </a:r>
+            <a:r>
+              <a:rPr lang="en-US" sz="1600" dirty="0">
+                <a:solidFill>
+                  <a:srgbClr val="3D3838"/>
+                </a:solidFill>
+                <a:latin typeface="Aptos Narrow" panose="020B0004020202020204" pitchFamily="34" charset="0"/>
+                <a:ea typeface="Source Sans 3" pitchFamily="34" charset="-122"/>
+              </a:rPr>
+              <a:t>: 2. Oktober 2026</a:t>
+            </a:r>
+            <a:endParaRPr lang="en-US" sz="1600" dirty="0">
+              <a:solidFill>
+                <a:srgbClr val="3D3838"/>
+              </a:solidFill>
             </a:endParaRPr>
           </a:p>
         </p:txBody>
@@ -2097,6 +2522,790 @@
 </file>
 
 <file path=ppt/slides/slide10.xml><?xml version="1.0" encoding="utf-8"?>
+<p:sld xmlns:a="http://schemas.openxmlformats.org/drawingml/2006/main" xmlns:r="http://schemas.openxmlformats.org/officeDocument/2006/relationships" xmlns:p="http://schemas.openxmlformats.org/presentationml/2006/main">
+  <p:cSld name="Slide 9">
+    <p:spTree>
+      <p:nvGrpSpPr>
+        <p:cNvPr id="1" name=""/>
+        <p:cNvGrpSpPr/>
+        <p:nvPr/>
+      </p:nvGrpSpPr>
+      <p:grpSpPr>
+        <a:xfrm>
+          <a:off x="0" y="0"/>
+          <a:ext cx="0" cy="0"/>
+          <a:chOff x="0" y="0"/>
+          <a:chExt cx="0" cy="0"/>
+        </a:xfrm>
+      </p:grpSpPr>
+      <p:pic>
+        <p:nvPicPr>
+          <p:cNvPr id="2" name="Image 0" descr="preencoded.png"/>
+          <p:cNvPicPr>
+            <a:picLocks noChangeAspect="1"/>
+          </p:cNvPicPr>
+          <p:nvPr/>
+        </p:nvPicPr>
+        <p:blipFill>
+          <a:blip r:embed="rId3"/>
+          <a:stretch>
+            <a:fillRect/>
+          </a:stretch>
+        </p:blipFill>
+        <p:spPr>
+          <a:xfrm>
+            <a:off x="7619809" y="0"/>
+            <a:ext cx="4571886" cy="6858000"/>
+          </a:xfrm>
+          <a:prstGeom prst="rect">
+            <a:avLst/>
+          </a:prstGeom>
+        </p:spPr>
+      </p:pic>
+      <p:sp>
+        <p:nvSpPr>
+          <p:cNvPr id="3" name="Text 0"/>
+          <p:cNvSpPr/>
+          <p:nvPr/>
+        </p:nvSpPr>
+        <p:spPr>
+          <a:xfrm>
+            <a:off x="719814" y="530381"/>
+            <a:ext cx="6180181" cy="485775"/>
+          </a:xfrm>
+          <a:prstGeom prst="rect">
+            <a:avLst/>
+          </a:prstGeom>
+          <a:noFill/>
+          <a:ln/>
+        </p:spPr>
+        <p:txBody>
+          <a:bodyPr wrap="none" lIns="0" tIns="0" rIns="0" bIns="0" rtlCol="0" anchor="t"/>
+          <a:lstStyle/>
+          <a:p>
+            <a:pPr marL="0" indent="0" algn="l">
+              <a:lnSpc>
+                <a:spcPct val="104000"/>
+              </a:lnSpc>
+              <a:buNone/>
+            </a:pPr>
+            <a:r>
+              <a:rPr lang="en-US" sz="3600" b="1" kern="0" spc="-31" dirty="0">
+                <a:solidFill>
+                  <a:srgbClr val="000000"/>
+                </a:solidFill>
+                <a:latin typeface="Aptos Narrow" panose="020B0004020202020204" pitchFamily="34" charset="0"/>
+                <a:ea typeface="Montserrat Bold" pitchFamily="34" charset="-122"/>
+                <a:cs typeface="Montserrat Bold" pitchFamily="34" charset="-120"/>
+              </a:rPr>
+              <a:t>Iran im Kontext der Sammlung</a:t>
+            </a:r>
+            <a:endParaRPr lang="en-US" sz="3600" dirty="0"/>
+          </a:p>
+        </p:txBody>
+      </p:sp>
+      <p:pic>
+        <p:nvPicPr>
+          <p:cNvPr id="4" name="Image 1" descr="preencoded.png"/>
+          <p:cNvPicPr>
+            <a:picLocks noChangeAspect="1"/>
+          </p:cNvPicPr>
+          <p:nvPr/>
+        </p:nvPicPr>
+        <p:blipFill>
+          <a:blip>
+            <a:extLst>
+              <a:ext uri="{96DAC541-7B7A-43D3-8B79-37D633B846F1}">
+                <asvg:svgBlip xmlns:asvg="http://schemas.microsoft.com/office/drawing/2016/SVG/main" r:embed="rId4"/>
+              </a:ext>
+            </a:extLst>
+          </a:blip>
+          <a:stretch>
+            <a:fillRect/>
+          </a:stretch>
+        </p:blipFill>
+        <p:spPr>
+          <a:xfrm>
+            <a:off x="719814" y="1333962"/>
+            <a:ext cx="6180181" cy="1197366"/>
+          </a:xfrm>
+          <a:prstGeom prst="rect">
+            <a:avLst/>
+          </a:prstGeom>
+        </p:spPr>
+      </p:pic>
+      <p:sp>
+        <p:nvSpPr>
+          <p:cNvPr id="5" name="Text 1"/>
+          <p:cNvSpPr/>
+          <p:nvPr/>
+        </p:nvSpPr>
+        <p:spPr>
+          <a:xfrm>
+            <a:off x="986010" y="1455601"/>
+            <a:ext cx="5723985" cy="309715"/>
+          </a:xfrm>
+          <a:prstGeom prst="rect">
+            <a:avLst/>
+          </a:prstGeom>
+          <a:noFill/>
+          <a:ln/>
+        </p:spPr>
+        <p:txBody>
+          <a:bodyPr wrap="none" lIns="0" tIns="0" rIns="0" bIns="0" rtlCol="0" anchor="t"/>
+          <a:lstStyle/>
+          <a:p>
+            <a:pPr marL="0" indent="0" algn="l">
+              <a:lnSpc>
+                <a:spcPct val="104000"/>
+              </a:lnSpc>
+              <a:buNone/>
+            </a:pPr>
+            <a:r>
+              <a:rPr lang="en-US" b="1" kern="0" spc="-15" dirty="0">
+                <a:solidFill>
+                  <a:srgbClr val="3D3838"/>
+                </a:solidFill>
+                <a:latin typeface="Aptos Narrow" panose="020B0004020202020204" pitchFamily="34" charset="0"/>
+                <a:ea typeface="Montserrat Bold" pitchFamily="34" charset="-122"/>
+                <a:cs typeface="Montserrat Bold" pitchFamily="34" charset="-120"/>
+              </a:rPr>
+              <a:t>9093 Objekte</a:t>
+            </a:r>
+            <a:endParaRPr lang="en-US" dirty="0"/>
+          </a:p>
+        </p:txBody>
+      </p:sp>
+      <p:sp>
+        <p:nvSpPr>
+          <p:cNvPr id="6" name="Text 2"/>
+          <p:cNvSpPr/>
+          <p:nvPr/>
+        </p:nvSpPr>
+        <p:spPr>
+          <a:xfrm>
+            <a:off x="986011" y="1862749"/>
+            <a:ext cx="5723985" cy="533747"/>
+          </a:xfrm>
+          <a:prstGeom prst="rect">
+            <a:avLst/>
+          </a:prstGeom>
+          <a:noFill/>
+          <a:ln/>
+        </p:spPr>
+        <p:txBody>
+          <a:bodyPr wrap="none" lIns="0" tIns="0" rIns="0" bIns="0" rtlCol="0" anchor="t"/>
+          <a:lstStyle/>
+          <a:p>
+            <a:pPr marL="0" indent="0" algn="l">
+              <a:lnSpc>
+                <a:spcPct val="114000"/>
+              </a:lnSpc>
+              <a:buNone/>
+            </a:pPr>
+            <a:r>
+              <a:rPr lang="en-US" sz="1600" b="1" dirty="0">
+                <a:solidFill>
+                  <a:srgbClr val="3D3838"/>
+                </a:solidFill>
+                <a:latin typeface="Aptos Narrow" panose="020B0004020202020204" pitchFamily="34" charset="0"/>
+                <a:ea typeface="Source Sans 3 Bold" pitchFamily="34" charset="-122"/>
+                <a:cs typeface="Source Sans 3 Bold" pitchFamily="34" charset="-120"/>
+              </a:rPr>
+              <a:t>2,03 %</a:t>
+            </a:r>
+            <a:r>
+              <a:rPr lang="en-US" sz="1600" dirty="0">
+                <a:solidFill>
+                  <a:srgbClr val="3D3838"/>
+                </a:solidFill>
+                <a:latin typeface="Aptos Narrow" panose="020B0004020202020204" pitchFamily="34" charset="0"/>
+                <a:ea typeface="Source Sans 3" pitchFamily="34" charset="-122"/>
+                <a:cs typeface="Source Sans 3" pitchFamily="34" charset="-120"/>
+              </a:rPr>
+              <a:t> der Gesamtsammlung – ein kleiner, aber historisch </a:t>
+            </a:r>
+            <a:r>
+              <a:rPr lang="en-US" sz="1600" dirty="0" err="1">
+                <a:solidFill>
+                  <a:srgbClr val="3D3838"/>
+                </a:solidFill>
+                <a:latin typeface="Aptos Narrow" panose="020B0004020202020204" pitchFamily="34" charset="0"/>
+                <a:ea typeface="Source Sans 3" pitchFamily="34" charset="-122"/>
+                <a:cs typeface="Source Sans 3" pitchFamily="34" charset="-120"/>
+              </a:rPr>
+              <a:t>tiefer</a:t>
+            </a:r>
+            <a:r>
+              <a:rPr lang="en-US" sz="1600" dirty="0">
+                <a:solidFill>
+                  <a:srgbClr val="3D3838"/>
+                </a:solidFill>
+                <a:latin typeface="Aptos Narrow" panose="020B0004020202020204" pitchFamily="34" charset="0"/>
+                <a:ea typeface="Source Sans 3" pitchFamily="34" charset="-122"/>
+                <a:cs typeface="Source Sans 3" pitchFamily="34" charset="-120"/>
+              </a:rPr>
+              <a:t> </a:t>
+            </a:r>
+          </a:p>
+          <a:p>
+            <a:pPr marL="0" indent="0" algn="l">
+              <a:lnSpc>
+                <a:spcPct val="114000"/>
+              </a:lnSpc>
+              <a:buNone/>
+            </a:pPr>
+            <a:r>
+              <a:rPr lang="en-US" sz="1600" dirty="0" err="1">
+                <a:solidFill>
+                  <a:srgbClr val="3D3838"/>
+                </a:solidFill>
+                <a:latin typeface="Aptos Narrow" panose="020B0004020202020204" pitchFamily="34" charset="0"/>
+                <a:ea typeface="Source Sans 3" pitchFamily="34" charset="-122"/>
+                <a:cs typeface="Source Sans 3" pitchFamily="34" charset="-120"/>
+              </a:rPr>
+              <a:t>Teilbestand</a:t>
+            </a:r>
+            <a:endParaRPr lang="en-US" sz="1600" dirty="0"/>
+          </a:p>
+        </p:txBody>
+      </p:sp>
+      <p:pic>
+        <p:nvPicPr>
+          <p:cNvPr id="7" name="Image 2" descr="preencoded.png"/>
+          <p:cNvPicPr>
+            <a:picLocks noChangeAspect="1"/>
+          </p:cNvPicPr>
+          <p:nvPr/>
+        </p:nvPicPr>
+        <p:blipFill>
+          <a:blip>
+            <a:extLst>
+              <a:ext uri="{96DAC541-7B7A-43D3-8B79-37D633B846F1}">
+                <asvg:svgBlip xmlns:asvg="http://schemas.microsoft.com/office/drawing/2016/SVG/main" r:embed="rId4"/>
+              </a:ext>
+            </a:extLst>
+          </a:blip>
+          <a:stretch>
+            <a:fillRect/>
+          </a:stretch>
+        </p:blipFill>
+        <p:spPr>
+          <a:xfrm>
+            <a:off x="719814" y="2622659"/>
+            <a:ext cx="6180181" cy="1182876"/>
+          </a:xfrm>
+          <a:prstGeom prst="rect">
+            <a:avLst/>
+          </a:prstGeom>
+        </p:spPr>
+      </p:pic>
+      <p:sp>
+        <p:nvSpPr>
+          <p:cNvPr id="8" name="Text 3"/>
+          <p:cNvSpPr/>
+          <p:nvPr/>
+        </p:nvSpPr>
+        <p:spPr>
+          <a:xfrm>
+            <a:off x="986011" y="2750244"/>
+            <a:ext cx="5723985" cy="242788"/>
+          </a:xfrm>
+          <a:prstGeom prst="rect">
+            <a:avLst/>
+          </a:prstGeom>
+          <a:noFill/>
+          <a:ln/>
+        </p:spPr>
+        <p:txBody>
+          <a:bodyPr wrap="none" lIns="0" tIns="0" rIns="0" bIns="0" rtlCol="0" anchor="t"/>
+          <a:lstStyle/>
+          <a:p>
+            <a:pPr marL="0" indent="0" algn="l">
+              <a:lnSpc>
+                <a:spcPct val="104000"/>
+              </a:lnSpc>
+              <a:buNone/>
+            </a:pPr>
+            <a:r>
+              <a:rPr lang="en-US" b="1" kern="0" spc="-15" dirty="0">
+                <a:solidFill>
+                  <a:srgbClr val="3D3838"/>
+                </a:solidFill>
+                <a:latin typeface="Aptos Narrow" panose="020B0004020202020204" pitchFamily="34" charset="0"/>
+                <a:ea typeface="Montserrat Bold" pitchFamily="34" charset="-122"/>
+                <a:cs typeface="Montserrat Bold" pitchFamily="34" charset="-120"/>
+              </a:rPr>
+              <a:t>Historische Tiefe</a:t>
+            </a:r>
+            <a:endParaRPr lang="en-US" dirty="0"/>
+          </a:p>
+        </p:txBody>
+      </p:sp>
+      <p:sp>
+        <p:nvSpPr>
+          <p:cNvPr id="9" name="Text 4"/>
+          <p:cNvSpPr/>
+          <p:nvPr/>
+        </p:nvSpPr>
+        <p:spPr>
+          <a:xfrm>
+            <a:off x="997620" y="3090465"/>
+            <a:ext cx="5731426" cy="668579"/>
+          </a:xfrm>
+          <a:prstGeom prst="rect">
+            <a:avLst/>
+          </a:prstGeom>
+          <a:noFill/>
+          <a:ln/>
+        </p:spPr>
+        <p:txBody>
+          <a:bodyPr wrap="none" lIns="0" tIns="0" rIns="0" bIns="0" rtlCol="0" anchor="t"/>
+          <a:lstStyle/>
+          <a:p>
+            <a:pPr marL="0" indent="0" algn="l">
+              <a:lnSpc>
+                <a:spcPct val="122000"/>
+              </a:lnSpc>
+              <a:buNone/>
+            </a:pPr>
+            <a:r>
+              <a:rPr lang="de-DE" sz="1600" dirty="0">
+                <a:solidFill>
+                  <a:srgbClr val="3D3838"/>
+                </a:solidFill>
+                <a:latin typeface="Aptos Narrow" panose="020B0004020202020204" pitchFamily="34" charset="0"/>
+                <a:ea typeface="Source Sans 3" pitchFamily="34" charset="-122"/>
+                <a:cs typeface="Source Sans 3" pitchFamily="34" charset="-120"/>
+              </a:rPr>
+              <a:t>Das älteste Objekt weist einen Datierungsbeginn von 6000 v. Chr. auf </a:t>
+            </a:r>
+            <a:r>
+              <a:rPr lang="en-US" sz="1600" dirty="0">
+                <a:solidFill>
+                  <a:srgbClr val="3D3838"/>
+                </a:solidFill>
+                <a:latin typeface="Aptos Narrow" panose="020B0004020202020204" pitchFamily="34" charset="0"/>
+                <a:ea typeface="Source Sans 3" pitchFamily="34" charset="-122"/>
+                <a:cs typeface="Source Sans 3" pitchFamily="34" charset="-120"/>
+              </a:rPr>
+              <a:t>– </a:t>
+            </a:r>
+          </a:p>
+          <a:p>
+            <a:pPr marL="0" indent="0" algn="l">
+              <a:lnSpc>
+                <a:spcPct val="122000"/>
+              </a:lnSpc>
+              <a:buNone/>
+            </a:pPr>
+            <a:r>
+              <a:rPr lang="en-US" sz="1600" b="1" dirty="0">
+                <a:solidFill>
+                  <a:srgbClr val="3D3838"/>
+                </a:solidFill>
+                <a:latin typeface="Aptos Narrow" panose="020B0004020202020204" pitchFamily="34" charset="0"/>
+                <a:ea typeface="Source Sans 3" pitchFamily="34" charset="-122"/>
+                <a:cs typeface="Source Sans 3" pitchFamily="34" charset="-120"/>
+              </a:rPr>
+              <a:t>96,76</a:t>
+            </a:r>
+            <a:r>
+              <a:rPr lang="en-US" sz="1600" b="1" dirty="0">
+                <a:solidFill>
+                  <a:srgbClr val="3D3838"/>
+                </a:solidFill>
+                <a:latin typeface="Aptos Narrow" panose="020B0004020202020204" pitchFamily="34" charset="0"/>
+                <a:ea typeface="Source Sans 3 Bold" pitchFamily="34" charset="-122"/>
+                <a:cs typeface="Source Sans 3 Bold" pitchFamily="34" charset="-120"/>
+              </a:rPr>
+              <a:t> %</a:t>
+            </a:r>
+            <a:r>
+              <a:rPr lang="en-US" sz="1600" dirty="0">
+                <a:solidFill>
+                  <a:srgbClr val="3D3838"/>
+                </a:solidFill>
+                <a:latin typeface="Aptos Narrow" panose="020B0004020202020204" pitchFamily="34" charset="0"/>
+                <a:ea typeface="Source Sans 3" pitchFamily="34" charset="-122"/>
+                <a:cs typeface="Source Sans 3" pitchFamily="34" charset="-120"/>
+              </a:rPr>
+              <a:t> </a:t>
+            </a:r>
+            <a:r>
+              <a:rPr lang="en-US" sz="1600" dirty="0" err="1">
+                <a:solidFill>
+                  <a:srgbClr val="3D3838"/>
+                </a:solidFill>
+                <a:latin typeface="Aptos Narrow" panose="020B0004020202020204" pitchFamily="34" charset="0"/>
+                <a:ea typeface="Source Sans 3" pitchFamily="34" charset="-122"/>
+                <a:cs typeface="Source Sans 3" pitchFamily="34" charset="-120"/>
+              </a:rPr>
+              <a:t>stammen</a:t>
+            </a:r>
+            <a:r>
+              <a:rPr lang="en-US" sz="1600" dirty="0">
+                <a:solidFill>
+                  <a:srgbClr val="3D3838"/>
+                </a:solidFill>
+                <a:latin typeface="Aptos Narrow" panose="020B0004020202020204" pitchFamily="34" charset="0"/>
+                <a:ea typeface="Source Sans 3" pitchFamily="34" charset="-122"/>
+                <a:cs typeface="Source Sans 3" pitchFamily="34" charset="-120"/>
+              </a:rPr>
+              <a:t> </a:t>
+            </a:r>
+            <a:r>
+              <a:rPr lang="en-US" sz="1600" dirty="0" err="1">
+                <a:solidFill>
+                  <a:srgbClr val="3D3838"/>
+                </a:solidFill>
+                <a:latin typeface="Aptos Narrow" panose="020B0004020202020204" pitchFamily="34" charset="0"/>
+                <a:ea typeface="Source Sans 3" pitchFamily="34" charset="-122"/>
+                <a:cs typeface="Source Sans 3" pitchFamily="34" charset="-120"/>
+              </a:rPr>
+              <a:t>aus</a:t>
+            </a:r>
+            <a:r>
+              <a:rPr lang="en-US" sz="1600" dirty="0">
+                <a:solidFill>
+                  <a:srgbClr val="3D3838"/>
+                </a:solidFill>
+                <a:latin typeface="Aptos Narrow" panose="020B0004020202020204" pitchFamily="34" charset="0"/>
+                <a:ea typeface="Source Sans 3" pitchFamily="34" charset="-122"/>
+                <a:cs typeface="Source Sans 3" pitchFamily="34" charset="-120"/>
+              </a:rPr>
+              <a:t> der Zeit </a:t>
+            </a:r>
+            <a:r>
+              <a:rPr lang="en-US" sz="1600" dirty="0" err="1">
+                <a:solidFill>
+                  <a:srgbClr val="3D3838"/>
+                </a:solidFill>
+                <a:latin typeface="Aptos Narrow" panose="020B0004020202020204" pitchFamily="34" charset="0"/>
+                <a:ea typeface="Source Sans 3" pitchFamily="34" charset="-122"/>
+                <a:cs typeface="Source Sans 3" pitchFamily="34" charset="-120"/>
+              </a:rPr>
+              <a:t>nach</a:t>
+            </a:r>
+            <a:r>
+              <a:rPr lang="en-US" sz="1600" dirty="0">
+                <a:solidFill>
+                  <a:srgbClr val="3D3838"/>
+                </a:solidFill>
+                <a:latin typeface="Aptos Narrow" panose="020B0004020202020204" pitchFamily="34" charset="0"/>
+                <a:ea typeface="Source Sans 3" pitchFamily="34" charset="-122"/>
+                <a:cs typeface="Source Sans 3" pitchFamily="34" charset="-120"/>
+              </a:rPr>
+              <a:t> 1000 v. Chr.</a:t>
+            </a:r>
+            <a:endParaRPr lang="en-US" sz="1600" dirty="0"/>
+          </a:p>
+        </p:txBody>
+      </p:sp>
+      <p:pic>
+        <p:nvPicPr>
+          <p:cNvPr id="10" name="Image 3" descr="preencoded.png"/>
+          <p:cNvPicPr>
+            <a:picLocks noChangeAspect="1"/>
+          </p:cNvPicPr>
+          <p:nvPr/>
+        </p:nvPicPr>
+        <p:blipFill>
+          <a:blip>
+            <a:extLst>
+              <a:ext uri="{96DAC541-7B7A-43D3-8B79-37D633B846F1}">
+                <asvg:svgBlip xmlns:asvg="http://schemas.microsoft.com/office/drawing/2016/SVG/main" r:embed="rId4"/>
+              </a:ext>
+            </a:extLst>
+          </a:blip>
+          <a:stretch>
+            <a:fillRect/>
+          </a:stretch>
+        </p:blipFill>
+        <p:spPr>
+          <a:xfrm>
+            <a:off x="719814" y="3902968"/>
+            <a:ext cx="6180181" cy="970161"/>
+          </a:xfrm>
+          <a:prstGeom prst="rect">
+            <a:avLst/>
+          </a:prstGeom>
+        </p:spPr>
+      </p:pic>
+      <p:sp>
+        <p:nvSpPr>
+          <p:cNvPr id="11" name="Text 5"/>
+          <p:cNvSpPr/>
+          <p:nvPr/>
+        </p:nvSpPr>
+        <p:spPr>
+          <a:xfrm>
+            <a:off x="986011" y="4024651"/>
+            <a:ext cx="5723985" cy="242788"/>
+          </a:xfrm>
+          <a:prstGeom prst="rect">
+            <a:avLst/>
+          </a:prstGeom>
+          <a:noFill/>
+          <a:ln/>
+        </p:spPr>
+        <p:txBody>
+          <a:bodyPr wrap="none" lIns="0" tIns="0" rIns="0" bIns="0" rtlCol="0" anchor="t"/>
+          <a:lstStyle/>
+          <a:p>
+            <a:pPr marL="0" indent="0" algn="l">
+              <a:lnSpc>
+                <a:spcPct val="104000"/>
+              </a:lnSpc>
+              <a:buNone/>
+            </a:pPr>
+            <a:r>
+              <a:rPr lang="en-US" b="1" kern="0" spc="-15" dirty="0">
+                <a:solidFill>
+                  <a:srgbClr val="3D3838"/>
+                </a:solidFill>
+                <a:latin typeface="Aptos Narrow" panose="020B0004020202020204" pitchFamily="34" charset="0"/>
+                <a:ea typeface="Montserrat Bold" pitchFamily="34" charset="-122"/>
+                <a:cs typeface="Montserrat Bold" pitchFamily="34" charset="-120"/>
+              </a:rPr>
+              <a:t>Nishapur</a:t>
+            </a:r>
+            <a:endParaRPr lang="en-US" dirty="0"/>
+          </a:p>
+        </p:txBody>
+      </p:sp>
+      <p:sp>
+        <p:nvSpPr>
+          <p:cNvPr id="12" name="Text 6"/>
+          <p:cNvSpPr/>
+          <p:nvPr/>
+        </p:nvSpPr>
+        <p:spPr>
+          <a:xfrm>
+            <a:off x="986011" y="4364872"/>
+            <a:ext cx="5723985" cy="249932"/>
+          </a:xfrm>
+          <a:prstGeom prst="rect">
+            <a:avLst/>
+          </a:prstGeom>
+          <a:noFill/>
+          <a:ln/>
+        </p:spPr>
+        <p:txBody>
+          <a:bodyPr wrap="none" lIns="0" tIns="0" rIns="0" bIns="0" rtlCol="0" anchor="t"/>
+          <a:lstStyle/>
+          <a:p>
+            <a:pPr marL="0" indent="0" algn="l">
+              <a:lnSpc>
+                <a:spcPct val="122000"/>
+              </a:lnSpc>
+              <a:buNone/>
+            </a:pPr>
+            <a:r>
+              <a:rPr lang="en-US" sz="1600" dirty="0">
+                <a:solidFill>
+                  <a:srgbClr val="3D3838"/>
+                </a:solidFill>
+                <a:latin typeface="Aptos Narrow" panose="020B0004020202020204" pitchFamily="34" charset="0"/>
+                <a:ea typeface="Source Sans 3" pitchFamily="34" charset="-122"/>
+                <a:cs typeface="Source Sans 3" pitchFamily="34" charset="-120"/>
+              </a:rPr>
+              <a:t>Mit </a:t>
+            </a:r>
+            <a:r>
+              <a:rPr lang="en-US" sz="1600" b="1" dirty="0">
+                <a:solidFill>
+                  <a:srgbClr val="3D3838"/>
+                </a:solidFill>
+                <a:latin typeface="Aptos Narrow" panose="020B0004020202020204" pitchFamily="34" charset="0"/>
+                <a:ea typeface="Source Sans 3 Bold" pitchFamily="34" charset="-122"/>
+                <a:cs typeface="Source Sans 3 Bold" pitchFamily="34" charset="-120"/>
+              </a:rPr>
+              <a:t>3822 Objekten</a:t>
+            </a:r>
+            <a:r>
+              <a:rPr lang="en-US" sz="1600" dirty="0">
+                <a:solidFill>
+                  <a:srgbClr val="3D3838"/>
+                </a:solidFill>
+                <a:latin typeface="Aptos Narrow" panose="020B0004020202020204" pitchFamily="34" charset="0"/>
+                <a:ea typeface="Source Sans 3" pitchFamily="34" charset="-122"/>
+                <a:cs typeface="Source Sans 3" pitchFamily="34" charset="-120"/>
+              </a:rPr>
+              <a:t> das geografisch dominante </a:t>
+            </a:r>
+            <a:r>
+              <a:rPr lang="en-US" sz="1600" dirty="0" err="1">
+                <a:solidFill>
+                  <a:srgbClr val="3D3838"/>
+                </a:solidFill>
+                <a:latin typeface="Aptos Narrow" panose="020B0004020202020204" pitchFamily="34" charset="0"/>
+                <a:ea typeface="Source Sans 3" pitchFamily="34" charset="-122"/>
+                <a:cs typeface="Source Sans 3" pitchFamily="34" charset="-120"/>
+              </a:rPr>
+              <a:t>historische</a:t>
+            </a:r>
+            <a:r>
+              <a:rPr lang="en-US" sz="1600" dirty="0">
+                <a:solidFill>
+                  <a:srgbClr val="3D3838"/>
+                </a:solidFill>
+                <a:latin typeface="Aptos Narrow" panose="020B0004020202020204" pitchFamily="34" charset="0"/>
+                <a:ea typeface="Source Sans 3" pitchFamily="34" charset="-122"/>
+                <a:cs typeface="Source Sans 3" pitchFamily="34" charset="-120"/>
+              </a:rPr>
+              <a:t> Zentrum</a:t>
+            </a:r>
+            <a:endParaRPr lang="en-US" sz="1600" dirty="0"/>
+          </a:p>
+        </p:txBody>
+      </p:sp>
+      <p:sp>
+        <p:nvSpPr>
+          <p:cNvPr id="13" name="Shape 7"/>
+          <p:cNvSpPr/>
+          <p:nvPr/>
+        </p:nvSpPr>
+        <p:spPr>
+          <a:xfrm>
+            <a:off x="719814" y="5055791"/>
+            <a:ext cx="6180181" cy="893762"/>
+          </a:xfrm>
+          <a:prstGeom prst="roundRect">
+            <a:avLst>
+              <a:gd name="adj" fmla="val 2870"/>
+            </a:avLst>
+          </a:prstGeom>
+          <a:solidFill>
+            <a:srgbClr val="FDECEA"/>
+          </a:solidFill>
+          <a:ln/>
+        </p:spPr>
+        <p:txBody>
+          <a:bodyPr/>
+          <a:lstStyle/>
+          <a:p>
+            <a:endParaRPr lang="de-DE"/>
+          </a:p>
+        </p:txBody>
+      </p:sp>
+      <p:pic>
+        <p:nvPicPr>
+          <p:cNvPr id="14" name="Image 4" descr="preencoded.png"/>
+          <p:cNvPicPr>
+            <a:picLocks noChangeAspect="1"/>
+          </p:cNvPicPr>
+          <p:nvPr/>
+        </p:nvPicPr>
+        <p:blipFill>
+          <a:blip r:embed="rId5"/>
+          <a:stretch>
+            <a:fillRect/>
+          </a:stretch>
+        </p:blipFill>
+        <p:spPr>
+          <a:xfrm>
+            <a:off x="890764" y="5374484"/>
+            <a:ext cx="213712" cy="170954"/>
+          </a:xfrm>
+          <a:prstGeom prst="rect">
+            <a:avLst/>
+          </a:prstGeom>
+        </p:spPr>
+      </p:pic>
+      <p:sp>
+        <p:nvSpPr>
+          <p:cNvPr id="15" name="Text 8"/>
+          <p:cNvSpPr/>
+          <p:nvPr/>
+        </p:nvSpPr>
+        <p:spPr>
+          <a:xfrm>
+            <a:off x="1275425" y="5213041"/>
+            <a:ext cx="5453621" cy="808230"/>
+          </a:xfrm>
+          <a:prstGeom prst="rect">
+            <a:avLst/>
+          </a:prstGeom>
+          <a:noFill/>
+          <a:ln/>
+        </p:spPr>
+        <p:txBody>
+          <a:bodyPr wrap="square" lIns="0" tIns="0" rIns="0" bIns="0" rtlCol="0" anchor="t">
+            <a:normAutofit/>
+          </a:bodyPr>
+          <a:lstStyle/>
+          <a:p>
+            <a:pPr marL="0" indent="0" algn="l">
+              <a:lnSpc>
+                <a:spcPct val="114000"/>
+              </a:lnSpc>
+              <a:buNone/>
+            </a:pPr>
+            <a:r>
+              <a:rPr lang="en-US" sz="1600" dirty="0">
+                <a:solidFill>
+                  <a:srgbClr val="000000"/>
+                </a:solidFill>
+                <a:latin typeface="Aptos Narrow" panose="020B0004020202020204" pitchFamily="34" charset="0"/>
+                <a:ea typeface="Source Sans 3" pitchFamily="34" charset="-122"/>
+                <a:cs typeface="Source Sans 3" pitchFamily="34" charset="-120"/>
+              </a:rPr>
+              <a:t>Ein kleiner, aber historisch tiefer und besonders aussagekräftiger Teilbestand.</a:t>
+            </a:r>
+            <a:endParaRPr lang="en-US" sz="1600" dirty="0"/>
+          </a:p>
+        </p:txBody>
+      </p:sp>
+      <p:sp>
+        <p:nvSpPr>
+          <p:cNvPr id="17" name="Textfeld 16">
+            <a:extLst>
+              <a:ext uri="{FF2B5EF4-FFF2-40B4-BE49-F238E27FC236}">
+                <a16:creationId xmlns:a16="http://schemas.microsoft.com/office/drawing/2014/main" id="{FF715197-BFF4-E21D-360E-BB78B0010C73}"/>
+              </a:ext>
+            </a:extLst>
+          </p:cNvPr>
+          <p:cNvSpPr txBox="1"/>
+          <p:nvPr/>
+        </p:nvSpPr>
+        <p:spPr>
+          <a:xfrm>
+            <a:off x="11764652" y="6454588"/>
+            <a:ext cx="490101" cy="338554"/>
+          </a:xfrm>
+          <a:prstGeom prst="rect">
+            <a:avLst/>
+          </a:prstGeom>
+          <a:noFill/>
+        </p:spPr>
+        <p:txBody>
+          <a:bodyPr wrap="square" rtlCol="0">
+            <a:spAutoFit/>
+          </a:bodyPr>
+          <a:lstStyle/>
+          <a:p>
+            <a:r>
+              <a:rPr lang="de-DE" sz="1600" dirty="0">
+                <a:solidFill>
+                  <a:schemeClr val="bg1"/>
+                </a:solidFill>
+                <a:latin typeface="Aptos Narrow" panose="020B0004020202020204" pitchFamily="34" charset="0"/>
+              </a:rPr>
+              <a:t>9</a:t>
+            </a:r>
+          </a:p>
+        </p:txBody>
+      </p:sp>
+    </p:spTree>
+  </p:cSld>
+  <p:clrMapOvr>
+    <a:masterClrMapping/>
+  </p:clrMapOvr>
+</p:sld>
+</file>
+
+<file path=ppt/slides/slide11.xml><?xml version="1.0" encoding="utf-8"?>
 <p:sld xmlns:a="http://schemas.openxmlformats.org/drawingml/2006/main" xmlns:r="http://schemas.openxmlformats.org/officeDocument/2006/relationships" xmlns:p="http://schemas.openxmlformats.org/presentationml/2006/main">
   <p:cSld name="Slide 10">
     <p:spTree>
@@ -2362,7 +3571,7 @@
                 <a:ea typeface="Source Sans 3" pitchFamily="34" charset="-122"/>
                 <a:cs typeface="Source Sans 3" pitchFamily="34" charset="-120"/>
               </a:rPr>
-              <a:t>3.836 </a:t>
+              <a:t>3836 </a:t>
             </a:r>
             <a:r>
               <a:rPr lang="en-US" sz="1600" b="1" dirty="0" err="1">
@@ -2498,7 +3707,7 @@
                 </a:solidFill>
                 <a:latin typeface="Aptos Narrow" panose="020B0004020202020204" pitchFamily="34" charset="0"/>
               </a:rPr>
-              <a:t>2.525</a:t>
+              <a:t>2525</a:t>
             </a:r>
             <a:endParaRPr lang="en-US" sz="1600" dirty="0"/>
           </a:p>
@@ -2700,7 +3909,7 @@
                 <a:ea typeface="Source Sans 3" pitchFamily="34" charset="-122"/>
                 <a:cs typeface="Source Sans 3" pitchFamily="34" charset="-120"/>
               </a:rPr>
-              <a:t>2.126</a:t>
+              <a:t>2126</a:t>
             </a:r>
             <a:r>
               <a:rPr lang="en-US" sz="1600" dirty="0">
@@ -2711,7 +3920,29 @@
                 <a:ea typeface="Source Sans 3" pitchFamily="34" charset="-122"/>
                 <a:cs typeface="Source Sans 3" pitchFamily="34" charset="-120"/>
               </a:rPr>
-              <a:t> und Stuck mit </a:t>
+              <a:t> und Stuck </a:t>
+            </a:r>
+            <a:r>
+              <a:rPr lang="en-US" sz="1600" dirty="0" err="1">
+                <a:solidFill>
+                  <a:srgbClr val="3D3838"/>
+                </a:solidFill>
+                <a:latin typeface="Aptos Narrow" panose="020B0004020202020204" pitchFamily="34" charset="0"/>
+                <a:ea typeface="Source Sans 3" pitchFamily="34" charset="-122"/>
+                <a:cs typeface="Source Sans 3" pitchFamily="34" charset="-120"/>
+              </a:rPr>
+              <a:t>mit</a:t>
+            </a:r>
+            <a:r>
+              <a:rPr lang="en-US" sz="1600" dirty="0">
+                <a:solidFill>
+                  <a:srgbClr val="3D3838"/>
+                </a:solidFill>
+                <a:latin typeface="Aptos Narrow" panose="020B0004020202020204" pitchFamily="34" charset="0"/>
+                <a:ea typeface="Source Sans 3" pitchFamily="34" charset="-122"/>
+                <a:cs typeface="Source Sans 3" pitchFamily="34" charset="-120"/>
+              </a:rPr>
+              <a:t> </a:t>
             </a:r>
             <a:r>
               <a:rPr lang="en-US" sz="1600" b="1" dirty="0">
@@ -2722,7 +3953,7 @@
                 <a:ea typeface="Source Sans 3 Bold" pitchFamily="34" charset="-122"/>
                 <a:cs typeface="Source Sans 3 Bold" pitchFamily="34" charset="-120"/>
               </a:rPr>
-              <a:t>1.745 Objekten</a:t>
+              <a:t>1745 Objekten</a:t>
             </a:r>
             <a:r>
               <a:rPr lang="en-US" sz="1600" dirty="0">
@@ -3222,7 +4453,7 @@
                 <a:ea typeface="Source Sans 3" pitchFamily="34" charset="-122"/>
                 <a:cs typeface="Source Sans 3" pitchFamily="34" charset="-120"/>
               </a:rPr>
-              <a:t>Zeitlicher</a:t>
+              <a:t>Zeitliche</a:t>
             </a:r>
             <a:r>
               <a:rPr lang="en-US" sz="1600" dirty="0">
@@ -3233,7 +4464,7 @@
                 <a:ea typeface="Source Sans 3" pitchFamily="34" charset="-122"/>
                 <a:cs typeface="Source Sans 3" pitchFamily="34" charset="-120"/>
               </a:rPr>
-              <a:t>, materieller und räumlicher </a:t>
+              <a:t>, </a:t>
             </a:r>
             <a:r>
               <a:rPr lang="en-US" sz="1600" dirty="0" err="1">
@@ -3244,7 +4475,51 @@
                 <a:ea typeface="Source Sans 3" pitchFamily="34" charset="-122"/>
                 <a:cs typeface="Source Sans 3" pitchFamily="34" charset="-120"/>
               </a:rPr>
-              <a:t>Schwerpunkt</a:t>
+              <a:t>materielle</a:t>
+            </a:r>
+            <a:r>
+              <a:rPr lang="en-US" sz="1600" dirty="0">
+                <a:solidFill>
+                  <a:srgbClr val="000000"/>
+                </a:solidFill>
+                <a:latin typeface="Aptos Narrow" panose="020B0004020202020204" pitchFamily="34" charset="0"/>
+                <a:ea typeface="Source Sans 3" pitchFamily="34" charset="-122"/>
+                <a:cs typeface="Source Sans 3" pitchFamily="34" charset="-120"/>
+              </a:rPr>
+              <a:t> und </a:t>
+            </a:r>
+            <a:r>
+              <a:rPr lang="en-US" sz="1600" dirty="0" err="1">
+                <a:solidFill>
+                  <a:srgbClr val="000000"/>
+                </a:solidFill>
+                <a:latin typeface="Aptos Narrow" panose="020B0004020202020204" pitchFamily="34" charset="0"/>
+                <a:ea typeface="Source Sans 3" pitchFamily="34" charset="-122"/>
+                <a:cs typeface="Source Sans 3" pitchFamily="34" charset="-120"/>
+              </a:rPr>
+              <a:t>räumliche</a:t>
+            </a:r>
+            <a:r>
+              <a:rPr lang="en-US" sz="1600" dirty="0">
+                <a:solidFill>
+                  <a:srgbClr val="000000"/>
+                </a:solidFill>
+                <a:latin typeface="Aptos Narrow" panose="020B0004020202020204" pitchFamily="34" charset="0"/>
+                <a:ea typeface="Source Sans 3" pitchFamily="34" charset="-122"/>
+                <a:cs typeface="Source Sans 3" pitchFamily="34" charset="-120"/>
+              </a:rPr>
+              <a:t> </a:t>
+            </a:r>
+            <a:r>
+              <a:rPr lang="en-US" sz="1600" dirty="0" err="1">
+                <a:solidFill>
+                  <a:srgbClr val="000000"/>
+                </a:solidFill>
+                <a:latin typeface="Aptos Narrow" panose="020B0004020202020204" pitchFamily="34" charset="0"/>
+                <a:ea typeface="Source Sans 3" pitchFamily="34" charset="-122"/>
+                <a:cs typeface="Source Sans 3" pitchFamily="34" charset="-120"/>
+              </a:rPr>
+              <a:t>Schwerpunkte</a:t>
             </a:r>
             <a:r>
               <a:rPr lang="en-US" sz="1600" dirty="0">
@@ -3373,29 +4648,7 @@
                 <a:ea typeface="Source Sans 3" pitchFamily="34" charset="-122"/>
                 <a:cs typeface="Source Sans 3" pitchFamily="34" charset="-120"/>
               </a:rPr>
-              <a:t>E</a:t>
-            </a:r>
-            <a:r>
-              <a:rPr lang="de-DE" sz="1600">
-                <a:solidFill>
-                  <a:srgbClr val="000000"/>
-                </a:solidFill>
-                <a:latin typeface="Aptos Narrow" panose="020B0004020202020204" pitchFamily="34" charset="0"/>
-                <a:ea typeface="Source Sans 3" pitchFamily="34" charset="-122"/>
-                <a:cs typeface="Source Sans 3" pitchFamily="34" charset="-120"/>
-              </a:rPr>
-              <a:t>igene </a:t>
-            </a:r>
-            <a:r>
-              <a:rPr lang="de-DE" sz="1600" dirty="0">
-                <a:solidFill>
-                  <a:srgbClr val="000000"/>
-                </a:solidFill>
-                <a:latin typeface="Aptos Narrow" panose="020B0004020202020204" pitchFamily="34" charset="0"/>
-                <a:ea typeface="Source Sans 3" pitchFamily="34" charset="-122"/>
-                <a:cs typeface="Source Sans 3" pitchFamily="34" charset="-120"/>
-              </a:rPr>
-              <a:t>Met-Ausgrabungen in </a:t>
+              <a:t>Eigene Met-Ausgrabungen in </a:t>
             </a:r>
             <a:r>
               <a:rPr lang="de-DE" sz="1600" dirty="0" err="1">
@@ -3482,7 +4735,7 @@
                 </a:solidFill>
                 <a:latin typeface="Aptos Narrow" panose="020B0004020202020204" pitchFamily="34" charset="0"/>
               </a:rPr>
-              <a:t>9</a:t>
+              <a:t>10</a:t>
             </a:r>
           </a:p>
         </p:txBody>
@@ -3495,7 +4748,7 @@
 </p:sld>
 </file>
 
-<file path=ppt/slides/slide11.xml><?xml version="1.0" encoding="utf-8"?>
+<file path=ppt/slides/slide12.xml><?xml version="1.0" encoding="utf-8"?>
 <p:sld xmlns:a="http://schemas.openxmlformats.org/drawingml/2006/main" xmlns:r="http://schemas.openxmlformats.org/officeDocument/2006/relationships" xmlns:p="http://schemas.openxmlformats.org/presentationml/2006/main">
   <p:cSld name="Slide 11">
     <p:spTree>
@@ -4052,7 +5305,7 @@
                 <a:ea typeface="Source Sans 3" pitchFamily="34" charset="-122"/>
                 <a:cs typeface="Source Sans 3" pitchFamily="34" charset="-120"/>
               </a:rPr>
-              <a:t>provinienzhistorisch</a:t>
+              <a:t>provenienzhistorisch</a:t>
             </a:r>
             <a:r>
               <a:rPr lang="en-US" sz="1600" dirty="0">
@@ -4426,7 +5679,7 @@
                 </a:solidFill>
                 <a:latin typeface="Aptos Narrow" panose="020B0004020202020204" pitchFamily="34" charset="0"/>
               </a:rPr>
-              <a:t>10</a:t>
+              <a:t>11</a:t>
             </a:r>
           </a:p>
         </p:txBody>
@@ -4511,7 +5764,7 @@
         </p:nvSpPr>
         <p:spPr>
           <a:xfrm>
-            <a:off x="719814" y="1134635"/>
+            <a:off x="719814" y="1219582"/>
             <a:ext cx="10752067" cy="1133406"/>
           </a:xfrm>
           <a:prstGeom prst="rect">
@@ -4533,169 +5786,15 @@
               <a:buNone/>
             </a:pPr>
             <a:r>
-              <a:rPr lang="en-US" dirty="0">
-                <a:solidFill>
-                  <a:srgbClr val="3D3838"/>
-                </a:solidFill>
-                <a:latin typeface="Aptos Narrow" panose="020B0004020202020204" pitchFamily="34" charset="0"/>
-                <a:ea typeface="Source Sans 3" pitchFamily="34" charset="-122"/>
-                <a:cs typeface="Source Sans 3" pitchFamily="34" charset="-120"/>
-              </a:rPr>
-              <a:t>Das New Yorker Metropolitan Museum of Art (Met) </a:t>
-            </a:r>
-            <a:r>
-              <a:rPr lang="en-US" dirty="0" err="1">
-                <a:solidFill>
-                  <a:srgbClr val="3D3838"/>
-                </a:solidFill>
-                <a:latin typeface="Aptos Narrow" panose="020B0004020202020204" pitchFamily="34" charset="0"/>
-                <a:ea typeface="Source Sans 3" pitchFamily="34" charset="-122"/>
-                <a:cs typeface="Source Sans 3" pitchFamily="34" charset="-120"/>
-              </a:rPr>
-              <a:t>verwaltet</a:t>
-            </a:r>
-            <a:r>
-              <a:rPr lang="en-US" dirty="0">
-                <a:solidFill>
-                  <a:srgbClr val="3D3838"/>
-                </a:solidFill>
-                <a:latin typeface="Aptos Narrow" panose="020B0004020202020204" pitchFamily="34" charset="0"/>
-                <a:ea typeface="Source Sans 3" pitchFamily="34" charset="-122"/>
-                <a:cs typeface="Source Sans 3" pitchFamily="34" charset="-120"/>
-              </a:rPr>
-              <a:t> eine der größten Museumssammlungen der Welt. Ziel ist die datenbasierte Untersuchung kultureller, geografischer und zeitlicher Sammlungsschwerpunkte sowie </a:t>
-            </a:r>
-            <a:r>
-              <a:rPr lang="en-US" dirty="0" err="1">
-                <a:solidFill>
-                  <a:srgbClr val="3D3838"/>
-                </a:solidFill>
-                <a:latin typeface="Aptos Narrow" panose="020B0004020202020204" pitchFamily="34" charset="0"/>
-                <a:ea typeface="Source Sans 3" pitchFamily="34" charset="-122"/>
-                <a:cs typeface="Source Sans 3" pitchFamily="34" charset="-120"/>
-              </a:rPr>
-              <a:t>eine</a:t>
-            </a:r>
-            <a:r>
-              <a:rPr lang="en-US" dirty="0">
-                <a:solidFill>
-                  <a:srgbClr val="3D3838"/>
-                </a:solidFill>
-                <a:latin typeface="Aptos Narrow" panose="020B0004020202020204" pitchFamily="34" charset="0"/>
-                <a:ea typeface="Source Sans 3" pitchFamily="34" charset="-122"/>
-                <a:cs typeface="Source Sans 3" pitchFamily="34" charset="-120"/>
-              </a:rPr>
-              <a:t> </a:t>
-            </a:r>
-            <a:r>
-              <a:rPr lang="en-US" dirty="0" err="1">
-                <a:solidFill>
-                  <a:srgbClr val="3D3838"/>
-                </a:solidFill>
-                <a:latin typeface="Aptos Narrow" panose="020B0004020202020204" pitchFamily="34" charset="0"/>
-                <a:ea typeface="Source Sans 3" pitchFamily="34" charset="-122"/>
-                <a:cs typeface="Source Sans 3" pitchFamily="34" charset="-120"/>
-              </a:rPr>
-              <a:t>Fallstudie</a:t>
-            </a:r>
-            <a:r>
-              <a:rPr lang="en-US" dirty="0">
-                <a:solidFill>
-                  <a:srgbClr val="3D3838"/>
-                </a:solidFill>
-                <a:latin typeface="Aptos Narrow" panose="020B0004020202020204" pitchFamily="34" charset="0"/>
-                <a:ea typeface="Source Sans 3" pitchFamily="34" charset="-122"/>
-                <a:cs typeface="Source Sans 3" pitchFamily="34" charset="-120"/>
-              </a:rPr>
-              <a:t> zu den </a:t>
-            </a:r>
-            <a:r>
-              <a:rPr lang="en-US" dirty="0" err="1">
-                <a:solidFill>
-                  <a:srgbClr val="3D3838"/>
-                </a:solidFill>
-                <a:latin typeface="Aptos Narrow" panose="020B0004020202020204" pitchFamily="34" charset="0"/>
-                <a:ea typeface="Source Sans 3" pitchFamily="34" charset="-122"/>
-                <a:cs typeface="Source Sans 3" pitchFamily="34" charset="-120"/>
-              </a:rPr>
-              <a:t>iranisch-persischen</a:t>
-            </a:r>
-            <a:r>
-              <a:rPr lang="en-US" dirty="0">
-                <a:solidFill>
-                  <a:srgbClr val="3D3838"/>
-                </a:solidFill>
-                <a:latin typeface="Aptos Narrow" panose="020B0004020202020204" pitchFamily="34" charset="0"/>
-                <a:ea typeface="Source Sans 3" pitchFamily="34" charset="-122"/>
-                <a:cs typeface="Source Sans 3" pitchFamily="34" charset="-120"/>
-              </a:rPr>
-              <a:t> </a:t>
-            </a:r>
-            <a:r>
-              <a:rPr lang="en-US" dirty="0" err="1">
-                <a:solidFill>
-                  <a:srgbClr val="3D3838"/>
-                </a:solidFill>
-                <a:latin typeface="Aptos Narrow" panose="020B0004020202020204" pitchFamily="34" charset="0"/>
-                <a:ea typeface="Source Sans 3" pitchFamily="34" charset="-122"/>
-                <a:cs typeface="Source Sans 3" pitchFamily="34" charset="-120"/>
-              </a:rPr>
-              <a:t>Beständen</a:t>
-            </a:r>
-            <a:r>
-              <a:rPr lang="en-US" dirty="0">
-                <a:solidFill>
-                  <a:srgbClr val="3D3838"/>
-                </a:solidFill>
-                <a:latin typeface="Aptos Narrow" panose="020B0004020202020204" pitchFamily="34" charset="0"/>
-                <a:ea typeface="Source Sans 3" pitchFamily="34" charset="-122"/>
-                <a:cs typeface="Source Sans 3" pitchFamily="34" charset="-120"/>
-              </a:rPr>
-              <a:t> (</a:t>
-            </a:r>
-            <a:r>
-              <a:rPr lang="en-US" dirty="0" err="1">
-                <a:solidFill>
-                  <a:srgbClr val="3D3838"/>
-                </a:solidFill>
-                <a:latin typeface="Aptos Narrow" panose="020B0004020202020204" pitchFamily="34" charset="0"/>
-                <a:ea typeface="Source Sans 3" pitchFamily="34" charset="-122"/>
-                <a:cs typeface="Source Sans 3" pitchFamily="34" charset="-120"/>
-              </a:rPr>
-              <a:t>beispielweise</a:t>
-            </a:r>
-            <a:r>
-              <a:rPr lang="en-US" dirty="0">
-                <a:solidFill>
-                  <a:srgbClr val="3D3838"/>
-                </a:solidFill>
-                <a:latin typeface="Aptos Narrow" panose="020B0004020202020204" pitchFamily="34" charset="0"/>
-                <a:ea typeface="Source Sans 3" pitchFamily="34" charset="-122"/>
-                <a:cs typeface="Source Sans 3" pitchFamily="34" charset="-120"/>
-              </a:rPr>
-              <a:t> für </a:t>
-            </a:r>
-            <a:r>
-              <a:rPr lang="en-US" dirty="0" err="1">
-                <a:solidFill>
-                  <a:srgbClr val="3D3838"/>
-                </a:solidFill>
-                <a:latin typeface="Aptos Narrow" panose="020B0004020202020204" pitchFamily="34" charset="0"/>
-                <a:ea typeface="Source Sans 3" pitchFamily="34" charset="-122"/>
-                <a:cs typeface="Source Sans 3" pitchFamily="34" charset="-120"/>
-              </a:rPr>
-              <a:t>Ausstellungsvorbereitung</a:t>
-            </a:r>
-            <a:r>
-              <a:rPr lang="en-US" dirty="0">
-                <a:solidFill>
-                  <a:srgbClr val="3D3838"/>
-                </a:solidFill>
-                <a:latin typeface="Aptos Narrow" panose="020B0004020202020204" pitchFamily="34" charset="0"/>
-                <a:ea typeface="Source Sans 3" pitchFamily="34" charset="-122"/>
-                <a:cs typeface="Source Sans 3" pitchFamily="34" charset="-120"/>
-              </a:rPr>
-              <a:t>).</a:t>
+              <a:rPr lang="de-DE" dirty="0">
+                <a:solidFill>
+                  <a:srgbClr val="3D3838"/>
+                </a:solidFill>
+                <a:latin typeface="Aptos Narrow" panose="020B0004020202020204" pitchFamily="34" charset="0"/>
+                <a:ea typeface="Source Sans 3" pitchFamily="34" charset="-122"/>
+                <a:cs typeface="Source Sans 3" pitchFamily="34" charset="-120"/>
+              </a:rPr>
+              <a:t>Das New Yorker Metropolitan Museum of Art (Met) zählt zu den größten Museumssammlungen der Welt. Ziel ist die datenbasierte Analyse kultureller, geografischer und zeitlicher Sammlungsschwerpunkte mit einer Fallstudie zu den iranisch-persischen Beständen für Ausstellungsvorbereitung und Vermittlung.</a:t>
             </a:r>
             <a:endParaRPr lang="en-US" dirty="0">
               <a:solidFill>
@@ -7810,7 +8909,7 @@
         </p:blipFill>
         <p:spPr>
           <a:xfrm>
-            <a:off x="719814" y="1410295"/>
+            <a:off x="719814" y="1425729"/>
             <a:ext cx="4037308" cy="4037409"/>
           </a:xfrm>
           <a:prstGeom prst="rect">
@@ -7914,7 +9013,7 @@
                 </a:solidFill>
                 <a:latin typeface="Aptos Narrow" panose="020B0004020202020204" pitchFamily="34" charset="0"/>
               </a:rPr>
-              <a:t>identifizierte</a:t>
+              <a:t>zeigte</a:t>
             </a:r>
             <a:r>
               <a:rPr lang="en-US" dirty="0">
@@ -7933,6 +9032,15 @@
                 <a:latin typeface="Aptos Narrow" panose="020B0004020202020204" pitchFamily="34" charset="0"/>
               </a:rPr>
               <a:t>Datenqualitätsprobleme</a:t>
+            </a:r>
+            <a:r>
+              <a:rPr lang="en-US" dirty="0">
+                <a:solidFill>
+                  <a:srgbClr val="3D3838"/>
+                </a:solidFill>
+                <a:latin typeface="Aptos Narrow" panose="020B0004020202020204" pitchFamily="34" charset="0"/>
+              </a:rPr>
+              <a:t> auf</a:t>
             </a:r>
             <a:endParaRPr lang="en-US" b="1" dirty="0">
               <a:solidFill>
@@ -7971,7 +9079,29 @@
                 <a:ea typeface="Source Sans 3" pitchFamily="34" charset="-122"/>
                 <a:cs typeface="Source Sans 3" pitchFamily="34" charset="-120"/>
               </a:rPr>
-              <a:t> eindeutig – </a:t>
+              <a:t> </a:t>
+            </a:r>
+            <a:r>
+              <a:rPr lang="en-US" dirty="0" err="1">
+                <a:solidFill>
+                  <a:srgbClr val="3D3838"/>
+                </a:solidFill>
+                <a:latin typeface="Aptos Narrow" panose="020B0004020202020204" pitchFamily="34" charset="0"/>
+                <a:ea typeface="Source Sans 3" pitchFamily="34" charset="-122"/>
+                <a:cs typeface="Source Sans 3" pitchFamily="34" charset="-120"/>
+              </a:rPr>
+              <a:t>eindeutig</a:t>
+            </a:r>
+            <a:r>
+              <a:rPr lang="en-US" dirty="0">
+                <a:solidFill>
+                  <a:srgbClr val="3D3838"/>
+                </a:solidFill>
+                <a:latin typeface="Aptos Narrow" panose="020B0004020202020204" pitchFamily="34" charset="0"/>
+                <a:ea typeface="Source Sans 3" pitchFamily="34" charset="-122"/>
+                <a:cs typeface="Source Sans 3" pitchFamily="34" charset="-120"/>
+              </a:rPr>
+              <a:t>, </a:t>
             </a:r>
             <a:r>
               <a:rPr lang="en-US" b="1" dirty="0">
@@ -7993,7 +9123,51 @@
                 <a:ea typeface="Source Sans 3" pitchFamily="34" charset="-122"/>
                 <a:cs typeface="Source Sans 3" pitchFamily="34" charset="-120"/>
               </a:rPr>
-              <a:t> mit 2.576 </a:t>
+              <a:t> </a:t>
+            </a:r>
+            <a:r>
+              <a:rPr lang="en-US" dirty="0" err="1">
+                <a:solidFill>
+                  <a:srgbClr val="3D3838"/>
+                </a:solidFill>
+                <a:latin typeface="Aptos Narrow" panose="020B0004020202020204" pitchFamily="34" charset="0"/>
+                <a:ea typeface="Source Sans 3" pitchFamily="34" charset="-122"/>
+                <a:cs typeface="Source Sans 3" pitchFamily="34" charset="-120"/>
+              </a:rPr>
+              <a:t>dagegen</a:t>
+            </a:r>
+            <a:r>
+              <a:rPr lang="en-US" dirty="0">
+                <a:solidFill>
+                  <a:srgbClr val="3D3838"/>
+                </a:solidFill>
+                <a:latin typeface="Aptos Narrow" panose="020B0004020202020204" pitchFamily="34" charset="0"/>
+                <a:ea typeface="Source Sans 3" pitchFamily="34" charset="-122"/>
+                <a:cs typeface="Source Sans 3" pitchFamily="34" charset="-120"/>
+              </a:rPr>
+              <a:t> </a:t>
+            </a:r>
+            <a:r>
+              <a:rPr lang="en-US" dirty="0" err="1">
+                <a:solidFill>
+                  <a:srgbClr val="3D3838"/>
+                </a:solidFill>
+                <a:latin typeface="Aptos Narrow" panose="020B0004020202020204" pitchFamily="34" charset="0"/>
+                <a:ea typeface="Source Sans 3" pitchFamily="34" charset="-122"/>
+                <a:cs typeface="Source Sans 3" pitchFamily="34" charset="-120"/>
+              </a:rPr>
+              <a:t>mit</a:t>
+            </a:r>
+            <a:r>
+              <a:rPr lang="en-US" dirty="0">
+                <a:solidFill>
+                  <a:srgbClr val="3D3838"/>
+                </a:solidFill>
+                <a:latin typeface="Aptos Narrow" panose="020B0004020202020204" pitchFamily="34" charset="0"/>
+                <a:ea typeface="Source Sans 3" pitchFamily="34" charset="-122"/>
+                <a:cs typeface="Source Sans 3" pitchFamily="34" charset="-120"/>
+              </a:rPr>
+              <a:t> 2576 </a:t>
             </a:r>
             <a:r>
               <a:rPr lang="en-US" dirty="0" err="1">
@@ -8054,7 +9228,7 @@
                 <a:ea typeface="Source Sans 3" pitchFamily="34" charset="-122"/>
                 <a:cs typeface="Source Sans 3" pitchFamily="34" charset="-120"/>
               </a:rPr>
-              <a:t>Culture (7.101) und Country (1.035): sehr hohe Vielfalt, teils mehrdeutig – z. B. Iran or Turkey“ oder „</a:t>
+              <a:t>Culture (7101) und Country (1035): Sehr hohe Vielfalt, teils mehrdeutig – z. B. „Iran or Turkey“ oder „</a:t>
             </a:r>
             <a:r>
               <a:rPr lang="en-US" dirty="0" err="1">
@@ -8102,7 +9276,29 @@
                 <a:ea typeface="Source Sans 3" pitchFamily="34" charset="-122"/>
                 <a:cs typeface="Source Sans 3" pitchFamily="34" charset="-120"/>
               </a:rPr>
-              <a:t>Spalte „Period": über </a:t>
+              <a:t>Period: </a:t>
+            </a:r>
+            <a:r>
+              <a:rPr lang="en-US" dirty="0" err="1">
+                <a:solidFill>
+                  <a:srgbClr val="3D3838"/>
+                </a:solidFill>
+                <a:latin typeface="Aptos Narrow" panose="020B0004020202020204" pitchFamily="34" charset="0"/>
+                <a:ea typeface="Source Sans 3" pitchFamily="34" charset="-122"/>
+                <a:cs typeface="Source Sans 3" pitchFamily="34" charset="-120"/>
+              </a:rPr>
+              <a:t>Über</a:t>
+            </a:r>
+            <a:r>
+              <a:rPr lang="en-US" dirty="0">
+                <a:solidFill>
+                  <a:srgbClr val="3D3838"/>
+                </a:solidFill>
+                <a:latin typeface="Aptos Narrow" panose="020B0004020202020204" pitchFamily="34" charset="0"/>
+                <a:ea typeface="Source Sans 3" pitchFamily="34" charset="-122"/>
+                <a:cs typeface="Source Sans 3" pitchFamily="34" charset="-120"/>
+              </a:rPr>
+              <a:t> </a:t>
             </a:r>
             <a:r>
               <a:rPr lang="en-US" b="1" dirty="0">
@@ -8192,25 +9388,7 @@
                 </a:solidFill>
                 <a:latin typeface="Aptos Narrow" panose="020B0004020202020204" pitchFamily="34" charset="0"/>
               </a:rPr>
-              <a:t> End Date: zahlreiche Werte nicht nachvollziehbar bzw. </a:t>
-            </a:r>
-            <a:r>
-              <a:rPr lang="de-DE" dirty="0" err="1">
-                <a:solidFill>
-                  <a:srgbClr val="3D3838"/>
-                </a:solidFill>
-                <a:latin typeface="Aptos Narrow" panose="020B0004020202020204" pitchFamily="34" charset="0"/>
-              </a:rPr>
-              <a:t>zuzordnen</a:t>
-            </a:r>
-            <a:r>
-              <a:rPr lang="de-DE" dirty="0">
-                <a:solidFill>
-                  <a:srgbClr val="3D3838"/>
-                </a:solidFill>
-                <a:latin typeface="Aptos Narrow" panose="020B0004020202020204" pitchFamily="34" charset="0"/>
-              </a:rPr>
-              <a:t>– nur </a:t>
+              <a:t> End Date: Zahlreiche Werte nicht nachvollziehbar bzw. zuzuordnen, nur </a:t>
             </a:r>
             <a:r>
               <a:rPr lang="de-DE" dirty="0" err="1">
@@ -8298,7 +9476,51 @@
                 <a:ea typeface="Source Sans 3" pitchFamily="34" charset="-122"/>
                 <a:cs typeface="Source Sans 3" pitchFamily="34" charset="-120"/>
               </a:rPr>
-              <a:t> fehlerhafte Datierungen (zwei Jahreszahlen </a:t>
+              <a:t> </a:t>
+            </a:r>
+            <a:r>
+              <a:rPr lang="en-US" dirty="0" err="1">
+                <a:solidFill>
+                  <a:srgbClr val="3D3838"/>
+                </a:solidFill>
+                <a:latin typeface="Aptos Narrow" panose="020B0004020202020204" pitchFamily="34" charset="0"/>
+                <a:ea typeface="Source Sans 3" pitchFamily="34" charset="-122"/>
+                <a:cs typeface="Source Sans 3" pitchFamily="34" charset="-120"/>
+              </a:rPr>
+              <a:t>fehlerhafte</a:t>
+            </a:r>
+            <a:r>
+              <a:rPr lang="en-US" dirty="0">
+                <a:solidFill>
+                  <a:srgbClr val="3D3838"/>
+                </a:solidFill>
+                <a:latin typeface="Aptos Narrow" panose="020B0004020202020204" pitchFamily="34" charset="0"/>
+                <a:ea typeface="Source Sans 3" pitchFamily="34" charset="-122"/>
+                <a:cs typeface="Source Sans 3" pitchFamily="34" charset="-120"/>
+              </a:rPr>
+              <a:t> </a:t>
+            </a:r>
+            <a:r>
+              <a:rPr lang="en-US" dirty="0" err="1">
+                <a:solidFill>
+                  <a:srgbClr val="3D3838"/>
+                </a:solidFill>
+                <a:latin typeface="Aptos Narrow" panose="020B0004020202020204" pitchFamily="34" charset="0"/>
+                <a:ea typeface="Source Sans 3" pitchFamily="34" charset="-122"/>
+                <a:cs typeface="Source Sans 3" pitchFamily="34" charset="-120"/>
+              </a:rPr>
+              <a:t>Werte</a:t>
+            </a:r>
+            <a:r>
+              <a:rPr lang="en-US" dirty="0">
+                <a:solidFill>
+                  <a:srgbClr val="3D3838"/>
+                </a:solidFill>
+                <a:latin typeface="Aptos Narrow" panose="020B0004020202020204" pitchFamily="34" charset="0"/>
+                <a:ea typeface="Source Sans 3" pitchFamily="34" charset="-122"/>
+                <a:cs typeface="Source Sans 3" pitchFamily="34" charset="-120"/>
+              </a:rPr>
+              <a:t> (zwei Jahreszahlen </a:t>
             </a:r>
             <a:r>
               <a:rPr lang="en-US" dirty="0" err="1">
@@ -8339,7 +9561,7 @@
         </p:nvSpPr>
         <p:spPr>
           <a:xfrm>
-            <a:off x="5196658" y="4650084"/>
+            <a:off x="5196658" y="4740025"/>
             <a:ext cx="6275528" cy="953691"/>
           </a:xfrm>
           <a:prstGeom prst="roundRect">
@@ -8381,7 +9603,7 @@
         </p:blipFill>
         <p:spPr>
           <a:xfrm>
-            <a:off x="5393035" y="5036987"/>
+            <a:off x="5393035" y="5126928"/>
             <a:ext cx="224923" cy="179884"/>
           </a:xfrm>
           <a:prstGeom prst="rect">
@@ -8397,7 +9619,7 @@
         </p:nvSpPr>
         <p:spPr>
           <a:xfrm>
-            <a:off x="5781338" y="4793792"/>
+            <a:off x="5781338" y="4883733"/>
             <a:ext cx="5690847" cy="886263"/>
           </a:xfrm>
           <a:prstGeom prst="rect">
@@ -8482,7 +9704,139 @@
                 <a:ea typeface="Source Sans 3" pitchFamily="34" charset="-122"/>
                 <a:cs typeface="Source Sans 3" pitchFamily="34" charset="-120"/>
               </a:rPr>
-              <a:t> – gezielte Bereinigung nötig.</a:t>
+              <a:t>, </a:t>
+            </a:r>
+            <a:r>
+              <a:rPr lang="en-US" sz="1600" dirty="0" err="1">
+                <a:solidFill>
+                  <a:srgbClr val="3D3838"/>
+                </a:solidFill>
+                <a:latin typeface="Aptos Narrow" panose="020B0004020202020204" pitchFamily="34" charset="0"/>
+                <a:ea typeface="Source Sans 3" pitchFamily="34" charset="-122"/>
+                <a:cs typeface="Source Sans 3" pitchFamily="34" charset="-120"/>
+              </a:rPr>
+              <a:t>sodass</a:t>
+            </a:r>
+            <a:r>
+              <a:rPr lang="en-US" sz="1600" dirty="0">
+                <a:solidFill>
+                  <a:srgbClr val="3D3838"/>
+                </a:solidFill>
+                <a:latin typeface="Aptos Narrow" panose="020B0004020202020204" pitchFamily="34" charset="0"/>
+                <a:ea typeface="Source Sans 3" pitchFamily="34" charset="-122"/>
+                <a:cs typeface="Source Sans 3" pitchFamily="34" charset="-120"/>
+              </a:rPr>
+              <a:t> </a:t>
+            </a:r>
+            <a:r>
+              <a:rPr lang="en-US" sz="1600" dirty="0" err="1">
+                <a:solidFill>
+                  <a:srgbClr val="3D3838"/>
+                </a:solidFill>
+                <a:latin typeface="Aptos Narrow" panose="020B0004020202020204" pitchFamily="34" charset="0"/>
+                <a:ea typeface="Source Sans 3" pitchFamily="34" charset="-122"/>
+                <a:cs typeface="Source Sans 3" pitchFamily="34" charset="-120"/>
+              </a:rPr>
+              <a:t>eine</a:t>
+            </a:r>
+            <a:r>
+              <a:rPr lang="en-US" sz="1600" dirty="0">
+                <a:solidFill>
+                  <a:srgbClr val="3D3838"/>
+                </a:solidFill>
+                <a:latin typeface="Aptos Narrow" panose="020B0004020202020204" pitchFamily="34" charset="0"/>
+                <a:ea typeface="Source Sans 3" pitchFamily="34" charset="-122"/>
+                <a:cs typeface="Source Sans 3" pitchFamily="34" charset="-120"/>
+              </a:rPr>
+              <a:t> </a:t>
+            </a:r>
+            <a:r>
+              <a:rPr lang="en-US" sz="1600" dirty="0" err="1">
+                <a:solidFill>
+                  <a:srgbClr val="3D3838"/>
+                </a:solidFill>
+                <a:latin typeface="Aptos Narrow" panose="020B0004020202020204" pitchFamily="34" charset="0"/>
+                <a:ea typeface="Source Sans 3" pitchFamily="34" charset="-122"/>
+                <a:cs typeface="Source Sans 3" pitchFamily="34" charset="-120"/>
+              </a:rPr>
+              <a:t>gezielte</a:t>
+            </a:r>
+            <a:r>
+              <a:rPr lang="en-US" sz="1600" dirty="0">
+                <a:solidFill>
+                  <a:srgbClr val="3D3838"/>
+                </a:solidFill>
+                <a:latin typeface="Aptos Narrow" panose="020B0004020202020204" pitchFamily="34" charset="0"/>
+                <a:ea typeface="Source Sans 3" pitchFamily="34" charset="-122"/>
+                <a:cs typeface="Source Sans 3" pitchFamily="34" charset="-120"/>
+              </a:rPr>
+              <a:t> </a:t>
+            </a:r>
+            <a:r>
+              <a:rPr lang="en-US" sz="1600" dirty="0" err="1">
+                <a:solidFill>
+                  <a:srgbClr val="3D3838"/>
+                </a:solidFill>
+                <a:latin typeface="Aptos Narrow" panose="020B0004020202020204" pitchFamily="34" charset="0"/>
+                <a:ea typeface="Source Sans 3" pitchFamily="34" charset="-122"/>
+                <a:cs typeface="Source Sans 3" pitchFamily="34" charset="-120"/>
+              </a:rPr>
+              <a:t>Bereinigung</a:t>
+            </a:r>
+            <a:r>
+              <a:rPr lang="en-US" sz="1600" dirty="0">
+                <a:solidFill>
+                  <a:srgbClr val="3D3838"/>
+                </a:solidFill>
+                <a:latin typeface="Aptos Narrow" panose="020B0004020202020204" pitchFamily="34" charset="0"/>
+                <a:ea typeface="Source Sans 3" pitchFamily="34" charset="-122"/>
+                <a:cs typeface="Source Sans 3" pitchFamily="34" charset="-120"/>
+              </a:rPr>
+              <a:t> </a:t>
+            </a:r>
+            <a:r>
+              <a:rPr lang="en-US" sz="1600" dirty="0" err="1">
+                <a:solidFill>
+                  <a:srgbClr val="3D3838"/>
+                </a:solidFill>
+                <a:latin typeface="Aptos Narrow" panose="020B0004020202020204" pitchFamily="34" charset="0"/>
+                <a:ea typeface="Source Sans 3" pitchFamily="34" charset="-122"/>
+                <a:cs typeface="Source Sans 3" pitchFamily="34" charset="-120"/>
+              </a:rPr>
+              <a:t>nötig</a:t>
+            </a:r>
+            <a:r>
+              <a:rPr lang="en-US" sz="1600" dirty="0">
+                <a:solidFill>
+                  <a:srgbClr val="3D3838"/>
+                </a:solidFill>
+                <a:latin typeface="Aptos Narrow" panose="020B0004020202020204" pitchFamily="34" charset="0"/>
+                <a:ea typeface="Source Sans 3" pitchFamily="34" charset="-122"/>
+                <a:cs typeface="Source Sans 3" pitchFamily="34" charset="-120"/>
+              </a:rPr>
+              <a:t> </a:t>
+            </a:r>
+            <a:r>
+              <a:rPr lang="en-US" sz="1600" dirty="0" err="1">
+                <a:solidFill>
+                  <a:srgbClr val="3D3838"/>
+                </a:solidFill>
+                <a:latin typeface="Aptos Narrow" panose="020B0004020202020204" pitchFamily="34" charset="0"/>
+                <a:ea typeface="Source Sans 3" pitchFamily="34" charset="-122"/>
+                <a:cs typeface="Source Sans 3" pitchFamily="34" charset="-120"/>
+              </a:rPr>
+              <a:t>ist</a:t>
+            </a:r>
+            <a:r>
+              <a:rPr lang="en-US" sz="1600" dirty="0">
+                <a:solidFill>
+                  <a:srgbClr val="3D3838"/>
+                </a:solidFill>
+                <a:latin typeface="Aptos Narrow" panose="020B0004020202020204" pitchFamily="34" charset="0"/>
+                <a:ea typeface="Source Sans 3" pitchFamily="34" charset="-122"/>
+                <a:cs typeface="Source Sans 3" pitchFamily="34" charset="-120"/>
+              </a:rPr>
+              <a:t>.</a:t>
             </a:r>
             <a:endParaRPr lang="en-US" sz="1600" dirty="0">
               <a:solidFill>
@@ -8721,7 +10075,7 @@
                 <a:ea typeface="Source Sans 3" pitchFamily="34" charset="-122"/>
                 <a:cs typeface="Source Sans 3" pitchFamily="34" charset="-120"/>
               </a:rPr>
-              <a:t>Von 43 auf 13 Attribute – Grundlage aller weiteren Schritte</a:t>
+              <a:t>Von 43 auf zunächst 13 analyserelevante Attribute eingegrenzt</a:t>
             </a:r>
             <a:endParaRPr lang="en-US" sz="1600" dirty="0"/>
           </a:p>
@@ -8956,7 +10310,7 @@
                 <a:ea typeface="Source Sans 3" pitchFamily="34" charset="-122"/>
                 <a:cs typeface="Source Sans 3" pitchFamily="34" charset="-120"/>
               </a:rPr>
-              <a:t> </a:t>
+              <a:t> – </a:t>
             </a:r>
           </a:p>
           <a:p>
@@ -8975,7 +10329,7 @@
                 <a:ea typeface="Source Sans 3" pitchFamily="34" charset="-122"/>
                 <a:cs typeface="Source Sans 3" pitchFamily="34" charset="-120"/>
               </a:rPr>
-              <a:t>– z. B. Country → „unspecified“, Classification → „unclassified“</a:t>
+              <a:t>z. B. Country → „unspecified“, Classification → „unclassified“</a:t>
             </a:r>
           </a:p>
         </p:txBody>
@@ -9158,11 +10512,17 @@
           <a:p>
             <a:r>
               <a:rPr lang="de-DE" b="1" dirty="0">
+                <a:solidFill>
+                  <a:srgbClr val="3D3838"/>
+                </a:solidFill>
                 <a:latin typeface="Aptos Narrow" panose="020B0004020202020204" pitchFamily="34" charset="0"/>
               </a:rPr>
               <a:t>Fehlerhafter Datierungsbeginn</a:t>
             </a:r>
             <a:endParaRPr lang="en-US" b="1" dirty="0">
+              <a:solidFill>
+                <a:srgbClr val="3D3838"/>
+              </a:solidFill>
               <a:latin typeface="Aptos Narrow" panose="020B0004020202020204" pitchFamily="34" charset="0"/>
             </a:endParaRPr>
           </a:p>
@@ -9454,7 +10814,7 @@
         </p:blipFill>
         <p:spPr>
           <a:xfrm>
-            <a:off x="719814" y="1505726"/>
+            <a:off x="719814" y="1692034"/>
             <a:ext cx="4037308" cy="4037409"/>
           </a:xfrm>
           <a:prstGeom prst="rect">
@@ -9470,8 +10830,8 @@
         </p:nvSpPr>
         <p:spPr>
           <a:xfrm>
-            <a:off x="5202603" y="1505726"/>
-            <a:ext cx="6550126" cy="3743112"/>
+            <a:off x="5202603" y="1680535"/>
+            <a:ext cx="6562050" cy="4515187"/>
           </a:xfrm>
           <a:prstGeom prst="rect">
             <a:avLst/>
@@ -9797,149 +11157,6 @@
                 <a:cs typeface="Source Sans 3 Bold" pitchFamily="34" charset="-120"/>
               </a:rPr>
               <a:t>zu</a:t>
-            </a:r>
-            <a:r>
-              <a:rPr lang="en-US" dirty="0">
-                <a:solidFill>
-                  <a:srgbClr val="3D3838"/>
-                </a:solidFill>
-                <a:latin typeface="Aptos Narrow" panose="020B0004020202020204" pitchFamily="34" charset="0"/>
-                <a:ea typeface="Source Sans 3 Bold" pitchFamily="34" charset="-122"/>
-                <a:cs typeface="Source Sans 3 Bold" pitchFamily="34" charset="-120"/>
-              </a:rPr>
-              <a:t>; </a:t>
-            </a:r>
-            <a:r>
-              <a:rPr lang="en-US" b="1" dirty="0" err="1">
-                <a:solidFill>
-                  <a:srgbClr val="3D3838"/>
-                </a:solidFill>
-                <a:latin typeface="Aptos Narrow" panose="020B0004020202020204" pitchFamily="34" charset="0"/>
-                <a:ea typeface="Source Sans 3 Bold" pitchFamily="34" charset="-122"/>
-                <a:cs typeface="Source Sans 3 Bold" pitchFamily="34" charset="-120"/>
-              </a:rPr>
-              <a:t>acquisition_type</a:t>
-            </a:r>
-            <a:r>
-              <a:rPr lang="en-US" dirty="0" err="1">
-                <a:solidFill>
-                  <a:srgbClr val="3D3838"/>
-                </a:solidFill>
-                <a:latin typeface="Aptos Narrow" panose="020B0004020202020204" pitchFamily="34" charset="0"/>
-                <a:ea typeface="Source Sans 3 Bold" pitchFamily="34" charset="-122"/>
-                <a:cs typeface="Source Sans 3 Bold" pitchFamily="34" charset="-120"/>
-              </a:rPr>
-              <a:t>und</a:t>
-            </a:r>
-            <a:r>
-              <a:rPr lang="en-US" dirty="0">
-                <a:solidFill>
-                  <a:srgbClr val="3D3838"/>
-                </a:solidFill>
-                <a:latin typeface="Aptos Narrow" panose="020B0004020202020204" pitchFamily="34" charset="0"/>
-                <a:ea typeface="Source Sans 3 Bold" pitchFamily="34" charset="-122"/>
-                <a:cs typeface="Source Sans 3 Bold" pitchFamily="34" charset="-120"/>
-              </a:rPr>
-              <a:t> </a:t>
-            </a:r>
-            <a:r>
-              <a:rPr lang="en-US" b="1" dirty="0" err="1">
-                <a:solidFill>
-                  <a:srgbClr val="3D3838"/>
-                </a:solidFill>
-                <a:latin typeface="Aptos Narrow" panose="020B0004020202020204" pitchFamily="34" charset="0"/>
-                <a:ea typeface="Source Sans 3 Bold" pitchFamily="34" charset="-122"/>
-                <a:cs typeface="Source Sans 3 Bold" pitchFamily="34" charset="-120"/>
-              </a:rPr>
-              <a:t>acquisition_year</a:t>
-            </a:r>
-            <a:r>
-              <a:rPr lang="en-US" b="1" dirty="0">
-                <a:solidFill>
-                  <a:srgbClr val="3D3838"/>
-                </a:solidFill>
-                <a:latin typeface="Aptos Narrow" panose="020B0004020202020204" pitchFamily="34" charset="0"/>
-                <a:ea typeface="Source Sans 3 Bold" pitchFamily="34" charset="-122"/>
-                <a:cs typeface="Source Sans 3 Bold" pitchFamily="34" charset="-120"/>
-              </a:rPr>
-              <a:t> </a:t>
-            </a:r>
-            <a:r>
-              <a:rPr lang="en-US" dirty="0" err="1">
-                <a:solidFill>
-                  <a:srgbClr val="3D3838"/>
-                </a:solidFill>
-                <a:latin typeface="Aptos Narrow" panose="020B0004020202020204" pitchFamily="34" charset="0"/>
-                <a:ea typeface="Source Sans 3 Bold" pitchFamily="34" charset="-122"/>
-                <a:cs typeface="Source Sans 3 Bold" pitchFamily="34" charset="-120"/>
-              </a:rPr>
-              <a:t>zur</a:t>
-            </a:r>
-            <a:r>
-              <a:rPr lang="en-US" dirty="0">
-                <a:solidFill>
-                  <a:srgbClr val="3D3838"/>
-                </a:solidFill>
-                <a:latin typeface="Aptos Narrow" panose="020B0004020202020204" pitchFamily="34" charset="0"/>
-                <a:ea typeface="Source Sans 3 Bold" pitchFamily="34" charset="-122"/>
-                <a:cs typeface="Source Sans 3 Bold" pitchFamily="34" charset="-120"/>
-              </a:rPr>
-              <a:t> </a:t>
-            </a:r>
-            <a:r>
-              <a:rPr lang="en-US" dirty="0" err="1">
-                <a:solidFill>
-                  <a:srgbClr val="3D3838"/>
-                </a:solidFill>
-                <a:latin typeface="Aptos Narrow" panose="020B0004020202020204" pitchFamily="34" charset="0"/>
-                <a:ea typeface="Source Sans 3 Bold" pitchFamily="34" charset="-122"/>
-                <a:cs typeface="Source Sans 3 Bold" pitchFamily="34" charset="-120"/>
-              </a:rPr>
-              <a:t>Erwebungsgeschichte</a:t>
-            </a:r>
-            <a:r>
-              <a:rPr lang="en-US" dirty="0">
-                <a:solidFill>
-                  <a:srgbClr val="3D3838"/>
-                </a:solidFill>
-                <a:latin typeface="Aptos Narrow" panose="020B0004020202020204" pitchFamily="34" charset="0"/>
-                <a:ea typeface="Source Sans 3 Bold" pitchFamily="34" charset="-122"/>
-                <a:cs typeface="Source Sans 3 Bold" pitchFamily="34" charset="-120"/>
-              </a:rPr>
-              <a:t> </a:t>
-            </a:r>
-            <a:r>
-              <a:rPr lang="en-US" dirty="0" err="1">
-                <a:solidFill>
-                  <a:srgbClr val="3D3838"/>
-                </a:solidFill>
-                <a:latin typeface="Aptos Narrow" panose="020B0004020202020204" pitchFamily="34" charset="0"/>
-                <a:ea typeface="Source Sans 3 Bold" pitchFamily="34" charset="-122"/>
-                <a:cs typeface="Source Sans 3 Bold" pitchFamily="34" charset="-120"/>
-              </a:rPr>
-              <a:t>aus</a:t>
-            </a:r>
-            <a:r>
-              <a:rPr lang="en-US" dirty="0">
-                <a:solidFill>
-                  <a:srgbClr val="3D3838"/>
-                </a:solidFill>
-                <a:latin typeface="Aptos Narrow" panose="020B0004020202020204" pitchFamily="34" charset="0"/>
-                <a:ea typeface="Source Sans 3 Bold" pitchFamily="34" charset="-122"/>
-                <a:cs typeface="Source Sans 3 Bold" pitchFamily="34" charset="-120"/>
-              </a:rPr>
-              <a:t> Credit Line </a:t>
-            </a:r>
-            <a:r>
-              <a:rPr lang="en-US" dirty="0" err="1">
-                <a:solidFill>
-                  <a:srgbClr val="3D3838"/>
-                </a:solidFill>
-                <a:latin typeface="Aptos Narrow" panose="020B0004020202020204" pitchFamily="34" charset="0"/>
-                <a:ea typeface="Source Sans 3 Bold" pitchFamily="34" charset="-122"/>
-                <a:cs typeface="Source Sans 3 Bold" pitchFamily="34" charset="-120"/>
-              </a:rPr>
-              <a:t>extrahiert</a:t>
             </a:r>
             <a:endParaRPr lang="en-US" dirty="0">
               <a:solidFill>
@@ -9959,7 +11176,7 @@
               <a:buChar char="•"/>
             </a:pPr>
             <a:r>
-              <a:rPr lang="en-US" dirty="0" err="1">
+              <a:rPr lang="en-US" b="1" dirty="0" err="1">
                 <a:solidFill>
                   <a:srgbClr val="3D3838"/>
                 </a:solidFill>
@@ -9967,10 +11184,10 @@
                 <a:ea typeface="Source Sans 3 Bold" pitchFamily="34" charset="-122"/>
                 <a:cs typeface="Source Sans 3 Bold" pitchFamily="34" charset="-120"/>
               </a:rPr>
-              <a:t>Teildatensatz</a:t>
-            </a:r>
-            <a:r>
-              <a:rPr lang="en-US" dirty="0">
+              <a:t>acquisition_type</a:t>
+            </a:r>
+            <a:r>
+              <a:rPr lang="en-US" b="1" dirty="0">
                 <a:solidFill>
                   <a:srgbClr val="3D3838"/>
                 </a:solidFill>
@@ -9978,10 +11195,10 @@
                 <a:ea typeface="Source Sans 3 Bold" pitchFamily="34" charset="-122"/>
                 <a:cs typeface="Source Sans 3 Bold" pitchFamily="34" charset="-120"/>
               </a:rPr>
-              <a:t> Iran (</a:t>
-            </a:r>
-            <a:r>
-              <a:rPr lang="en-US" b="1" dirty="0" err="1">
+              <a:t> </a:t>
+            </a:r>
+            <a:r>
+              <a:rPr lang="en-US" dirty="0">
                 <a:solidFill>
                   <a:srgbClr val="3D3838"/>
                 </a:solidFill>
@@ -9989,10 +11206,10 @@
                 <a:ea typeface="Source Sans 3 Bold" pitchFamily="34" charset="-122"/>
                 <a:cs typeface="Source Sans 3 Bold" pitchFamily="34" charset="-120"/>
               </a:rPr>
-              <a:t>iran_df</a:t>
-            </a:r>
-            <a:r>
-              <a:rPr lang="en-US" b="1" dirty="0">
+              <a:t>und </a:t>
+            </a:r>
+            <a:r>
+              <a:rPr lang="en-US" b="1" dirty="0" err="1">
                 <a:solidFill>
                   <a:srgbClr val="3D3838"/>
                 </a:solidFill>
@@ -10000,10 +11217,10 @@
                 <a:ea typeface="Source Sans 3 Bold" pitchFamily="34" charset="-122"/>
                 <a:cs typeface="Source Sans 3 Bold" pitchFamily="34" charset="-120"/>
               </a:rPr>
-              <a:t>): </a:t>
-            </a:r>
-            <a:r>
-              <a:rPr lang="en-US" dirty="0">
+              <a:t>acquisition_year</a:t>
+            </a:r>
+            <a:r>
+              <a:rPr lang="en-US" b="1" dirty="0">
                 <a:solidFill>
                   <a:srgbClr val="3D3838"/>
                 </a:solidFill>
@@ -10011,7 +11228,7 @@
                 <a:ea typeface="Source Sans 3 Bold" pitchFamily="34" charset="-122"/>
                 <a:cs typeface="Source Sans 3 Bold" pitchFamily="34" charset="-120"/>
               </a:rPr>
-              <a:t>„Iran" </a:t>
+              <a:t> </a:t>
             </a:r>
             <a:r>
               <a:rPr lang="en-US" dirty="0" err="1">
@@ -10022,7 +11239,7 @@
                 <a:ea typeface="Source Sans 3 Bold" pitchFamily="34" charset="-122"/>
                 <a:cs typeface="Source Sans 3 Bold" pitchFamily="34" charset="-120"/>
               </a:rPr>
-              <a:t>als</a:t>
+              <a:t>zur</a:t>
             </a:r>
             <a:r>
               <a:rPr lang="en-US" dirty="0">
@@ -10044,7 +11261,7 @@
                 <a:ea typeface="Source Sans 3 Bold" pitchFamily="34" charset="-122"/>
                 <a:cs typeface="Source Sans 3 Bold" pitchFamily="34" charset="-120"/>
               </a:rPr>
-              <a:t>Kulturraum</a:t>
+              <a:t>Erwerbungsgeschichte</a:t>
             </a:r>
             <a:r>
               <a:rPr lang="en-US" dirty="0">
@@ -10066,7 +11283,7 @@
                 <a:ea typeface="Source Sans 3 Bold" pitchFamily="34" charset="-122"/>
                 <a:cs typeface="Source Sans 3 Bold" pitchFamily="34" charset="-120"/>
               </a:rPr>
-              <a:t>verstanden</a:t>
+              <a:t>aus</a:t>
             </a:r>
             <a:r>
               <a:rPr lang="en-US" dirty="0">
@@ -10077,7 +11294,7 @@
                 <a:ea typeface="Source Sans 3 Bold" pitchFamily="34" charset="-122"/>
                 <a:cs typeface="Source Sans 3 Bold" pitchFamily="34" charset="-120"/>
               </a:rPr>
-              <a:t>, nicht </a:t>
+              <a:t> Credit Line </a:t>
             </a:r>
             <a:r>
               <a:rPr lang="en-US" dirty="0" err="1">
@@ -10088,291 +11305,7 @@
                 <a:ea typeface="Source Sans 3 Bold" pitchFamily="34" charset="-122"/>
                 <a:cs typeface="Source Sans 3 Bold" pitchFamily="34" charset="-120"/>
               </a:rPr>
-              <a:t>nur</a:t>
-            </a:r>
-            <a:r>
-              <a:rPr lang="en-US" dirty="0">
-                <a:solidFill>
-                  <a:srgbClr val="3D3838"/>
-                </a:solidFill>
-                <a:latin typeface="Aptos Narrow" panose="020B0004020202020204" pitchFamily="34" charset="0"/>
-                <a:ea typeface="Source Sans 3 Bold" pitchFamily="34" charset="-122"/>
-                <a:cs typeface="Source Sans 3 Bold" pitchFamily="34" charset="-120"/>
-              </a:rPr>
-              <a:t> </a:t>
-            </a:r>
-            <a:r>
-              <a:rPr lang="en-US" dirty="0" err="1">
-                <a:solidFill>
-                  <a:srgbClr val="3D3838"/>
-                </a:solidFill>
-                <a:latin typeface="Aptos Narrow" panose="020B0004020202020204" pitchFamily="34" charset="0"/>
-                <a:ea typeface="Source Sans 3 Bold" pitchFamily="34" charset="-122"/>
-                <a:cs typeface="Source Sans 3 Bold" pitchFamily="34" charset="-120"/>
-              </a:rPr>
-              <a:t>als</a:t>
-            </a:r>
-            <a:r>
-              <a:rPr lang="en-US" dirty="0">
-                <a:solidFill>
-                  <a:srgbClr val="3D3838"/>
-                </a:solidFill>
-                <a:latin typeface="Aptos Narrow" panose="020B0004020202020204" pitchFamily="34" charset="0"/>
-                <a:ea typeface="Source Sans 3 Bold" pitchFamily="34" charset="-122"/>
-                <a:cs typeface="Source Sans 3 Bold" pitchFamily="34" charset="-120"/>
-              </a:rPr>
-              <a:t> Staat – </a:t>
-            </a:r>
-            <a:r>
-              <a:rPr lang="en-US" dirty="0" err="1">
-                <a:solidFill>
-                  <a:srgbClr val="3D3838"/>
-                </a:solidFill>
-                <a:latin typeface="Aptos Narrow" panose="020B0004020202020204" pitchFamily="34" charset="0"/>
-                <a:ea typeface="Source Sans 3 Bold" pitchFamily="34" charset="-122"/>
-                <a:cs typeface="Source Sans 3 Bold" pitchFamily="34" charset="-120"/>
-              </a:rPr>
-              <a:t>Kombination</a:t>
-            </a:r>
-            <a:r>
-              <a:rPr lang="en-US" dirty="0">
-                <a:solidFill>
-                  <a:srgbClr val="3D3838"/>
-                </a:solidFill>
-                <a:latin typeface="Aptos Narrow" panose="020B0004020202020204" pitchFamily="34" charset="0"/>
-                <a:ea typeface="Source Sans 3 Bold" pitchFamily="34" charset="-122"/>
-                <a:cs typeface="Source Sans 3 Bold" pitchFamily="34" charset="-120"/>
-              </a:rPr>
-              <a:t> </a:t>
-            </a:r>
-            <a:r>
-              <a:rPr lang="en-US" dirty="0" err="1">
-                <a:solidFill>
-                  <a:srgbClr val="3D3838"/>
-                </a:solidFill>
-                <a:latin typeface="Aptos Narrow" panose="020B0004020202020204" pitchFamily="34" charset="0"/>
-                <a:ea typeface="Source Sans 3 Bold" pitchFamily="34" charset="-122"/>
-                <a:cs typeface="Source Sans 3 Bold" pitchFamily="34" charset="-120"/>
-              </a:rPr>
-              <a:t>aus</a:t>
-            </a:r>
-            <a:r>
-              <a:rPr lang="en-US" dirty="0">
-                <a:solidFill>
-                  <a:srgbClr val="3D3838"/>
-                </a:solidFill>
-                <a:latin typeface="Aptos Narrow" panose="020B0004020202020204" pitchFamily="34" charset="0"/>
-                <a:ea typeface="Source Sans 3 Bold" pitchFamily="34" charset="-122"/>
-                <a:cs typeface="Source Sans 3 Bold" pitchFamily="34" charset="-120"/>
-              </a:rPr>
-              <a:t> </a:t>
-            </a:r>
-            <a:r>
-              <a:rPr lang="en-US" dirty="0" err="1">
-                <a:solidFill>
-                  <a:srgbClr val="3D3838"/>
-                </a:solidFill>
-                <a:latin typeface="Aptos Narrow" panose="020B0004020202020204" pitchFamily="34" charset="0"/>
-                <a:ea typeface="Source Sans 3 Bold" pitchFamily="34" charset="-122"/>
-                <a:cs typeface="Source Sans 3 Bold" pitchFamily="34" charset="-120"/>
-              </a:rPr>
-              <a:t>country_clean</a:t>
-            </a:r>
-            <a:r>
-              <a:rPr lang="en-US" dirty="0">
-                <a:solidFill>
-                  <a:srgbClr val="3D3838"/>
-                </a:solidFill>
-                <a:latin typeface="Aptos Narrow" panose="020B0004020202020204" pitchFamily="34" charset="0"/>
-                <a:ea typeface="Source Sans 3 Bold" pitchFamily="34" charset="-122"/>
-                <a:cs typeface="Source Sans 3 Bold" pitchFamily="34" charset="-120"/>
-              </a:rPr>
-              <a:t>, region und </a:t>
-            </a:r>
-            <a:r>
-              <a:rPr lang="en-US" dirty="0" err="1">
-                <a:solidFill>
-                  <a:srgbClr val="3D3838"/>
-                </a:solidFill>
-                <a:latin typeface="Aptos Narrow" panose="020B0004020202020204" pitchFamily="34" charset="0"/>
-                <a:ea typeface="Source Sans 3 Bold" pitchFamily="34" charset="-122"/>
-                <a:cs typeface="Source Sans 3 Bold" pitchFamily="34" charset="-120"/>
-              </a:rPr>
-              <a:t>kuratierter</a:t>
-            </a:r>
-            <a:r>
-              <a:rPr lang="en-US" dirty="0">
-                <a:solidFill>
-                  <a:srgbClr val="3D3838"/>
-                </a:solidFill>
-                <a:latin typeface="Aptos Narrow" panose="020B0004020202020204" pitchFamily="34" charset="0"/>
-                <a:ea typeface="Source Sans 3 Bold" pitchFamily="34" charset="-122"/>
-                <a:cs typeface="Source Sans 3 Bold" pitchFamily="34" charset="-120"/>
-              </a:rPr>
-              <a:t> </a:t>
-            </a:r>
-            <a:r>
-              <a:rPr lang="en-US" dirty="0" err="1">
-                <a:solidFill>
-                  <a:srgbClr val="3D3838"/>
-                </a:solidFill>
-                <a:latin typeface="Aptos Narrow" panose="020B0004020202020204" pitchFamily="34" charset="0"/>
-                <a:ea typeface="Source Sans 3 Bold" pitchFamily="34" charset="-122"/>
-                <a:cs typeface="Source Sans 3 Bold" pitchFamily="34" charset="-120"/>
-              </a:rPr>
-              <a:t>Kulturliste</a:t>
-            </a:r>
-            <a:r>
-              <a:rPr lang="en-US" dirty="0">
-                <a:solidFill>
-                  <a:srgbClr val="3D3838"/>
-                </a:solidFill>
-                <a:latin typeface="Aptos Narrow" panose="020B0004020202020204" pitchFamily="34" charset="0"/>
-                <a:ea typeface="Source Sans 3 Bold" pitchFamily="34" charset="-122"/>
-                <a:cs typeface="Source Sans 3 Bold" pitchFamily="34" charset="-120"/>
-              </a:rPr>
-              <a:t> (u. a. Achaemenid, Sasanian, Qajar) – </a:t>
-            </a:r>
-            <a:r>
-              <a:rPr lang="en-US" b="1" dirty="0" err="1">
-                <a:solidFill>
-                  <a:srgbClr val="3D3838"/>
-                </a:solidFill>
-                <a:latin typeface="Aptos Narrow" panose="020B0004020202020204" pitchFamily="34" charset="0"/>
-                <a:ea typeface="Source Sans 3 Bold" pitchFamily="34" charset="-122"/>
-                <a:cs typeface="Source Sans 3 Bold" pitchFamily="34" charset="-120"/>
-              </a:rPr>
-              <a:t>iran_period</a:t>
-            </a:r>
-            <a:r>
-              <a:rPr lang="en-US" b="1" dirty="0">
-                <a:solidFill>
-                  <a:srgbClr val="3D3838"/>
-                </a:solidFill>
-                <a:latin typeface="Aptos Narrow" panose="020B0004020202020204" pitchFamily="34" charset="0"/>
-                <a:ea typeface="Source Sans 3 Bold" pitchFamily="34" charset="-122"/>
-                <a:cs typeface="Source Sans 3 Bold" pitchFamily="34" charset="-120"/>
-              </a:rPr>
-              <a:t> </a:t>
-            </a:r>
-            <a:r>
-              <a:rPr lang="en-US" dirty="0" err="1">
-                <a:solidFill>
-                  <a:srgbClr val="3D3838"/>
-                </a:solidFill>
-                <a:latin typeface="Aptos Narrow" panose="020B0004020202020204" pitchFamily="34" charset="0"/>
-                <a:ea typeface="Source Sans 3 Bold" pitchFamily="34" charset="-122"/>
-                <a:cs typeface="Source Sans 3 Bold" pitchFamily="34" charset="-120"/>
-              </a:rPr>
-              <a:t>mit</a:t>
-            </a:r>
-            <a:r>
-              <a:rPr lang="en-US" dirty="0">
-                <a:solidFill>
-                  <a:srgbClr val="3D3838"/>
-                </a:solidFill>
-                <a:latin typeface="Aptos Narrow" panose="020B0004020202020204" pitchFamily="34" charset="0"/>
-                <a:ea typeface="Source Sans 3 Bold" pitchFamily="34" charset="-122"/>
-                <a:cs typeface="Source Sans 3 Bold" pitchFamily="34" charset="-120"/>
-              </a:rPr>
-              <a:t> 14 </a:t>
-            </a:r>
-            <a:r>
-              <a:rPr lang="en-US" dirty="0" err="1">
-                <a:solidFill>
-                  <a:srgbClr val="3D3838"/>
-                </a:solidFill>
-                <a:latin typeface="Aptos Narrow" panose="020B0004020202020204" pitchFamily="34" charset="0"/>
-                <a:ea typeface="Source Sans 3 Bold" pitchFamily="34" charset="-122"/>
-                <a:cs typeface="Source Sans 3 Bold" pitchFamily="34" charset="-120"/>
-              </a:rPr>
-              <a:t>historischen</a:t>
-            </a:r>
-            <a:r>
-              <a:rPr lang="en-US" dirty="0">
-                <a:solidFill>
-                  <a:srgbClr val="3D3838"/>
-                </a:solidFill>
-                <a:latin typeface="Aptos Narrow" panose="020B0004020202020204" pitchFamily="34" charset="0"/>
-                <a:ea typeface="Source Sans 3 Bold" pitchFamily="34" charset="-122"/>
-                <a:cs typeface="Source Sans 3 Bold" pitchFamily="34" charset="-120"/>
-              </a:rPr>
-              <a:t> </a:t>
-            </a:r>
-            <a:r>
-              <a:rPr lang="en-US" dirty="0" err="1">
-                <a:solidFill>
-                  <a:srgbClr val="3D3838"/>
-                </a:solidFill>
-                <a:latin typeface="Aptos Narrow" panose="020B0004020202020204" pitchFamily="34" charset="0"/>
-                <a:ea typeface="Source Sans 3 Bold" pitchFamily="34" charset="-122"/>
-                <a:cs typeface="Source Sans 3 Bold" pitchFamily="34" charset="-120"/>
-              </a:rPr>
-              <a:t>Epochen</a:t>
-            </a:r>
-            <a:r>
-              <a:rPr lang="en-US" dirty="0">
-                <a:solidFill>
-                  <a:srgbClr val="3D3838"/>
-                </a:solidFill>
-                <a:latin typeface="Aptos Narrow" panose="020B0004020202020204" pitchFamily="34" charset="0"/>
-                <a:ea typeface="Source Sans 3 Bold" pitchFamily="34" charset="-122"/>
-                <a:cs typeface="Source Sans 3 Bold" pitchFamily="34" charset="-120"/>
-              </a:rPr>
-              <a:t> (Prehistoric bis Islamic Republic)</a:t>
-            </a:r>
-          </a:p>
-          <a:p>
-            <a:pPr marL="284480" indent="-284480" algn="l">
-              <a:lnSpc>
-                <a:spcPct val="114000"/>
-              </a:lnSpc>
-              <a:buSzPct val="100000"/>
-              <a:buChar char="•"/>
-            </a:pPr>
-            <a:r>
-              <a:rPr lang="en-US" b="1" dirty="0">
-                <a:solidFill>
-                  <a:srgbClr val="3D3838"/>
-                </a:solidFill>
-                <a:latin typeface="Aptos Narrow" panose="020B0004020202020204" pitchFamily="34" charset="0"/>
-                <a:ea typeface="Source Sans 3 Bold" pitchFamily="34" charset="-122"/>
-                <a:cs typeface="Source Sans 3 Bold" pitchFamily="34" charset="-120"/>
-              </a:rPr>
-              <a:t>Dashboard: </a:t>
-            </a:r>
-            <a:r>
-              <a:rPr lang="en-US" dirty="0" err="1">
-                <a:solidFill>
-                  <a:srgbClr val="3D3838"/>
-                </a:solidFill>
-                <a:latin typeface="Aptos Narrow" panose="020B0004020202020204" pitchFamily="34" charset="0"/>
-                <a:ea typeface="Source Sans 3 Bold" pitchFamily="34" charset="-122"/>
-                <a:cs typeface="Source Sans 3 Bold" pitchFamily="34" charset="-120"/>
-              </a:rPr>
-              <a:t>Visualisierung</a:t>
-            </a:r>
-            <a:r>
-              <a:rPr lang="en-US" dirty="0">
-                <a:solidFill>
-                  <a:srgbClr val="3D3838"/>
-                </a:solidFill>
-                <a:latin typeface="Aptos Narrow" panose="020B0004020202020204" pitchFamily="34" charset="0"/>
-                <a:ea typeface="Source Sans 3 Bold" pitchFamily="34" charset="-122"/>
-                <a:cs typeface="Source Sans 3 Bold" pitchFamily="34" charset="-120"/>
-              </a:rPr>
-              <a:t> der </a:t>
-            </a:r>
-            <a:r>
-              <a:rPr lang="en-US" dirty="0" err="1">
-                <a:solidFill>
-                  <a:srgbClr val="3D3838"/>
-                </a:solidFill>
-                <a:latin typeface="Aptos Narrow" panose="020B0004020202020204" pitchFamily="34" charset="0"/>
-                <a:ea typeface="Source Sans 3 Bold" pitchFamily="34" charset="-122"/>
-                <a:cs typeface="Source Sans 3 Bold" pitchFamily="34" charset="-120"/>
-              </a:rPr>
-              <a:t>Ergebnisse</a:t>
+              <a:t>extrahiert</a:t>
             </a:r>
             <a:endParaRPr lang="en-US" dirty="0">
               <a:solidFill>
@@ -10392,7 +11325,7 @@
               <a:buChar char="•"/>
             </a:pPr>
             <a:r>
-              <a:rPr lang="en-US" b="1" dirty="0">
+              <a:rPr lang="en-US" dirty="0" err="1">
                 <a:solidFill>
                   <a:srgbClr val="3D3838"/>
                 </a:solidFill>
@@ -10400,10 +11333,10 @@
                 <a:ea typeface="Source Sans 3 Bold" pitchFamily="34" charset="-122"/>
                 <a:cs typeface="Source Sans 3 Bold" pitchFamily="34" charset="-120"/>
               </a:rPr>
-              <a:t>Dashboard-</a:t>
-            </a:r>
-            <a:r>
-              <a:rPr lang="en-US" b="1" dirty="0" err="1">
+              <a:t>Teildatensatz</a:t>
+            </a:r>
+            <a:r>
+              <a:rPr lang="en-US" dirty="0">
                 <a:solidFill>
                   <a:srgbClr val="3D3838"/>
                 </a:solidFill>
@@ -10411,10 +11344,10 @@
                 <a:ea typeface="Source Sans 3 Bold" pitchFamily="34" charset="-122"/>
                 <a:cs typeface="Source Sans 3 Bold" pitchFamily="34" charset="-120"/>
               </a:rPr>
-              <a:t>Anreicherung</a:t>
-            </a:r>
-            <a:r>
-              <a:rPr lang="en-US" b="1" dirty="0">
+              <a:t> Iran (</a:t>
+            </a:r>
+            <a:r>
+              <a:rPr lang="en-US" b="1" dirty="0" err="1">
                 <a:solidFill>
                   <a:srgbClr val="3D3838"/>
                 </a:solidFill>
@@ -10422,10 +11355,10 @@
                 <a:ea typeface="Source Sans 3 Bold" pitchFamily="34" charset="-122"/>
                 <a:cs typeface="Source Sans 3 Bold" pitchFamily="34" charset="-120"/>
               </a:rPr>
-              <a:t>: </a:t>
-            </a:r>
-            <a:r>
-              <a:rPr lang="en-US" dirty="0">
+              <a:t>iran_df</a:t>
+            </a:r>
+            <a:r>
+              <a:rPr lang="en-US" b="1" dirty="0">
                 <a:solidFill>
                   <a:srgbClr val="3D3838"/>
                 </a:solidFill>
@@ -10433,10 +11366,10 @@
                 <a:ea typeface="Source Sans 3 Bold" pitchFamily="34" charset="-122"/>
                 <a:cs typeface="Source Sans 3 Bold" pitchFamily="34" charset="-120"/>
               </a:rPr>
-              <a:t>MET Collection API (Bild, Link, Object Number) und </a:t>
-            </a:r>
-            <a:r>
-              <a:rPr lang="en-US" dirty="0" err="1">
+              <a:t>): </a:t>
+            </a:r>
+            <a:r>
+              <a:rPr lang="en-US" dirty="0">
                 <a:solidFill>
                   <a:srgbClr val="3D3838"/>
                 </a:solidFill>
@@ -10444,10 +11377,10 @@
                 <a:ea typeface="Source Sans 3 Bold" pitchFamily="34" charset="-122"/>
                 <a:cs typeface="Source Sans 3 Bold" pitchFamily="34" charset="-120"/>
               </a:rPr>
-              <a:t>Wikidata</a:t>
-            </a:r>
-            <a:r>
-              <a:rPr lang="en-US" dirty="0">
+              <a:t>„Iran" </a:t>
+            </a:r>
+            <a:r>
+              <a:rPr lang="en-US" dirty="0" err="1">
                 <a:solidFill>
                   <a:srgbClr val="3D3838"/>
                 </a:solidFill>
@@ -10455,10 +11388,10 @@
                 <a:ea typeface="Source Sans 3 Bold" pitchFamily="34" charset="-122"/>
                 <a:cs typeface="Source Sans 3 Bold" pitchFamily="34" charset="-120"/>
               </a:rPr>
-              <a:t>-API (</a:t>
-            </a:r>
-            <a:r>
-              <a:rPr lang="en-US" dirty="0" err="1">
+              <a:t>als</a:t>
+            </a:r>
+            <a:r>
+              <a:rPr lang="en-US" dirty="0">
                 <a:solidFill>
                   <a:srgbClr val="3D3838"/>
                 </a:solidFill>
@@ -10466,10 +11399,10 @@
                 <a:ea typeface="Source Sans 3 Bold" pitchFamily="34" charset="-122"/>
                 <a:cs typeface="Source Sans 3 Bold" pitchFamily="34" charset="-120"/>
               </a:rPr>
-              <a:t>Koordinaten</a:t>
-            </a:r>
-            <a:r>
-              <a:rPr lang="en-US" dirty="0">
+              <a:t> </a:t>
+            </a:r>
+            <a:r>
+              <a:rPr lang="en-US" dirty="0" err="1">
                 <a:solidFill>
                   <a:srgbClr val="3D3838"/>
                 </a:solidFill>
@@ -10477,7 +11410,335 @@
                 <a:ea typeface="Source Sans 3 Bold" pitchFamily="34" charset="-122"/>
                 <a:cs typeface="Source Sans 3 Bold" pitchFamily="34" charset="-120"/>
               </a:rPr>
-              <a:t>, UNESCO World Heritage)</a:t>
+              <a:t>Kulturraum</a:t>
+            </a:r>
+            <a:r>
+              <a:rPr lang="en-US" dirty="0">
+                <a:solidFill>
+                  <a:srgbClr val="3D3838"/>
+                </a:solidFill>
+                <a:latin typeface="Aptos Narrow" panose="020B0004020202020204" pitchFamily="34" charset="0"/>
+                <a:ea typeface="Source Sans 3 Bold" pitchFamily="34" charset="-122"/>
+                <a:cs typeface="Source Sans 3 Bold" pitchFamily="34" charset="-120"/>
+              </a:rPr>
+              <a:t> </a:t>
+            </a:r>
+            <a:r>
+              <a:rPr lang="en-US" dirty="0" err="1">
+                <a:solidFill>
+                  <a:srgbClr val="3D3838"/>
+                </a:solidFill>
+                <a:latin typeface="Aptos Narrow" panose="020B0004020202020204" pitchFamily="34" charset="0"/>
+                <a:ea typeface="Source Sans 3 Bold" pitchFamily="34" charset="-122"/>
+                <a:cs typeface="Source Sans 3 Bold" pitchFamily="34" charset="-120"/>
+              </a:rPr>
+              <a:t>verstanden</a:t>
+            </a:r>
+            <a:r>
+              <a:rPr lang="en-US" dirty="0">
+                <a:solidFill>
+                  <a:srgbClr val="3D3838"/>
+                </a:solidFill>
+                <a:latin typeface="Aptos Narrow" panose="020B0004020202020204" pitchFamily="34" charset="0"/>
+                <a:ea typeface="Source Sans 3 Bold" pitchFamily="34" charset="-122"/>
+                <a:cs typeface="Source Sans 3 Bold" pitchFamily="34" charset="-120"/>
+              </a:rPr>
+              <a:t>, nicht </a:t>
+            </a:r>
+            <a:r>
+              <a:rPr lang="en-US" dirty="0" err="1">
+                <a:solidFill>
+                  <a:srgbClr val="3D3838"/>
+                </a:solidFill>
+                <a:latin typeface="Aptos Narrow" panose="020B0004020202020204" pitchFamily="34" charset="0"/>
+                <a:ea typeface="Source Sans 3 Bold" pitchFamily="34" charset="-122"/>
+                <a:cs typeface="Source Sans 3 Bold" pitchFamily="34" charset="-120"/>
+              </a:rPr>
+              <a:t>nur</a:t>
+            </a:r>
+            <a:r>
+              <a:rPr lang="en-US" dirty="0">
+                <a:solidFill>
+                  <a:srgbClr val="3D3838"/>
+                </a:solidFill>
+                <a:latin typeface="Aptos Narrow" panose="020B0004020202020204" pitchFamily="34" charset="0"/>
+                <a:ea typeface="Source Sans 3 Bold" pitchFamily="34" charset="-122"/>
+                <a:cs typeface="Source Sans 3 Bold" pitchFamily="34" charset="-120"/>
+              </a:rPr>
+              <a:t> </a:t>
+            </a:r>
+            <a:r>
+              <a:rPr lang="en-US" dirty="0" err="1">
+                <a:solidFill>
+                  <a:srgbClr val="3D3838"/>
+                </a:solidFill>
+                <a:latin typeface="Aptos Narrow" panose="020B0004020202020204" pitchFamily="34" charset="0"/>
+                <a:ea typeface="Source Sans 3 Bold" pitchFamily="34" charset="-122"/>
+                <a:cs typeface="Source Sans 3 Bold" pitchFamily="34" charset="-120"/>
+              </a:rPr>
+              <a:t>als</a:t>
+            </a:r>
+            <a:r>
+              <a:rPr lang="en-US" dirty="0">
+                <a:solidFill>
+                  <a:srgbClr val="3D3838"/>
+                </a:solidFill>
+                <a:latin typeface="Aptos Narrow" panose="020B0004020202020204" pitchFamily="34" charset="0"/>
+                <a:ea typeface="Source Sans 3 Bold" pitchFamily="34" charset="-122"/>
+                <a:cs typeface="Source Sans 3 Bold" pitchFamily="34" charset="-120"/>
+              </a:rPr>
+              <a:t> Staat – </a:t>
+            </a:r>
+            <a:r>
+              <a:rPr lang="en-US" dirty="0" err="1">
+                <a:solidFill>
+                  <a:srgbClr val="3D3838"/>
+                </a:solidFill>
+                <a:latin typeface="Aptos Narrow" panose="020B0004020202020204" pitchFamily="34" charset="0"/>
+                <a:ea typeface="Source Sans 3 Bold" pitchFamily="34" charset="-122"/>
+                <a:cs typeface="Source Sans 3 Bold" pitchFamily="34" charset="-120"/>
+              </a:rPr>
+              <a:t>Kombination</a:t>
+            </a:r>
+            <a:r>
+              <a:rPr lang="en-US" dirty="0">
+                <a:solidFill>
+                  <a:srgbClr val="3D3838"/>
+                </a:solidFill>
+                <a:latin typeface="Aptos Narrow" panose="020B0004020202020204" pitchFamily="34" charset="0"/>
+                <a:ea typeface="Source Sans 3 Bold" pitchFamily="34" charset="-122"/>
+                <a:cs typeface="Source Sans 3 Bold" pitchFamily="34" charset="-120"/>
+              </a:rPr>
+              <a:t> </a:t>
+            </a:r>
+            <a:r>
+              <a:rPr lang="en-US" dirty="0" err="1">
+                <a:solidFill>
+                  <a:srgbClr val="3D3838"/>
+                </a:solidFill>
+                <a:latin typeface="Aptos Narrow" panose="020B0004020202020204" pitchFamily="34" charset="0"/>
+                <a:ea typeface="Source Sans 3 Bold" pitchFamily="34" charset="-122"/>
+                <a:cs typeface="Source Sans 3 Bold" pitchFamily="34" charset="-120"/>
+              </a:rPr>
+              <a:t>aus</a:t>
+            </a:r>
+            <a:r>
+              <a:rPr lang="en-US" dirty="0">
+                <a:solidFill>
+                  <a:srgbClr val="3D3838"/>
+                </a:solidFill>
+                <a:latin typeface="Aptos Narrow" panose="020B0004020202020204" pitchFamily="34" charset="0"/>
+                <a:ea typeface="Source Sans 3 Bold" pitchFamily="34" charset="-122"/>
+                <a:cs typeface="Source Sans 3 Bold" pitchFamily="34" charset="-120"/>
+              </a:rPr>
+              <a:t> </a:t>
+            </a:r>
+            <a:r>
+              <a:rPr lang="en-US" dirty="0" err="1">
+                <a:solidFill>
+                  <a:srgbClr val="3D3838"/>
+                </a:solidFill>
+                <a:latin typeface="Aptos Narrow" panose="020B0004020202020204" pitchFamily="34" charset="0"/>
+                <a:ea typeface="Source Sans 3 Bold" pitchFamily="34" charset="-122"/>
+                <a:cs typeface="Source Sans 3 Bold" pitchFamily="34" charset="-120"/>
+              </a:rPr>
+              <a:t>country_clean</a:t>
+            </a:r>
+            <a:r>
+              <a:rPr lang="en-US" dirty="0">
+                <a:solidFill>
+                  <a:srgbClr val="3D3838"/>
+                </a:solidFill>
+                <a:latin typeface="Aptos Narrow" panose="020B0004020202020204" pitchFamily="34" charset="0"/>
+                <a:ea typeface="Source Sans 3 Bold" pitchFamily="34" charset="-122"/>
+                <a:cs typeface="Source Sans 3 Bold" pitchFamily="34" charset="-120"/>
+              </a:rPr>
+              <a:t>, region und </a:t>
+            </a:r>
+            <a:r>
+              <a:rPr lang="en-US" dirty="0" err="1">
+                <a:solidFill>
+                  <a:srgbClr val="3D3838"/>
+                </a:solidFill>
+                <a:latin typeface="Aptos Narrow" panose="020B0004020202020204" pitchFamily="34" charset="0"/>
+                <a:ea typeface="Source Sans 3 Bold" pitchFamily="34" charset="-122"/>
+                <a:cs typeface="Source Sans 3 Bold" pitchFamily="34" charset="-120"/>
+              </a:rPr>
+              <a:t>kuratierter</a:t>
+            </a:r>
+            <a:r>
+              <a:rPr lang="en-US" dirty="0">
+                <a:solidFill>
+                  <a:srgbClr val="3D3838"/>
+                </a:solidFill>
+                <a:latin typeface="Aptos Narrow" panose="020B0004020202020204" pitchFamily="34" charset="0"/>
+                <a:ea typeface="Source Sans 3 Bold" pitchFamily="34" charset="-122"/>
+                <a:cs typeface="Source Sans 3 Bold" pitchFamily="34" charset="-120"/>
+              </a:rPr>
+              <a:t> </a:t>
+            </a:r>
+            <a:r>
+              <a:rPr lang="en-US" dirty="0" err="1">
+                <a:solidFill>
+                  <a:srgbClr val="3D3838"/>
+                </a:solidFill>
+                <a:latin typeface="Aptos Narrow" panose="020B0004020202020204" pitchFamily="34" charset="0"/>
+                <a:ea typeface="Source Sans 3 Bold" pitchFamily="34" charset="-122"/>
+                <a:cs typeface="Source Sans 3 Bold" pitchFamily="34" charset="-120"/>
+              </a:rPr>
+              <a:t>Kulturliste</a:t>
+            </a:r>
+            <a:r>
+              <a:rPr lang="en-US" dirty="0">
+                <a:solidFill>
+                  <a:srgbClr val="3D3838"/>
+                </a:solidFill>
+                <a:latin typeface="Aptos Narrow" panose="020B0004020202020204" pitchFamily="34" charset="0"/>
+                <a:ea typeface="Source Sans 3 Bold" pitchFamily="34" charset="-122"/>
+                <a:cs typeface="Source Sans 3 Bold" pitchFamily="34" charset="-120"/>
+              </a:rPr>
+              <a:t> (u. a. Achaemenid, Sasanian, Qajar)</a:t>
+            </a:r>
+          </a:p>
+          <a:p>
+            <a:pPr marL="284480" indent="-284480" algn="l">
+              <a:lnSpc>
+                <a:spcPct val="114000"/>
+              </a:lnSpc>
+              <a:buSzPct val="100000"/>
+              <a:buChar char="•"/>
+            </a:pPr>
+            <a:r>
+              <a:rPr lang="en-US" b="1" dirty="0" err="1">
+                <a:solidFill>
+                  <a:srgbClr val="3D3838"/>
+                </a:solidFill>
+                <a:latin typeface="Aptos Narrow" panose="020B0004020202020204" pitchFamily="34" charset="0"/>
+                <a:ea typeface="Source Sans 3 Bold" pitchFamily="34" charset="-122"/>
+                <a:cs typeface="Source Sans 3 Bold" pitchFamily="34" charset="-120"/>
+              </a:rPr>
+              <a:t>iran_period</a:t>
+            </a:r>
+            <a:r>
+              <a:rPr lang="en-US" b="1" dirty="0">
+                <a:solidFill>
+                  <a:srgbClr val="3D3838"/>
+                </a:solidFill>
+                <a:latin typeface="Aptos Narrow" panose="020B0004020202020204" pitchFamily="34" charset="0"/>
+                <a:ea typeface="Source Sans 3 Bold" pitchFamily="34" charset="-122"/>
+                <a:cs typeface="Source Sans 3 Bold" pitchFamily="34" charset="-120"/>
+              </a:rPr>
+              <a:t> </a:t>
+            </a:r>
+            <a:r>
+              <a:rPr lang="en-US" dirty="0" err="1">
+                <a:solidFill>
+                  <a:srgbClr val="3D3838"/>
+                </a:solidFill>
+                <a:latin typeface="Aptos Narrow" panose="020B0004020202020204" pitchFamily="34" charset="0"/>
+                <a:ea typeface="Source Sans 3 Bold" pitchFamily="34" charset="-122"/>
+                <a:cs typeface="Source Sans 3 Bold" pitchFamily="34" charset="-120"/>
+              </a:rPr>
+              <a:t>mit</a:t>
+            </a:r>
+            <a:r>
+              <a:rPr lang="en-US" dirty="0">
+                <a:solidFill>
+                  <a:srgbClr val="3D3838"/>
+                </a:solidFill>
+                <a:latin typeface="Aptos Narrow" panose="020B0004020202020204" pitchFamily="34" charset="0"/>
+                <a:ea typeface="Source Sans 3 Bold" pitchFamily="34" charset="-122"/>
+                <a:cs typeface="Source Sans 3 Bold" pitchFamily="34" charset="-120"/>
+              </a:rPr>
+              <a:t> 14 </a:t>
+            </a:r>
+            <a:r>
+              <a:rPr lang="en-US" dirty="0" err="1">
+                <a:solidFill>
+                  <a:srgbClr val="3D3838"/>
+                </a:solidFill>
+                <a:latin typeface="Aptos Narrow" panose="020B0004020202020204" pitchFamily="34" charset="0"/>
+                <a:ea typeface="Source Sans 3 Bold" pitchFamily="34" charset="-122"/>
+                <a:cs typeface="Source Sans 3 Bold" pitchFamily="34" charset="-120"/>
+              </a:rPr>
+              <a:t>historischen</a:t>
+            </a:r>
+            <a:r>
+              <a:rPr lang="en-US" dirty="0">
+                <a:solidFill>
+                  <a:srgbClr val="3D3838"/>
+                </a:solidFill>
+                <a:latin typeface="Aptos Narrow" panose="020B0004020202020204" pitchFamily="34" charset="0"/>
+                <a:ea typeface="Source Sans 3 Bold" pitchFamily="34" charset="-122"/>
+                <a:cs typeface="Source Sans 3 Bold" pitchFamily="34" charset="-120"/>
+              </a:rPr>
+              <a:t> </a:t>
+            </a:r>
+            <a:r>
+              <a:rPr lang="en-US" dirty="0" err="1">
+                <a:solidFill>
+                  <a:srgbClr val="3D3838"/>
+                </a:solidFill>
+                <a:latin typeface="Aptos Narrow" panose="020B0004020202020204" pitchFamily="34" charset="0"/>
+                <a:ea typeface="Source Sans 3 Bold" pitchFamily="34" charset="-122"/>
+                <a:cs typeface="Source Sans 3 Bold" pitchFamily="34" charset="-120"/>
+              </a:rPr>
+              <a:t>Epochen</a:t>
+            </a:r>
+            <a:r>
+              <a:rPr lang="en-US" dirty="0">
+                <a:solidFill>
+                  <a:srgbClr val="3D3838"/>
+                </a:solidFill>
+                <a:latin typeface="Aptos Narrow" panose="020B0004020202020204" pitchFamily="34" charset="0"/>
+                <a:ea typeface="Source Sans 3 Bold" pitchFamily="34" charset="-122"/>
+                <a:cs typeface="Source Sans 3 Bold" pitchFamily="34" charset="-120"/>
+              </a:rPr>
+              <a:t> (von Prehistoric bis </a:t>
+            </a:r>
+            <a:r>
+              <a:rPr lang="en-US" dirty="0" err="1">
+                <a:solidFill>
+                  <a:srgbClr val="3D3838"/>
+                </a:solidFill>
+                <a:latin typeface="Aptos Narrow" panose="020B0004020202020204" pitchFamily="34" charset="0"/>
+                <a:ea typeface="Source Sans 3 Bold" pitchFamily="34" charset="-122"/>
+                <a:cs typeface="Source Sans 3 Bold" pitchFamily="34" charset="-120"/>
+              </a:rPr>
+              <a:t>zur</a:t>
+            </a:r>
+            <a:r>
+              <a:rPr lang="en-US" dirty="0">
+                <a:solidFill>
+                  <a:srgbClr val="3D3838"/>
+                </a:solidFill>
+                <a:latin typeface="Aptos Narrow" panose="020B0004020202020204" pitchFamily="34" charset="0"/>
+                <a:ea typeface="Source Sans 3 Bold" pitchFamily="34" charset="-122"/>
+                <a:cs typeface="Source Sans 3 Bold" pitchFamily="34" charset="-120"/>
+              </a:rPr>
+              <a:t> Islamic Republic </a:t>
+            </a:r>
+            <a:r>
+              <a:rPr lang="en-US" dirty="0" err="1">
+                <a:solidFill>
+                  <a:srgbClr val="3D3838"/>
+                </a:solidFill>
+                <a:latin typeface="Aptos Narrow" panose="020B0004020202020204" pitchFamily="34" charset="0"/>
+                <a:ea typeface="Source Sans 3 Bold" pitchFamily="34" charset="-122"/>
+                <a:cs typeface="Source Sans 3 Bold" pitchFamily="34" charset="-120"/>
+              </a:rPr>
+              <a:t>seit</a:t>
+            </a:r>
+            <a:r>
+              <a:rPr lang="en-US" dirty="0">
+                <a:solidFill>
+                  <a:srgbClr val="3D3838"/>
+                </a:solidFill>
+                <a:latin typeface="Aptos Narrow" panose="020B0004020202020204" pitchFamily="34" charset="0"/>
+                <a:ea typeface="Source Sans 3 Bold" pitchFamily="34" charset="-122"/>
+                <a:cs typeface="Source Sans 3 Bold" pitchFamily="34" charset="-120"/>
+              </a:rPr>
+              <a:t> 1979)</a:t>
             </a:r>
           </a:p>
         </p:txBody>
@@ -10490,7 +11751,7 @@
         </p:nvSpPr>
         <p:spPr>
           <a:xfrm>
-            <a:off x="5202603" y="5543135"/>
+            <a:off x="5202603" y="5224903"/>
             <a:ext cx="6275528" cy="762830"/>
           </a:xfrm>
           <a:prstGeom prst="roundRect">
@@ -10527,7 +11788,7 @@
         </p:blipFill>
         <p:spPr>
           <a:xfrm>
-            <a:off x="5382483" y="5834607"/>
+            <a:off x="5382483" y="5516375"/>
             <a:ext cx="224923" cy="179884"/>
           </a:xfrm>
           <a:prstGeom prst="rect">
@@ -10543,7 +11804,7 @@
         </p:nvSpPr>
         <p:spPr>
           <a:xfrm>
-            <a:off x="5787285" y="5631298"/>
+            <a:off x="5787285" y="5313066"/>
             <a:ext cx="5690846" cy="586503"/>
           </a:xfrm>
           <a:prstGeom prst="rect">
@@ -10628,6 +11889,548 @@
 </file>
 
 <file path=ppt/slides/slide8.xml><?xml version="1.0" encoding="utf-8"?>
+<p:sld xmlns:a="http://schemas.openxmlformats.org/drawingml/2006/main" xmlns:r="http://schemas.openxmlformats.org/officeDocument/2006/relationships" xmlns:p="http://schemas.openxmlformats.org/presentationml/2006/main">
+  <p:cSld>
+    <p:spTree>
+      <p:nvGrpSpPr>
+        <p:cNvPr id="1" name="">
+          <a:extLst>
+            <a:ext uri="{FF2B5EF4-FFF2-40B4-BE49-F238E27FC236}">
+              <a16:creationId xmlns:a16="http://schemas.microsoft.com/office/drawing/2014/main" id="{B4594541-D7D8-40E1-7C8D-3259A204EEC8}"/>
+            </a:ext>
+          </a:extLst>
+        </p:cNvPr>
+        <p:cNvGrpSpPr/>
+        <p:nvPr/>
+      </p:nvGrpSpPr>
+      <p:grpSpPr>
+        <a:xfrm>
+          <a:off x="0" y="0"/>
+          <a:ext cx="0" cy="0"/>
+          <a:chOff x="0" y="0"/>
+          <a:chExt cx="0" cy="0"/>
+        </a:xfrm>
+      </p:grpSpPr>
+      <p:sp>
+        <p:nvSpPr>
+          <p:cNvPr id="2" name="Text 0">
+            <a:extLst>
+              <a:ext uri="{FF2B5EF4-FFF2-40B4-BE49-F238E27FC236}">
+                <a16:creationId xmlns:a16="http://schemas.microsoft.com/office/drawing/2014/main" id="{7BC502E1-C157-2F54-17D8-570E9BE3FF38}"/>
+              </a:ext>
+            </a:extLst>
+          </p:cNvPr>
+          <p:cNvSpPr/>
+          <p:nvPr/>
+        </p:nvSpPr>
+        <p:spPr>
+          <a:xfrm>
+            <a:off x="719966" y="508497"/>
+            <a:ext cx="10752067" cy="511274"/>
+          </a:xfrm>
+          <a:prstGeom prst="rect">
+            <a:avLst/>
+          </a:prstGeom>
+          <a:noFill/>
+          <a:ln/>
+        </p:spPr>
+        <p:txBody>
+          <a:bodyPr wrap="none" lIns="0" tIns="0" rIns="0" bIns="0" rtlCol="0" anchor="t"/>
+          <a:lstStyle/>
+          <a:p>
+            <a:pPr marL="0" indent="0" algn="l">
+              <a:lnSpc>
+                <a:spcPct val="104000"/>
+              </a:lnSpc>
+              <a:buNone/>
+            </a:pPr>
+            <a:r>
+              <a:rPr lang="en-US" sz="3600" b="1" kern="0" spc="-32" dirty="0">
+                <a:solidFill>
+                  <a:srgbClr val="000000"/>
+                </a:solidFill>
+                <a:latin typeface="Aptos Narrow" panose="020B0004020202020204" pitchFamily="34" charset="0"/>
+                <a:ea typeface="Montserrat Bold" pitchFamily="34" charset="-122"/>
+                <a:cs typeface="Montserrat Bold" pitchFamily="34" charset="-120"/>
+              </a:rPr>
+              <a:t>Feature Engineering: Dashboard</a:t>
+            </a:r>
+            <a:endParaRPr lang="en-US" sz="3600" dirty="0"/>
+          </a:p>
+        </p:txBody>
+      </p:sp>
+      <p:pic>
+        <p:nvPicPr>
+          <p:cNvPr id="3" name="Image 0">
+            <a:extLst>
+              <a:ext uri="{FF2B5EF4-FFF2-40B4-BE49-F238E27FC236}">
+                <a16:creationId xmlns:a16="http://schemas.microsoft.com/office/drawing/2014/main" id="{75B90D79-2DC5-AC01-4A78-7AF9F2A8C2DD}"/>
+              </a:ext>
+            </a:extLst>
+          </p:cNvPr>
+          <p:cNvPicPr>
+            <a:picLocks noChangeAspect="1"/>
+          </p:cNvPicPr>
+          <p:nvPr/>
+        </p:nvPicPr>
+        <p:blipFill rotWithShape="1">
+          <a:blip r:embed="rId3"/>
+          <a:srcRect t="13" b="13"/>
+          <a:stretch>
+            <a:fillRect/>
+          </a:stretch>
+        </p:blipFill>
+        <p:spPr>
+          <a:xfrm>
+            <a:off x="7441814" y="0"/>
+            <a:ext cx="4750186" cy="6858000"/>
+          </a:xfrm>
+          <a:prstGeom prst="rect">
+            <a:avLst/>
+          </a:prstGeom>
+          <a:ln w="28575">
+            <a:noFill/>
+          </a:ln>
+        </p:spPr>
+      </p:pic>
+      <p:sp>
+        <p:nvSpPr>
+          <p:cNvPr id="4" name="Text 1">
+            <a:extLst>
+              <a:ext uri="{FF2B5EF4-FFF2-40B4-BE49-F238E27FC236}">
+                <a16:creationId xmlns:a16="http://schemas.microsoft.com/office/drawing/2014/main" id="{3C41DB55-6A03-75B7-9F39-F74BDF412162}"/>
+              </a:ext>
+            </a:extLst>
+          </p:cNvPr>
+          <p:cNvSpPr/>
+          <p:nvPr/>
+        </p:nvSpPr>
+        <p:spPr>
+          <a:xfrm>
+            <a:off x="716504" y="1911274"/>
+            <a:ext cx="5829806" cy="3189579"/>
+          </a:xfrm>
+          <a:prstGeom prst="rect">
+            <a:avLst/>
+          </a:prstGeom>
+          <a:noFill/>
+          <a:ln/>
+        </p:spPr>
+        <p:txBody>
+          <a:bodyPr wrap="square" lIns="0" tIns="0" rIns="0" bIns="0" rtlCol="0" anchor="t">
+            <a:normAutofit/>
+          </a:bodyPr>
+          <a:lstStyle/>
+          <a:p>
+            <a:pPr marL="284480" indent="-284480" algn="l">
+              <a:lnSpc>
+                <a:spcPct val="114000"/>
+              </a:lnSpc>
+              <a:buSzPct val="100000"/>
+              <a:buChar char="•"/>
+            </a:pPr>
+            <a:r>
+              <a:rPr lang="en-US" b="1" dirty="0" err="1">
+                <a:solidFill>
+                  <a:srgbClr val="3D3838"/>
+                </a:solidFill>
+                <a:latin typeface="Aptos Narrow" panose="020B0004020202020204" pitchFamily="34" charset="0"/>
+                <a:ea typeface="Source Sans 3 Bold" pitchFamily="34" charset="-122"/>
+                <a:cs typeface="Source Sans 3 Bold" pitchFamily="34" charset="-120"/>
+              </a:rPr>
+              <a:t>Visualisierung</a:t>
+            </a:r>
+            <a:r>
+              <a:rPr lang="en-US" dirty="0">
+                <a:solidFill>
+                  <a:srgbClr val="3D3838"/>
+                </a:solidFill>
+                <a:latin typeface="Aptos Narrow" panose="020B0004020202020204" pitchFamily="34" charset="0"/>
+                <a:ea typeface="Source Sans 3 Bold" pitchFamily="34" charset="-122"/>
+                <a:cs typeface="Source Sans 3 Bold" pitchFamily="34" charset="-120"/>
+              </a:rPr>
+              <a:t> der </a:t>
+            </a:r>
+            <a:r>
+              <a:rPr lang="en-US" dirty="0" err="1">
+                <a:solidFill>
+                  <a:srgbClr val="3D3838"/>
+                </a:solidFill>
+                <a:latin typeface="Aptos Narrow" panose="020B0004020202020204" pitchFamily="34" charset="0"/>
+                <a:ea typeface="Source Sans 3 Bold" pitchFamily="34" charset="-122"/>
+                <a:cs typeface="Source Sans 3 Bold" pitchFamily="34" charset="-120"/>
+              </a:rPr>
+              <a:t>Analyseergebnisse</a:t>
+            </a:r>
+            <a:r>
+              <a:rPr lang="en-US" dirty="0">
+                <a:solidFill>
+                  <a:srgbClr val="3D3838"/>
+                </a:solidFill>
+                <a:latin typeface="Aptos Narrow" panose="020B0004020202020204" pitchFamily="34" charset="0"/>
+                <a:ea typeface="Source Sans 3 Bold" pitchFamily="34" charset="-122"/>
+                <a:cs typeface="Source Sans 3 Bold" pitchFamily="34" charset="-120"/>
+              </a:rPr>
+              <a:t> in vier </a:t>
+            </a:r>
+            <a:r>
+              <a:rPr lang="en-US" dirty="0" err="1">
+                <a:solidFill>
+                  <a:srgbClr val="3D3838"/>
+                </a:solidFill>
+                <a:latin typeface="Aptos Narrow" panose="020B0004020202020204" pitchFamily="34" charset="0"/>
+                <a:ea typeface="Source Sans 3 Bold" pitchFamily="34" charset="-122"/>
+                <a:cs typeface="Source Sans 3 Bold" pitchFamily="34" charset="-120"/>
+              </a:rPr>
+              <a:t>interaktiven</a:t>
+            </a:r>
+            <a:r>
+              <a:rPr lang="en-US" dirty="0">
+                <a:solidFill>
+                  <a:srgbClr val="3D3838"/>
+                </a:solidFill>
+                <a:latin typeface="Aptos Narrow" panose="020B0004020202020204" pitchFamily="34" charset="0"/>
+                <a:ea typeface="Source Sans 3 Bold" pitchFamily="34" charset="-122"/>
+                <a:cs typeface="Source Sans 3 Bold" pitchFamily="34" charset="-120"/>
+              </a:rPr>
+              <a:t> Seiten (Overall Collection, Iranian-Persian Holdings, Focus Areas, Object Explorer) </a:t>
+            </a:r>
+          </a:p>
+          <a:p>
+            <a:pPr marL="284480" indent="-284480" algn="l">
+              <a:lnSpc>
+                <a:spcPct val="114000"/>
+              </a:lnSpc>
+              <a:buSzPct val="100000"/>
+              <a:buChar char="•"/>
+            </a:pPr>
+            <a:r>
+              <a:rPr lang="de-DE" b="1" dirty="0" err="1">
+                <a:solidFill>
+                  <a:srgbClr val="3D3838"/>
+                </a:solidFill>
+                <a:latin typeface="Aptos Narrow" panose="020B0004020202020204" pitchFamily="34" charset="0"/>
+                <a:ea typeface="Source Sans 3 Bold" pitchFamily="34" charset="-122"/>
+                <a:cs typeface="Source Sans 3 Bold" pitchFamily="34" charset="-120"/>
+              </a:rPr>
+              <a:t>Object</a:t>
+            </a:r>
+            <a:r>
+              <a:rPr lang="de-DE" b="1" dirty="0">
+                <a:solidFill>
+                  <a:srgbClr val="3D3838"/>
+                </a:solidFill>
+                <a:latin typeface="Aptos Narrow" panose="020B0004020202020204" pitchFamily="34" charset="0"/>
+                <a:ea typeface="Source Sans 3 Bold" pitchFamily="34" charset="-122"/>
+                <a:cs typeface="Source Sans 3 Bold" pitchFamily="34" charset="-120"/>
+              </a:rPr>
+              <a:t> Explorer: </a:t>
+            </a:r>
+            <a:r>
+              <a:rPr lang="de-DE" dirty="0">
+                <a:solidFill>
+                  <a:srgbClr val="3D3838"/>
+                </a:solidFill>
+                <a:latin typeface="Aptos Narrow" panose="020B0004020202020204" pitchFamily="34" charset="0"/>
+                <a:ea typeface="Source Sans 3 Bold" pitchFamily="34" charset="-122"/>
+                <a:cs typeface="Source Sans 3 Bold" pitchFamily="34" charset="-120"/>
+              </a:rPr>
+              <a:t>Freie filterbare Objektsuche </a:t>
+            </a:r>
+          </a:p>
+          <a:p>
+            <a:pPr marL="284480" indent="-284480" algn="l">
+              <a:lnSpc>
+                <a:spcPct val="114000"/>
+              </a:lnSpc>
+              <a:buSzPct val="100000"/>
+              <a:buChar char="•"/>
+            </a:pPr>
+            <a:r>
+              <a:rPr lang="en-US" b="1" dirty="0">
+                <a:solidFill>
+                  <a:srgbClr val="3D3838"/>
+                </a:solidFill>
+                <a:latin typeface="Aptos Narrow" panose="020B0004020202020204" pitchFamily="34" charset="0"/>
+                <a:ea typeface="Source Sans 3 Bold" pitchFamily="34" charset="-122"/>
+                <a:cs typeface="Source Sans 3 Bold" pitchFamily="34" charset="-120"/>
+              </a:rPr>
+              <a:t>API-Anreicherung: </a:t>
+            </a:r>
+            <a:r>
+              <a:rPr lang="de-DE" dirty="0">
+                <a:solidFill>
+                  <a:srgbClr val="3D3838"/>
+                </a:solidFill>
+                <a:latin typeface="Aptos Narrow" panose="020B0004020202020204" pitchFamily="34" charset="0"/>
+                <a:ea typeface="Source Sans 3 Bold" pitchFamily="34" charset="-122"/>
+                <a:cs typeface="Source Sans 3 Bold" pitchFamily="34" charset="-120"/>
+              </a:rPr>
+              <a:t>MET Collection API (Bild, Link, </a:t>
+            </a:r>
+            <a:r>
+              <a:rPr lang="de-DE" dirty="0" err="1">
+                <a:solidFill>
+                  <a:srgbClr val="3D3838"/>
+                </a:solidFill>
+                <a:latin typeface="Aptos Narrow" panose="020B0004020202020204" pitchFamily="34" charset="0"/>
+                <a:ea typeface="Source Sans 3 Bold" pitchFamily="34" charset="-122"/>
+                <a:cs typeface="Source Sans 3 Bold" pitchFamily="34" charset="-120"/>
+              </a:rPr>
+              <a:t>Object</a:t>
+            </a:r>
+            <a:r>
+              <a:rPr lang="de-DE" dirty="0">
+                <a:solidFill>
+                  <a:srgbClr val="3D3838"/>
+                </a:solidFill>
+                <a:latin typeface="Aptos Narrow" panose="020B0004020202020204" pitchFamily="34" charset="0"/>
+                <a:ea typeface="Source Sans 3 Bold" pitchFamily="34" charset="-122"/>
+                <a:cs typeface="Source Sans 3 Bold" pitchFamily="34" charset="-120"/>
+              </a:rPr>
+              <a:t> Number) und </a:t>
+            </a:r>
+            <a:r>
+              <a:rPr lang="de-DE" dirty="0" err="1">
+                <a:solidFill>
+                  <a:srgbClr val="3D3838"/>
+                </a:solidFill>
+                <a:latin typeface="Aptos Narrow" panose="020B0004020202020204" pitchFamily="34" charset="0"/>
+                <a:ea typeface="Source Sans 3 Bold" pitchFamily="34" charset="-122"/>
+                <a:cs typeface="Source Sans 3 Bold" pitchFamily="34" charset="-120"/>
+              </a:rPr>
+              <a:t>Wikidata</a:t>
+            </a:r>
+            <a:r>
+              <a:rPr lang="de-DE" dirty="0">
+                <a:solidFill>
+                  <a:srgbClr val="3D3838"/>
+                </a:solidFill>
+                <a:latin typeface="Aptos Narrow" panose="020B0004020202020204" pitchFamily="34" charset="0"/>
+                <a:ea typeface="Source Sans 3 Bold" pitchFamily="34" charset="-122"/>
+                <a:cs typeface="Source Sans 3 Bold" pitchFamily="34" charset="-120"/>
+              </a:rPr>
+              <a:t>-API (Geocoding der Herkunftsstädte und iranischer UNESCO-Weltkulturerbestätten) für eine gemeinsame Karte</a:t>
+            </a:r>
+            <a:endParaRPr lang="en-US" dirty="0">
+              <a:solidFill>
+                <a:srgbClr val="3D3838"/>
+              </a:solidFill>
+              <a:latin typeface="Aptos Narrow" panose="020B0004020202020204" pitchFamily="34" charset="0"/>
+              <a:ea typeface="Source Sans 3 Bold" pitchFamily="34" charset="-122"/>
+              <a:cs typeface="Source Sans 3 Bold" pitchFamily="34" charset="-120"/>
+            </a:endParaRPr>
+          </a:p>
+        </p:txBody>
+      </p:sp>
+      <p:sp>
+        <p:nvSpPr>
+          <p:cNvPr id="7" name="Text 3">
+            <a:extLst>
+              <a:ext uri="{FF2B5EF4-FFF2-40B4-BE49-F238E27FC236}">
+                <a16:creationId xmlns:a16="http://schemas.microsoft.com/office/drawing/2014/main" id="{39E1F793-9E23-C2A3-0583-928A6FC34EBF}"/>
+              </a:ext>
+            </a:extLst>
+          </p:cNvPr>
+          <p:cNvSpPr/>
+          <p:nvPr/>
+        </p:nvSpPr>
+        <p:spPr>
+          <a:xfrm>
+            <a:off x="5787285" y="5817606"/>
+            <a:ext cx="5690846" cy="586503"/>
+          </a:xfrm>
+          <a:prstGeom prst="rect">
+            <a:avLst/>
+          </a:prstGeom>
+          <a:noFill/>
+          <a:ln/>
+        </p:spPr>
+        <p:txBody>
+          <a:bodyPr wrap="square" lIns="0" tIns="0" rIns="0" bIns="0" rtlCol="0" anchor="t">
+            <a:normAutofit/>
+          </a:bodyPr>
+          <a:lstStyle/>
+          <a:p>
+            <a:pPr marL="0" indent="0" algn="l">
+              <a:lnSpc>
+                <a:spcPct val="114000"/>
+              </a:lnSpc>
+              <a:buNone/>
+            </a:pPr>
+            <a:endParaRPr lang="en-US" sz="1600" dirty="0"/>
+          </a:p>
+        </p:txBody>
+      </p:sp>
+      <p:sp>
+        <p:nvSpPr>
+          <p:cNvPr id="9" name="Textfeld 8">
+            <a:extLst>
+              <a:ext uri="{FF2B5EF4-FFF2-40B4-BE49-F238E27FC236}">
+                <a16:creationId xmlns:a16="http://schemas.microsoft.com/office/drawing/2014/main" id="{9B287EFC-1D6D-F4A3-2096-3D5313E83B66}"/>
+              </a:ext>
+            </a:extLst>
+          </p:cNvPr>
+          <p:cNvSpPr txBox="1"/>
+          <p:nvPr/>
+        </p:nvSpPr>
+        <p:spPr>
+          <a:xfrm>
+            <a:off x="11764652" y="6454588"/>
+            <a:ext cx="490101" cy="338554"/>
+          </a:xfrm>
+          <a:prstGeom prst="rect">
+            <a:avLst/>
+          </a:prstGeom>
+          <a:noFill/>
+        </p:spPr>
+        <p:txBody>
+          <a:bodyPr wrap="square" rtlCol="0">
+            <a:spAutoFit/>
+          </a:bodyPr>
+          <a:lstStyle/>
+          <a:p>
+            <a:r>
+              <a:rPr lang="de-DE" sz="1600" dirty="0">
+                <a:solidFill>
+                  <a:srgbClr val="3D3838"/>
+                </a:solidFill>
+                <a:latin typeface="Aptos Narrow" panose="020B0004020202020204" pitchFamily="34" charset="0"/>
+              </a:rPr>
+              <a:t>7</a:t>
+            </a:r>
+          </a:p>
+        </p:txBody>
+      </p:sp>
+      <p:sp>
+        <p:nvSpPr>
+          <p:cNvPr id="10" name="Shape 7">
+            <a:extLst>
+              <a:ext uri="{FF2B5EF4-FFF2-40B4-BE49-F238E27FC236}">
+                <a16:creationId xmlns:a16="http://schemas.microsoft.com/office/drawing/2014/main" id="{ADF4D96B-B939-FD40-F786-385956D4A19A}"/>
+              </a:ext>
+            </a:extLst>
+          </p:cNvPr>
+          <p:cNvSpPr/>
+          <p:nvPr/>
+        </p:nvSpPr>
+        <p:spPr>
+          <a:xfrm>
+            <a:off x="713869" y="5055791"/>
+            <a:ext cx="5918435" cy="893762"/>
+          </a:xfrm>
+          <a:prstGeom prst="roundRect">
+            <a:avLst>
+              <a:gd name="adj" fmla="val 2870"/>
+            </a:avLst>
+          </a:prstGeom>
+          <a:solidFill>
+            <a:srgbClr val="FDECEA"/>
+          </a:solidFill>
+          <a:ln/>
+        </p:spPr>
+        <p:txBody>
+          <a:bodyPr/>
+          <a:lstStyle/>
+          <a:p>
+            <a:endParaRPr lang="de-DE"/>
+          </a:p>
+        </p:txBody>
+      </p:sp>
+      <p:pic>
+        <p:nvPicPr>
+          <p:cNvPr id="12" name="Image 4" descr="preencoded.png">
+            <a:extLst>
+              <a:ext uri="{FF2B5EF4-FFF2-40B4-BE49-F238E27FC236}">
+                <a16:creationId xmlns:a16="http://schemas.microsoft.com/office/drawing/2014/main" id="{786CC05F-6E9D-80DF-7AD0-EC613730BFC1}"/>
+              </a:ext>
+            </a:extLst>
+          </p:cNvPr>
+          <p:cNvPicPr>
+            <a:picLocks noChangeAspect="1"/>
+          </p:cNvPicPr>
+          <p:nvPr/>
+        </p:nvPicPr>
+        <p:blipFill>
+          <a:blip r:embed="rId4"/>
+          <a:stretch>
+            <a:fillRect/>
+          </a:stretch>
+        </p:blipFill>
+        <p:spPr>
+          <a:xfrm>
+            <a:off x="941462" y="5374484"/>
+            <a:ext cx="210284" cy="170954"/>
+          </a:xfrm>
+          <a:prstGeom prst="rect">
+            <a:avLst/>
+          </a:prstGeom>
+        </p:spPr>
+      </p:pic>
+      <p:sp>
+        <p:nvSpPr>
+          <p:cNvPr id="14" name="Text 8">
+            <a:extLst>
+              <a:ext uri="{FF2B5EF4-FFF2-40B4-BE49-F238E27FC236}">
+                <a16:creationId xmlns:a16="http://schemas.microsoft.com/office/drawing/2014/main" id="{53D41654-B310-D817-E8F8-E56F54E80780}"/>
+              </a:ext>
+            </a:extLst>
+          </p:cNvPr>
+          <p:cNvSpPr/>
+          <p:nvPr/>
+        </p:nvSpPr>
+        <p:spPr>
+          <a:xfrm>
+            <a:off x="1326124" y="5213041"/>
+            <a:ext cx="5268249" cy="808230"/>
+          </a:xfrm>
+          <a:prstGeom prst="rect">
+            <a:avLst/>
+          </a:prstGeom>
+          <a:noFill/>
+          <a:ln/>
+        </p:spPr>
+        <p:txBody>
+          <a:bodyPr wrap="square" lIns="0" tIns="0" rIns="0" bIns="0" rtlCol="0" anchor="t">
+            <a:normAutofit/>
+          </a:bodyPr>
+          <a:lstStyle/>
+          <a:p>
+            <a:pPr marL="0" indent="0" algn="l">
+              <a:lnSpc>
+                <a:spcPct val="114000"/>
+              </a:lnSpc>
+              <a:buNone/>
+            </a:pPr>
+            <a:r>
+              <a:rPr lang="de-DE" sz="1600" dirty="0">
+                <a:solidFill>
+                  <a:srgbClr val="000000"/>
+                </a:solidFill>
+                <a:latin typeface="Aptos Narrow" panose="020B0004020202020204" pitchFamily="34" charset="0"/>
+                <a:ea typeface="Source Sans 3" pitchFamily="34" charset="-122"/>
+                <a:cs typeface="Source Sans 3" pitchFamily="34" charset="-120"/>
+              </a:rPr>
+              <a:t>Das Dashboard macht die Analyseergebnisse und die Objekte interaktiv zugänglich und erlebbar.</a:t>
+            </a:r>
+            <a:endParaRPr lang="en-US" sz="1600" dirty="0"/>
+          </a:p>
+        </p:txBody>
+      </p:sp>
+    </p:spTree>
+    <p:extLst>
+      <p:ext uri="{BB962C8B-B14F-4D97-AF65-F5344CB8AC3E}">
+        <p14:creationId xmlns:p14="http://schemas.microsoft.com/office/powerpoint/2010/main" val="1510878935"/>
+      </p:ext>
+    </p:extLst>
+  </p:cSld>
+  <p:clrMapOvr>
+    <a:masterClrMapping/>
+  </p:clrMapOvr>
+</p:sld>
+</file>
+
+<file path=ppt/slides/slide9.xml><?xml version="1.0" encoding="utf-8"?>
 <p:sld xmlns:a="http://schemas.openxmlformats.org/drawingml/2006/main" xmlns:r="http://schemas.openxmlformats.org/officeDocument/2006/relationships" xmlns:p="http://schemas.openxmlformats.org/presentationml/2006/main">
   <p:cSld name="Slide 8">
     <p:spTree>
@@ -11677,7 +13480,7 @@
                 <a:ea typeface="Source Sans 3" pitchFamily="34" charset="-122"/>
                 <a:cs typeface="Source Sans 3" pitchFamily="34" charset="-120"/>
               </a:rPr>
-              <a:t>,7,31 % der </a:t>
+              <a:t>, 7,31 % der </a:t>
             </a:r>
             <a:r>
               <a:rPr lang="en-US" sz="1600" dirty="0" err="1">
@@ -11942,834 +13745,6 @@
               <a:rPr lang="de-DE" sz="1600" dirty="0">
                 <a:solidFill>
                   <a:srgbClr val="3D3838"/>
-                </a:solidFill>
-                <a:latin typeface="Aptos Narrow" panose="020B0004020202020204" pitchFamily="34" charset="0"/>
-              </a:rPr>
-              <a:t>7</a:t>
-            </a:r>
-          </a:p>
-        </p:txBody>
-      </p:sp>
-    </p:spTree>
-  </p:cSld>
-  <p:clrMapOvr>
-    <a:masterClrMapping/>
-  </p:clrMapOvr>
-</p:sld>
-</file>
-
-<file path=ppt/slides/slide9.xml><?xml version="1.0" encoding="utf-8"?>
-<p:sld xmlns:a="http://schemas.openxmlformats.org/drawingml/2006/main" xmlns:r="http://schemas.openxmlformats.org/officeDocument/2006/relationships" xmlns:p="http://schemas.openxmlformats.org/presentationml/2006/main">
-  <p:cSld name="Slide 9">
-    <p:spTree>
-      <p:nvGrpSpPr>
-        <p:cNvPr id="1" name=""/>
-        <p:cNvGrpSpPr/>
-        <p:nvPr/>
-      </p:nvGrpSpPr>
-      <p:grpSpPr>
-        <a:xfrm>
-          <a:off x="0" y="0"/>
-          <a:ext cx="0" cy="0"/>
-          <a:chOff x="0" y="0"/>
-          <a:chExt cx="0" cy="0"/>
-        </a:xfrm>
-      </p:grpSpPr>
-      <p:pic>
-        <p:nvPicPr>
-          <p:cNvPr id="2" name="Image 0" descr="preencoded.png"/>
-          <p:cNvPicPr>
-            <a:picLocks noChangeAspect="1"/>
-          </p:cNvPicPr>
-          <p:nvPr/>
-        </p:nvPicPr>
-        <p:blipFill>
-          <a:blip r:embed="rId3"/>
-          <a:stretch>
-            <a:fillRect/>
-          </a:stretch>
-        </p:blipFill>
-        <p:spPr>
-          <a:xfrm>
-            <a:off x="7619809" y="0"/>
-            <a:ext cx="4571886" cy="6858000"/>
-          </a:xfrm>
-          <a:prstGeom prst="rect">
-            <a:avLst/>
-          </a:prstGeom>
-        </p:spPr>
-      </p:pic>
-      <p:sp>
-        <p:nvSpPr>
-          <p:cNvPr id="3" name="Text 0"/>
-          <p:cNvSpPr/>
-          <p:nvPr/>
-        </p:nvSpPr>
-        <p:spPr>
-          <a:xfrm>
-            <a:off x="719814" y="530381"/>
-            <a:ext cx="6180181" cy="485775"/>
-          </a:xfrm>
-          <a:prstGeom prst="rect">
-            <a:avLst/>
-          </a:prstGeom>
-          <a:noFill/>
-          <a:ln/>
-        </p:spPr>
-        <p:txBody>
-          <a:bodyPr wrap="none" lIns="0" tIns="0" rIns="0" bIns="0" rtlCol="0" anchor="t"/>
-          <a:lstStyle/>
-          <a:p>
-            <a:pPr marL="0" indent="0" algn="l">
-              <a:lnSpc>
-                <a:spcPct val="104000"/>
-              </a:lnSpc>
-              <a:buNone/>
-            </a:pPr>
-            <a:r>
-              <a:rPr lang="en-US" sz="3600" b="1" kern="0" spc="-31" dirty="0">
-                <a:solidFill>
-                  <a:srgbClr val="000000"/>
-                </a:solidFill>
-                <a:latin typeface="Aptos Narrow" panose="020B0004020202020204" pitchFamily="34" charset="0"/>
-                <a:ea typeface="Montserrat Bold" pitchFamily="34" charset="-122"/>
-                <a:cs typeface="Montserrat Bold" pitchFamily="34" charset="-120"/>
-              </a:rPr>
-              <a:t>Iran im Kontext der Sammlung</a:t>
-            </a:r>
-            <a:endParaRPr lang="en-US" sz="3600" dirty="0"/>
-          </a:p>
-        </p:txBody>
-      </p:sp>
-      <p:pic>
-        <p:nvPicPr>
-          <p:cNvPr id="4" name="Image 1" descr="preencoded.png"/>
-          <p:cNvPicPr>
-            <a:picLocks noChangeAspect="1"/>
-          </p:cNvPicPr>
-          <p:nvPr/>
-        </p:nvPicPr>
-        <p:blipFill>
-          <a:blip>
-            <a:extLst>
-              <a:ext uri="{96DAC541-7B7A-43D3-8B79-37D633B846F1}">
-                <asvg:svgBlip xmlns:asvg="http://schemas.microsoft.com/office/drawing/2016/SVG/main" r:embed="rId4"/>
-              </a:ext>
-            </a:extLst>
-          </a:blip>
-          <a:stretch>
-            <a:fillRect/>
-          </a:stretch>
-        </p:blipFill>
-        <p:spPr>
-          <a:xfrm>
-            <a:off x="719814" y="1333962"/>
-            <a:ext cx="6180181" cy="1197366"/>
-          </a:xfrm>
-          <a:prstGeom prst="rect">
-            <a:avLst/>
-          </a:prstGeom>
-        </p:spPr>
-      </p:pic>
-      <p:sp>
-        <p:nvSpPr>
-          <p:cNvPr id="5" name="Text 1"/>
-          <p:cNvSpPr/>
-          <p:nvPr/>
-        </p:nvSpPr>
-        <p:spPr>
-          <a:xfrm>
-            <a:off x="986010" y="1455601"/>
-            <a:ext cx="5723985" cy="309715"/>
-          </a:xfrm>
-          <a:prstGeom prst="rect">
-            <a:avLst/>
-          </a:prstGeom>
-          <a:noFill/>
-          <a:ln/>
-        </p:spPr>
-        <p:txBody>
-          <a:bodyPr wrap="none" lIns="0" tIns="0" rIns="0" bIns="0" rtlCol="0" anchor="t"/>
-          <a:lstStyle/>
-          <a:p>
-            <a:pPr marL="0" indent="0" algn="l">
-              <a:lnSpc>
-                <a:spcPct val="104000"/>
-              </a:lnSpc>
-              <a:buNone/>
-            </a:pPr>
-            <a:r>
-              <a:rPr lang="en-US" b="1" kern="0" spc="-15" dirty="0">
-                <a:solidFill>
-                  <a:srgbClr val="3D3838"/>
-                </a:solidFill>
-                <a:latin typeface="Aptos Narrow" panose="020B0004020202020204" pitchFamily="34" charset="0"/>
-                <a:ea typeface="Montserrat Bold" pitchFamily="34" charset="-122"/>
-                <a:cs typeface="Montserrat Bold" pitchFamily="34" charset="-120"/>
-              </a:rPr>
-              <a:t>9.093 Objekte</a:t>
-            </a:r>
-            <a:endParaRPr lang="en-US" dirty="0"/>
-          </a:p>
-        </p:txBody>
-      </p:sp>
-      <p:sp>
-        <p:nvSpPr>
-          <p:cNvPr id="6" name="Text 2"/>
-          <p:cNvSpPr/>
-          <p:nvPr/>
-        </p:nvSpPr>
-        <p:spPr>
-          <a:xfrm>
-            <a:off x="986011" y="1862749"/>
-            <a:ext cx="5723985" cy="533747"/>
-          </a:xfrm>
-          <a:prstGeom prst="rect">
-            <a:avLst/>
-          </a:prstGeom>
-          <a:noFill/>
-          <a:ln/>
-        </p:spPr>
-        <p:txBody>
-          <a:bodyPr wrap="none" lIns="0" tIns="0" rIns="0" bIns="0" rtlCol="0" anchor="t"/>
-          <a:lstStyle/>
-          <a:p>
-            <a:pPr marL="0" indent="0" algn="l">
-              <a:lnSpc>
-                <a:spcPct val="114000"/>
-              </a:lnSpc>
-              <a:buNone/>
-            </a:pPr>
-            <a:r>
-              <a:rPr lang="en-US" sz="1600" b="1" dirty="0">
-                <a:solidFill>
-                  <a:srgbClr val="3D3838"/>
-                </a:solidFill>
-                <a:latin typeface="Aptos Narrow" panose="020B0004020202020204" pitchFamily="34" charset="0"/>
-                <a:ea typeface="Source Sans 3 Bold" pitchFamily="34" charset="-122"/>
-                <a:cs typeface="Source Sans 3 Bold" pitchFamily="34" charset="-120"/>
-              </a:rPr>
-              <a:t>2,03 %</a:t>
-            </a:r>
-            <a:r>
-              <a:rPr lang="en-US" sz="1600" dirty="0">
-                <a:solidFill>
-                  <a:srgbClr val="3D3838"/>
-                </a:solidFill>
-                <a:latin typeface="Aptos Narrow" panose="020B0004020202020204" pitchFamily="34" charset="0"/>
-                <a:ea typeface="Source Sans 3" pitchFamily="34" charset="-122"/>
-                <a:cs typeface="Source Sans 3" pitchFamily="34" charset="-120"/>
-              </a:rPr>
-              <a:t> der Gesamtsammlung – ein kleiner, aber historisch </a:t>
-            </a:r>
-            <a:r>
-              <a:rPr lang="en-US" sz="1600" dirty="0" err="1">
-                <a:solidFill>
-                  <a:srgbClr val="3D3838"/>
-                </a:solidFill>
-                <a:latin typeface="Aptos Narrow" panose="020B0004020202020204" pitchFamily="34" charset="0"/>
-                <a:ea typeface="Source Sans 3" pitchFamily="34" charset="-122"/>
-                <a:cs typeface="Source Sans 3" pitchFamily="34" charset="-120"/>
-              </a:rPr>
-              <a:t>tiefer</a:t>
-            </a:r>
-            <a:r>
-              <a:rPr lang="en-US" sz="1600" dirty="0">
-                <a:solidFill>
-                  <a:srgbClr val="3D3838"/>
-                </a:solidFill>
-                <a:latin typeface="Aptos Narrow" panose="020B0004020202020204" pitchFamily="34" charset="0"/>
-                <a:ea typeface="Source Sans 3" pitchFamily="34" charset="-122"/>
-                <a:cs typeface="Source Sans 3" pitchFamily="34" charset="-120"/>
-              </a:rPr>
-              <a:t> </a:t>
-            </a:r>
-          </a:p>
-          <a:p>
-            <a:pPr marL="0" indent="0" algn="l">
-              <a:lnSpc>
-                <a:spcPct val="114000"/>
-              </a:lnSpc>
-              <a:buNone/>
-            </a:pPr>
-            <a:r>
-              <a:rPr lang="en-US" sz="1600" dirty="0" err="1">
-                <a:solidFill>
-                  <a:srgbClr val="3D3838"/>
-                </a:solidFill>
-                <a:latin typeface="Aptos Narrow" panose="020B0004020202020204" pitchFamily="34" charset="0"/>
-                <a:ea typeface="Source Sans 3" pitchFamily="34" charset="-122"/>
-                <a:cs typeface="Source Sans 3" pitchFamily="34" charset="-120"/>
-              </a:rPr>
-              <a:t>Teilbestand</a:t>
-            </a:r>
-            <a:endParaRPr lang="en-US" sz="1600" dirty="0"/>
-          </a:p>
-        </p:txBody>
-      </p:sp>
-      <p:pic>
-        <p:nvPicPr>
-          <p:cNvPr id="7" name="Image 2" descr="preencoded.png"/>
-          <p:cNvPicPr>
-            <a:picLocks noChangeAspect="1"/>
-          </p:cNvPicPr>
-          <p:nvPr/>
-        </p:nvPicPr>
-        <p:blipFill>
-          <a:blip>
-            <a:extLst>
-              <a:ext uri="{96DAC541-7B7A-43D3-8B79-37D633B846F1}">
-                <asvg:svgBlip xmlns:asvg="http://schemas.microsoft.com/office/drawing/2016/SVG/main" r:embed="rId4"/>
-              </a:ext>
-            </a:extLst>
-          </a:blip>
-          <a:stretch>
-            <a:fillRect/>
-          </a:stretch>
-        </p:blipFill>
-        <p:spPr>
-          <a:xfrm>
-            <a:off x="719814" y="2622659"/>
-            <a:ext cx="6180181" cy="1182876"/>
-          </a:xfrm>
-          <a:prstGeom prst="rect">
-            <a:avLst/>
-          </a:prstGeom>
-        </p:spPr>
-      </p:pic>
-      <p:sp>
-        <p:nvSpPr>
-          <p:cNvPr id="8" name="Text 3"/>
-          <p:cNvSpPr/>
-          <p:nvPr/>
-        </p:nvSpPr>
-        <p:spPr>
-          <a:xfrm>
-            <a:off x="986011" y="2750244"/>
-            <a:ext cx="5723985" cy="242788"/>
-          </a:xfrm>
-          <a:prstGeom prst="rect">
-            <a:avLst/>
-          </a:prstGeom>
-          <a:noFill/>
-          <a:ln/>
-        </p:spPr>
-        <p:txBody>
-          <a:bodyPr wrap="none" lIns="0" tIns="0" rIns="0" bIns="0" rtlCol="0" anchor="t"/>
-          <a:lstStyle/>
-          <a:p>
-            <a:pPr marL="0" indent="0" algn="l">
-              <a:lnSpc>
-                <a:spcPct val="104000"/>
-              </a:lnSpc>
-              <a:buNone/>
-            </a:pPr>
-            <a:r>
-              <a:rPr lang="en-US" b="1" kern="0" spc="-15" dirty="0">
-                <a:solidFill>
-                  <a:srgbClr val="3D3838"/>
-                </a:solidFill>
-                <a:latin typeface="Aptos Narrow" panose="020B0004020202020204" pitchFamily="34" charset="0"/>
-                <a:ea typeface="Montserrat Bold" pitchFamily="34" charset="-122"/>
-                <a:cs typeface="Montserrat Bold" pitchFamily="34" charset="-120"/>
-              </a:rPr>
-              <a:t>Historische Tiefe</a:t>
-            </a:r>
-            <a:endParaRPr lang="en-US" dirty="0"/>
-          </a:p>
-        </p:txBody>
-      </p:sp>
-      <p:sp>
-        <p:nvSpPr>
-          <p:cNvPr id="9" name="Text 4"/>
-          <p:cNvSpPr/>
-          <p:nvPr/>
-        </p:nvSpPr>
-        <p:spPr>
-          <a:xfrm>
-            <a:off x="997620" y="3090465"/>
-            <a:ext cx="5352036" cy="668579"/>
-          </a:xfrm>
-          <a:prstGeom prst="rect">
-            <a:avLst/>
-          </a:prstGeom>
-          <a:noFill/>
-          <a:ln/>
-        </p:spPr>
-        <p:txBody>
-          <a:bodyPr wrap="none" lIns="0" tIns="0" rIns="0" bIns="0" rtlCol="0" anchor="t"/>
-          <a:lstStyle/>
-          <a:p>
-            <a:pPr marL="0" indent="0" algn="l">
-              <a:lnSpc>
-                <a:spcPct val="122000"/>
-              </a:lnSpc>
-              <a:buNone/>
-            </a:pPr>
-            <a:r>
-              <a:rPr lang="en-US" sz="1600" dirty="0" err="1">
-                <a:solidFill>
-                  <a:srgbClr val="3D3838"/>
-                </a:solidFill>
-                <a:latin typeface="Aptos Narrow" panose="020B0004020202020204" pitchFamily="34" charset="0"/>
-                <a:ea typeface="Source Sans 3" pitchFamily="34" charset="-122"/>
-                <a:cs typeface="Source Sans 3" pitchFamily="34" charset="-120"/>
-              </a:rPr>
-              <a:t>Ältestes</a:t>
-            </a:r>
-            <a:r>
-              <a:rPr lang="en-US" sz="1600" dirty="0">
-                <a:solidFill>
-                  <a:srgbClr val="3D3838"/>
-                </a:solidFill>
-                <a:latin typeface="Aptos Narrow" panose="020B0004020202020204" pitchFamily="34" charset="0"/>
-                <a:ea typeface="Source Sans 3" pitchFamily="34" charset="-122"/>
-                <a:cs typeface="Source Sans 3" pitchFamily="34" charset="-120"/>
-              </a:rPr>
-              <a:t> </a:t>
-            </a:r>
-            <a:r>
-              <a:rPr lang="en-US" sz="1600" dirty="0" err="1">
-                <a:solidFill>
-                  <a:srgbClr val="3D3838"/>
-                </a:solidFill>
-                <a:latin typeface="Aptos Narrow" panose="020B0004020202020204" pitchFamily="34" charset="0"/>
-                <a:ea typeface="Source Sans 3" pitchFamily="34" charset="-122"/>
-                <a:cs typeface="Source Sans 3" pitchFamily="34" charset="-120"/>
-              </a:rPr>
-              <a:t>Objekt</a:t>
-            </a:r>
-            <a:r>
-              <a:rPr lang="en-US" sz="1600" dirty="0">
-                <a:solidFill>
-                  <a:srgbClr val="3D3838"/>
-                </a:solidFill>
-                <a:latin typeface="Aptos Narrow" panose="020B0004020202020204" pitchFamily="34" charset="0"/>
-                <a:ea typeface="Source Sans 3" pitchFamily="34" charset="-122"/>
-                <a:cs typeface="Source Sans 3" pitchFamily="34" charset="-120"/>
-              </a:rPr>
-              <a:t> </a:t>
-            </a:r>
-            <a:r>
-              <a:rPr lang="en-US" sz="1600" dirty="0" err="1">
-                <a:solidFill>
-                  <a:srgbClr val="3D3838"/>
-                </a:solidFill>
-                <a:latin typeface="Aptos Narrow" panose="020B0004020202020204" pitchFamily="34" charset="0"/>
-                <a:ea typeface="Source Sans 3" pitchFamily="34" charset="-122"/>
-                <a:cs typeface="Source Sans 3" pitchFamily="34" charset="-120"/>
-              </a:rPr>
-              <a:t>wird</a:t>
-            </a:r>
-            <a:r>
-              <a:rPr lang="en-US" sz="1600" dirty="0">
-                <a:solidFill>
-                  <a:srgbClr val="3D3838"/>
-                </a:solidFill>
-                <a:latin typeface="Aptos Narrow" panose="020B0004020202020204" pitchFamily="34" charset="0"/>
-                <a:ea typeface="Source Sans 3" pitchFamily="34" charset="-122"/>
-                <a:cs typeface="Source Sans 3" pitchFamily="34" charset="-120"/>
-              </a:rPr>
-              <a:t> </a:t>
-            </a:r>
-            <a:r>
-              <a:rPr lang="en-US" sz="1600" dirty="0" err="1">
-                <a:solidFill>
-                  <a:srgbClr val="3D3838"/>
-                </a:solidFill>
-                <a:latin typeface="Aptos Narrow" panose="020B0004020202020204" pitchFamily="34" charset="0"/>
-                <a:ea typeface="Source Sans 3" pitchFamily="34" charset="-122"/>
-                <a:cs typeface="Source Sans 3" pitchFamily="34" charset="-120"/>
-              </a:rPr>
-              <a:t>beginnend</a:t>
-            </a:r>
-            <a:r>
-              <a:rPr lang="en-US" sz="1600" dirty="0">
-                <a:solidFill>
-                  <a:srgbClr val="3D3838"/>
-                </a:solidFill>
-                <a:latin typeface="Aptos Narrow" panose="020B0004020202020204" pitchFamily="34" charset="0"/>
-                <a:ea typeface="Source Sans 3" pitchFamily="34" charset="-122"/>
-                <a:cs typeface="Source Sans 3" pitchFamily="34" charset="-120"/>
-              </a:rPr>
-              <a:t> </a:t>
-            </a:r>
-            <a:r>
-              <a:rPr lang="en-US" sz="1600" dirty="0" err="1">
-                <a:solidFill>
-                  <a:srgbClr val="3D3838"/>
-                </a:solidFill>
-                <a:latin typeface="Aptos Narrow" panose="020B0004020202020204" pitchFamily="34" charset="0"/>
-                <a:ea typeface="Source Sans 3" pitchFamily="34" charset="-122"/>
-                <a:cs typeface="Source Sans 3" pitchFamily="34" charset="-120"/>
-              </a:rPr>
-              <a:t>datiert</a:t>
-            </a:r>
-            <a:r>
-              <a:rPr lang="en-US" sz="1600" dirty="0">
-                <a:solidFill>
-                  <a:srgbClr val="3D3838"/>
-                </a:solidFill>
-                <a:latin typeface="Aptos Narrow" panose="020B0004020202020204" pitchFamily="34" charset="0"/>
-                <a:ea typeface="Source Sans 3" pitchFamily="34" charset="-122"/>
-                <a:cs typeface="Source Sans 3" pitchFamily="34" charset="-120"/>
-              </a:rPr>
-              <a:t> auf 6000 v. Chr – </a:t>
-            </a:r>
-          </a:p>
-          <a:p>
-            <a:pPr marL="0" indent="0" algn="l">
-              <a:lnSpc>
-                <a:spcPct val="122000"/>
-              </a:lnSpc>
-              <a:buNone/>
-            </a:pPr>
-            <a:r>
-              <a:rPr lang="en-US" sz="1600" b="1" dirty="0">
-                <a:solidFill>
-                  <a:srgbClr val="3D3838"/>
-                </a:solidFill>
-                <a:latin typeface="Aptos Narrow" panose="020B0004020202020204" pitchFamily="34" charset="0"/>
-                <a:ea typeface="Source Sans 3" pitchFamily="34" charset="-122"/>
-                <a:cs typeface="Source Sans 3" pitchFamily="34" charset="-120"/>
-              </a:rPr>
-              <a:t>96,76</a:t>
-            </a:r>
-            <a:r>
-              <a:rPr lang="en-US" sz="1600" b="1" dirty="0">
-                <a:solidFill>
-                  <a:srgbClr val="3D3838"/>
-                </a:solidFill>
-                <a:latin typeface="Aptos Narrow" panose="020B0004020202020204" pitchFamily="34" charset="0"/>
-                <a:ea typeface="Source Sans 3 Bold" pitchFamily="34" charset="-122"/>
-                <a:cs typeface="Source Sans 3 Bold" pitchFamily="34" charset="-120"/>
-              </a:rPr>
-              <a:t> %</a:t>
-            </a:r>
-            <a:r>
-              <a:rPr lang="en-US" sz="1600" dirty="0">
-                <a:solidFill>
-                  <a:srgbClr val="3D3838"/>
-                </a:solidFill>
-                <a:latin typeface="Aptos Narrow" panose="020B0004020202020204" pitchFamily="34" charset="0"/>
-                <a:ea typeface="Source Sans 3" pitchFamily="34" charset="-122"/>
-                <a:cs typeface="Source Sans 3" pitchFamily="34" charset="-120"/>
-              </a:rPr>
-              <a:t> stammen aus der Zeit </a:t>
-            </a:r>
-            <a:r>
-              <a:rPr lang="en-US" sz="1600" dirty="0" err="1">
-                <a:solidFill>
-                  <a:srgbClr val="3D3838"/>
-                </a:solidFill>
-                <a:latin typeface="Aptos Narrow" panose="020B0004020202020204" pitchFamily="34" charset="0"/>
-                <a:ea typeface="Source Sans 3" pitchFamily="34" charset="-122"/>
-                <a:cs typeface="Source Sans 3" pitchFamily="34" charset="-120"/>
-              </a:rPr>
-              <a:t>nach</a:t>
-            </a:r>
-            <a:r>
-              <a:rPr lang="en-US" sz="1600" dirty="0">
-                <a:solidFill>
-                  <a:srgbClr val="3D3838"/>
-                </a:solidFill>
-                <a:latin typeface="Aptos Narrow" panose="020B0004020202020204" pitchFamily="34" charset="0"/>
-                <a:ea typeface="Source Sans 3" pitchFamily="34" charset="-122"/>
-                <a:cs typeface="Source Sans 3" pitchFamily="34" charset="-120"/>
-              </a:rPr>
-              <a:t> 1000 v. Chr.</a:t>
-            </a:r>
-            <a:endParaRPr lang="en-US" sz="1600" dirty="0"/>
-          </a:p>
-        </p:txBody>
-      </p:sp>
-      <p:pic>
-        <p:nvPicPr>
-          <p:cNvPr id="10" name="Image 3" descr="preencoded.png"/>
-          <p:cNvPicPr>
-            <a:picLocks noChangeAspect="1"/>
-          </p:cNvPicPr>
-          <p:nvPr/>
-        </p:nvPicPr>
-        <p:blipFill>
-          <a:blip>
-            <a:extLst>
-              <a:ext uri="{96DAC541-7B7A-43D3-8B79-37D633B846F1}">
-                <asvg:svgBlip xmlns:asvg="http://schemas.microsoft.com/office/drawing/2016/SVG/main" r:embed="rId4"/>
-              </a:ext>
-            </a:extLst>
-          </a:blip>
-          <a:stretch>
-            <a:fillRect/>
-          </a:stretch>
-        </p:blipFill>
-        <p:spPr>
-          <a:xfrm>
-            <a:off x="719814" y="3902968"/>
-            <a:ext cx="6180181" cy="970161"/>
-          </a:xfrm>
-          <a:prstGeom prst="rect">
-            <a:avLst/>
-          </a:prstGeom>
-        </p:spPr>
-      </p:pic>
-      <p:sp>
-        <p:nvSpPr>
-          <p:cNvPr id="11" name="Text 5"/>
-          <p:cNvSpPr/>
-          <p:nvPr/>
-        </p:nvSpPr>
-        <p:spPr>
-          <a:xfrm>
-            <a:off x="986011" y="4024651"/>
-            <a:ext cx="5723985" cy="242788"/>
-          </a:xfrm>
-          <a:prstGeom prst="rect">
-            <a:avLst/>
-          </a:prstGeom>
-          <a:noFill/>
-          <a:ln/>
-        </p:spPr>
-        <p:txBody>
-          <a:bodyPr wrap="none" lIns="0" tIns="0" rIns="0" bIns="0" rtlCol="0" anchor="t"/>
-          <a:lstStyle/>
-          <a:p>
-            <a:pPr marL="0" indent="0" algn="l">
-              <a:lnSpc>
-                <a:spcPct val="104000"/>
-              </a:lnSpc>
-              <a:buNone/>
-            </a:pPr>
-            <a:r>
-              <a:rPr lang="en-US" b="1" kern="0" spc="-15" dirty="0">
-                <a:solidFill>
-                  <a:srgbClr val="3D3838"/>
-                </a:solidFill>
-                <a:latin typeface="Aptos Narrow" panose="020B0004020202020204" pitchFamily="34" charset="0"/>
-                <a:ea typeface="Montserrat Bold" pitchFamily="34" charset="-122"/>
-                <a:cs typeface="Montserrat Bold" pitchFamily="34" charset="-120"/>
-              </a:rPr>
-              <a:t>Nishapur</a:t>
-            </a:r>
-            <a:endParaRPr lang="en-US" dirty="0"/>
-          </a:p>
-        </p:txBody>
-      </p:sp>
-      <p:sp>
-        <p:nvSpPr>
-          <p:cNvPr id="12" name="Text 6"/>
-          <p:cNvSpPr/>
-          <p:nvPr/>
-        </p:nvSpPr>
-        <p:spPr>
-          <a:xfrm>
-            <a:off x="986011" y="4364872"/>
-            <a:ext cx="5723985" cy="249932"/>
-          </a:xfrm>
-          <a:prstGeom prst="rect">
-            <a:avLst/>
-          </a:prstGeom>
-          <a:noFill/>
-          <a:ln/>
-        </p:spPr>
-        <p:txBody>
-          <a:bodyPr wrap="none" lIns="0" tIns="0" rIns="0" bIns="0" rtlCol="0" anchor="t"/>
-          <a:lstStyle/>
-          <a:p>
-            <a:pPr marL="0" indent="0" algn="l">
-              <a:lnSpc>
-                <a:spcPct val="122000"/>
-              </a:lnSpc>
-              <a:buNone/>
-            </a:pPr>
-            <a:r>
-              <a:rPr lang="en-US" sz="1600" dirty="0">
-                <a:solidFill>
-                  <a:srgbClr val="3D3838"/>
-                </a:solidFill>
-                <a:latin typeface="Aptos Narrow" panose="020B0004020202020204" pitchFamily="34" charset="0"/>
-                <a:ea typeface="Source Sans 3" pitchFamily="34" charset="-122"/>
-                <a:cs typeface="Source Sans 3" pitchFamily="34" charset="-120"/>
-              </a:rPr>
-              <a:t>Mit </a:t>
-            </a:r>
-            <a:r>
-              <a:rPr lang="en-US" sz="1600" b="1" dirty="0">
-                <a:solidFill>
-                  <a:srgbClr val="3D3838"/>
-                </a:solidFill>
-                <a:latin typeface="Aptos Narrow" panose="020B0004020202020204" pitchFamily="34" charset="0"/>
-                <a:ea typeface="Source Sans 3 Bold" pitchFamily="34" charset="-122"/>
-                <a:cs typeface="Source Sans 3 Bold" pitchFamily="34" charset="-120"/>
-              </a:rPr>
-              <a:t>3.822 Objekten</a:t>
-            </a:r>
-            <a:r>
-              <a:rPr lang="en-US" sz="1600" dirty="0">
-                <a:solidFill>
-                  <a:srgbClr val="3D3838"/>
-                </a:solidFill>
-                <a:latin typeface="Aptos Narrow" panose="020B0004020202020204" pitchFamily="34" charset="0"/>
-                <a:ea typeface="Source Sans 3" pitchFamily="34" charset="-122"/>
-                <a:cs typeface="Source Sans 3" pitchFamily="34" charset="-120"/>
-              </a:rPr>
-              <a:t> das geografisch dominante </a:t>
-            </a:r>
-            <a:r>
-              <a:rPr lang="en-US" sz="1600" dirty="0" err="1">
-                <a:solidFill>
-                  <a:srgbClr val="3D3838"/>
-                </a:solidFill>
-                <a:latin typeface="Aptos Narrow" panose="020B0004020202020204" pitchFamily="34" charset="0"/>
-                <a:ea typeface="Source Sans 3" pitchFamily="34" charset="-122"/>
-                <a:cs typeface="Source Sans 3" pitchFamily="34" charset="-120"/>
-              </a:rPr>
-              <a:t>historische</a:t>
-            </a:r>
-            <a:r>
-              <a:rPr lang="en-US" sz="1600" dirty="0">
-                <a:solidFill>
-                  <a:srgbClr val="3D3838"/>
-                </a:solidFill>
-                <a:latin typeface="Aptos Narrow" panose="020B0004020202020204" pitchFamily="34" charset="0"/>
-                <a:ea typeface="Source Sans 3" pitchFamily="34" charset="-122"/>
-                <a:cs typeface="Source Sans 3" pitchFamily="34" charset="-120"/>
-              </a:rPr>
-              <a:t> Zentrum</a:t>
-            </a:r>
-            <a:endParaRPr lang="en-US" sz="1600" dirty="0"/>
-          </a:p>
-        </p:txBody>
-      </p:sp>
-      <p:sp>
-        <p:nvSpPr>
-          <p:cNvPr id="13" name="Shape 7"/>
-          <p:cNvSpPr/>
-          <p:nvPr/>
-        </p:nvSpPr>
-        <p:spPr>
-          <a:xfrm>
-            <a:off x="719814" y="5055791"/>
-            <a:ext cx="6180181" cy="893762"/>
-          </a:xfrm>
-          <a:prstGeom prst="roundRect">
-            <a:avLst>
-              <a:gd name="adj" fmla="val 2870"/>
-            </a:avLst>
-          </a:prstGeom>
-          <a:solidFill>
-            <a:srgbClr val="FDECEA"/>
-          </a:solidFill>
-          <a:ln/>
-        </p:spPr>
-        <p:txBody>
-          <a:bodyPr/>
-          <a:lstStyle/>
-          <a:p>
-            <a:endParaRPr lang="de-DE"/>
-          </a:p>
-        </p:txBody>
-      </p:sp>
-      <p:pic>
-        <p:nvPicPr>
-          <p:cNvPr id="14" name="Image 4" descr="preencoded.png"/>
-          <p:cNvPicPr>
-            <a:picLocks noChangeAspect="1"/>
-          </p:cNvPicPr>
-          <p:nvPr/>
-        </p:nvPicPr>
-        <p:blipFill>
-          <a:blip r:embed="rId5"/>
-          <a:stretch>
-            <a:fillRect/>
-          </a:stretch>
-        </p:blipFill>
-        <p:spPr>
-          <a:xfrm>
-            <a:off x="890764" y="5374484"/>
-            <a:ext cx="213712" cy="170954"/>
-          </a:xfrm>
-          <a:prstGeom prst="rect">
-            <a:avLst/>
-          </a:prstGeom>
-        </p:spPr>
-      </p:pic>
-      <p:sp>
-        <p:nvSpPr>
-          <p:cNvPr id="15" name="Text 8"/>
-          <p:cNvSpPr/>
-          <p:nvPr/>
-        </p:nvSpPr>
-        <p:spPr>
-          <a:xfrm>
-            <a:off x="1275425" y="5213041"/>
-            <a:ext cx="5453621" cy="808230"/>
-          </a:xfrm>
-          <a:prstGeom prst="rect">
-            <a:avLst/>
-          </a:prstGeom>
-          <a:noFill/>
-          <a:ln/>
-        </p:spPr>
-        <p:txBody>
-          <a:bodyPr wrap="square" lIns="0" tIns="0" rIns="0" bIns="0" rtlCol="0" anchor="t">
-            <a:normAutofit/>
-          </a:bodyPr>
-          <a:lstStyle/>
-          <a:p>
-            <a:pPr marL="0" indent="0" algn="l">
-              <a:lnSpc>
-                <a:spcPct val="114000"/>
-              </a:lnSpc>
-              <a:buNone/>
-            </a:pPr>
-            <a:r>
-              <a:rPr lang="en-US" sz="1600" dirty="0">
-                <a:solidFill>
-                  <a:srgbClr val="000000"/>
-                </a:solidFill>
-                <a:latin typeface="Aptos Narrow" panose="020B0004020202020204" pitchFamily="34" charset="0"/>
-                <a:ea typeface="Source Sans 3" pitchFamily="34" charset="-122"/>
-                <a:cs typeface="Source Sans 3" pitchFamily="34" charset="-120"/>
-              </a:rPr>
-              <a:t>Ein kleiner, aber historisch tiefer und besonders aussagekräftiger Teilbestand.</a:t>
-            </a:r>
-            <a:endParaRPr lang="en-US" sz="1600" dirty="0"/>
-          </a:p>
-        </p:txBody>
-      </p:sp>
-      <p:sp>
-        <p:nvSpPr>
-          <p:cNvPr id="17" name="Textfeld 16">
-            <a:extLst>
-              <a:ext uri="{FF2B5EF4-FFF2-40B4-BE49-F238E27FC236}">
-                <a16:creationId xmlns:a16="http://schemas.microsoft.com/office/drawing/2014/main" id="{FF715197-BFF4-E21D-360E-BB78B0010C73}"/>
-              </a:ext>
-            </a:extLst>
-          </p:cNvPr>
-          <p:cNvSpPr txBox="1"/>
-          <p:nvPr/>
-        </p:nvSpPr>
-        <p:spPr>
-          <a:xfrm>
-            <a:off x="11764652" y="6454588"/>
-            <a:ext cx="490101" cy="338554"/>
-          </a:xfrm>
-          <a:prstGeom prst="rect">
-            <a:avLst/>
-          </a:prstGeom>
-          <a:noFill/>
-        </p:spPr>
-        <p:txBody>
-          <a:bodyPr wrap="square" rtlCol="0">
-            <a:spAutoFit/>
-          </a:bodyPr>
-          <a:lstStyle/>
-          <a:p>
-            <a:r>
-              <a:rPr lang="de-DE" sz="1600" dirty="0">
-                <a:solidFill>
-                  <a:schemeClr val="bg1"/>
                 </a:solidFill>
                 <a:latin typeface="Aptos Narrow" panose="020B0004020202020204" pitchFamily="34" charset="0"/>
               </a:rPr>

--- a/presentation.pptx
+++ b/presentation.pptx
@@ -15,7 +15,7 @@
     <p:sldId id="260" r:id="rId6"/>
     <p:sldId id="261" r:id="rId7"/>
     <p:sldId id="262" r:id="rId8"/>
-    <p:sldId id="267" r:id="rId9"/>
+    <p:sldId id="268" r:id="rId9"/>
     <p:sldId id="263" r:id="rId10"/>
     <p:sldId id="264" r:id="rId11"/>
     <p:sldId id="265" r:id="rId12"/>
@@ -1340,268 +1340,10 @@
           <a:bodyPr/>
           <a:lstStyle/>
           <a:p>
-            <a:pPr marL="171450" indent="-171450">
+            <a:pPr marL="0" indent="0">
               <a:buFontTx/>
-              <a:buChar char="-"/>
+              <a:buNone/>
             </a:pPr>
-            <a:r>
-              <a:rPr lang="en-US" b="0" dirty="0" err="1">
-                <a:latin typeface="Aptos Narrow" panose="020B0004020202020204" pitchFamily="34" charset="0"/>
-              </a:rPr>
-              <a:t>Übergang</a:t>
-            </a:r>
-            <a:r>
-              <a:rPr lang="en-US" b="0" dirty="0">
-                <a:latin typeface="Aptos Narrow" panose="020B0004020202020204" pitchFamily="34" charset="0"/>
-              </a:rPr>
-              <a:t> </a:t>
-            </a:r>
-            <a:r>
-              <a:rPr lang="en-US" b="0" dirty="0" err="1">
-                <a:latin typeface="Aptos Narrow" panose="020B0004020202020204" pitchFamily="34" charset="0"/>
-              </a:rPr>
-              <a:t>zum</a:t>
-            </a:r>
-            <a:r>
-              <a:rPr lang="en-US" b="0" dirty="0">
-                <a:latin typeface="Aptos Narrow" panose="020B0004020202020204" pitchFamily="34" charset="0"/>
-              </a:rPr>
-              <a:t> Dashboard für die </a:t>
-            </a:r>
-            <a:r>
-              <a:rPr lang="en-US" b="0" dirty="0" err="1">
-                <a:latin typeface="Aptos Narrow" panose="020B0004020202020204" pitchFamily="34" charset="0"/>
-              </a:rPr>
-              <a:t>Analyse</a:t>
-            </a:r>
-            <a:r>
-              <a:rPr lang="en-US" b="0" dirty="0">
-                <a:latin typeface="Aptos Narrow" panose="020B0004020202020204" pitchFamily="34" charset="0"/>
-              </a:rPr>
-              <a:t>.</a:t>
-            </a:r>
-          </a:p>
-          <a:p>
-            <a:pPr marL="171450" indent="-171450">
-              <a:buFontTx/>
-              <a:buChar char="-"/>
-            </a:pPr>
-            <a:r>
-              <a:rPr lang="en-US" b="0" dirty="0" err="1">
-                <a:latin typeface="Aptos Narrow" panose="020B0004020202020204" pitchFamily="34" charset="0"/>
-              </a:rPr>
-              <a:t>Fünf</a:t>
-            </a:r>
-            <a:r>
-              <a:rPr lang="en-US" b="0" dirty="0">
-                <a:latin typeface="Aptos Narrow" panose="020B0004020202020204" pitchFamily="34" charset="0"/>
-              </a:rPr>
-              <a:t> </a:t>
-            </a:r>
-            <a:r>
-              <a:rPr lang="en-US" b="0" dirty="0" err="1">
-                <a:latin typeface="Aptos Narrow" panose="020B0004020202020204" pitchFamily="34" charset="0"/>
-              </a:rPr>
-              <a:t>Analysen</a:t>
-            </a:r>
-            <a:r>
-              <a:rPr lang="en-US" b="0" dirty="0">
-                <a:latin typeface="Aptos Narrow" panose="020B0004020202020204" pitchFamily="34" charset="0"/>
-              </a:rPr>
-              <a:t> und </a:t>
-            </a:r>
-            <a:r>
-              <a:rPr lang="en-US" b="0" dirty="0" err="1">
-                <a:latin typeface="Aptos Narrow" panose="020B0004020202020204" pitchFamily="34" charset="0"/>
-              </a:rPr>
-              <a:t>eine</a:t>
-            </a:r>
-            <a:r>
-              <a:rPr lang="en-US" b="0" dirty="0">
-                <a:latin typeface="Aptos Narrow" panose="020B0004020202020204" pitchFamily="34" charset="0"/>
-              </a:rPr>
-              <a:t> </a:t>
-            </a:r>
-            <a:r>
-              <a:rPr lang="en-US" b="0" dirty="0" err="1">
-                <a:latin typeface="Aptos Narrow" panose="020B0004020202020204" pitchFamily="34" charset="0"/>
-              </a:rPr>
-              <a:t>deskriptive</a:t>
-            </a:r>
-            <a:r>
-              <a:rPr lang="en-US" b="0" dirty="0">
-                <a:latin typeface="Aptos Narrow" panose="020B0004020202020204" pitchFamily="34" charset="0"/>
-              </a:rPr>
-              <a:t> Vor-</a:t>
-            </a:r>
-            <a:r>
-              <a:rPr lang="en-US" b="0" dirty="0" err="1">
-                <a:latin typeface="Aptos Narrow" panose="020B0004020202020204" pitchFamily="34" charset="0"/>
-              </a:rPr>
-              <a:t>Analyse</a:t>
-            </a:r>
-            <a:r>
-              <a:rPr lang="en-US" b="0" dirty="0">
-                <a:latin typeface="Aptos Narrow" panose="020B0004020202020204" pitchFamily="34" charset="0"/>
-              </a:rPr>
-              <a:t>, </a:t>
-            </a:r>
-            <a:r>
-              <a:rPr lang="en-US" b="0" dirty="0" err="1">
-                <a:latin typeface="Aptos Narrow" panose="020B0004020202020204" pitchFamily="34" charset="0"/>
-              </a:rPr>
-              <a:t>deren</a:t>
-            </a:r>
-            <a:r>
-              <a:rPr lang="en-US" b="0" dirty="0">
-                <a:latin typeface="Aptos Narrow" panose="020B0004020202020204" pitchFamily="34" charset="0"/>
-              </a:rPr>
-              <a:t> </a:t>
-            </a:r>
-            <a:r>
-              <a:rPr lang="en-US" b="0" dirty="0" err="1">
-                <a:latin typeface="Aptos Narrow" panose="020B0004020202020204" pitchFamily="34" charset="0"/>
-              </a:rPr>
-              <a:t>Ergebnisse</a:t>
-            </a:r>
-            <a:r>
-              <a:rPr lang="en-US" b="0" dirty="0">
-                <a:latin typeface="Aptos Narrow" panose="020B0004020202020204" pitchFamily="34" charset="0"/>
-              </a:rPr>
-              <a:t> </a:t>
-            </a:r>
-            <a:r>
-              <a:rPr lang="en-US" b="0" dirty="0" err="1">
-                <a:latin typeface="Aptos Narrow" panose="020B0004020202020204" pitchFamily="34" charset="0"/>
-              </a:rPr>
-              <a:t>zur</a:t>
-            </a:r>
-            <a:r>
-              <a:rPr lang="en-US" b="0" dirty="0">
-                <a:latin typeface="Aptos Narrow" panose="020B0004020202020204" pitchFamily="34" charset="0"/>
-              </a:rPr>
-              <a:t> </a:t>
-            </a:r>
-            <a:r>
-              <a:rPr lang="en-US" b="0" dirty="0" err="1">
-                <a:latin typeface="Aptos Narrow" panose="020B0004020202020204" pitchFamily="34" charset="0"/>
-              </a:rPr>
-              <a:t>Beantwortung</a:t>
-            </a:r>
-            <a:r>
-              <a:rPr lang="en-US" b="0" dirty="0">
-                <a:latin typeface="Aptos Narrow" panose="020B0004020202020204" pitchFamily="34" charset="0"/>
-              </a:rPr>
-              <a:t> der </a:t>
-            </a:r>
-            <a:r>
-              <a:rPr lang="en-US" b="0" dirty="0" err="1">
-                <a:latin typeface="Aptos Narrow" panose="020B0004020202020204" pitchFamily="34" charset="0"/>
-              </a:rPr>
-              <a:t>drei</a:t>
-            </a:r>
-            <a:r>
-              <a:rPr lang="en-US" b="0" dirty="0">
-                <a:latin typeface="Aptos Narrow" panose="020B0004020202020204" pitchFamily="34" charset="0"/>
-              </a:rPr>
-              <a:t> </a:t>
-            </a:r>
-            <a:r>
-              <a:rPr lang="en-US" b="0" dirty="0" err="1">
-                <a:latin typeface="Aptos Narrow" panose="020B0004020202020204" pitchFamily="34" charset="0"/>
-              </a:rPr>
-              <a:t>Leitfragen</a:t>
-            </a:r>
-            <a:r>
-              <a:rPr lang="en-US" b="0" dirty="0">
-                <a:latin typeface="Aptos Narrow" panose="020B0004020202020204" pitchFamily="34" charset="0"/>
-              </a:rPr>
-              <a:t> </a:t>
-            </a:r>
-            <a:r>
-              <a:rPr lang="en-US" b="0" dirty="0" err="1">
-                <a:latin typeface="Aptos Narrow" panose="020B0004020202020204" pitchFamily="34" charset="0"/>
-              </a:rPr>
-              <a:t>sortiert</a:t>
-            </a:r>
-            <a:r>
-              <a:rPr lang="en-US" b="0" dirty="0">
-                <a:latin typeface="Aptos Narrow" panose="020B0004020202020204" pitchFamily="34" charset="0"/>
-              </a:rPr>
-              <a:t> </a:t>
-            </a:r>
-            <a:r>
-              <a:rPr lang="en-US" b="0" dirty="0" err="1">
-                <a:latin typeface="Aptos Narrow" panose="020B0004020202020204" pitchFamily="34" charset="0"/>
-              </a:rPr>
-              <a:t>wurden</a:t>
-            </a:r>
-            <a:r>
-              <a:rPr lang="en-US" b="0" dirty="0">
-                <a:latin typeface="Aptos Narrow" panose="020B0004020202020204" pitchFamily="34" charset="0"/>
-              </a:rPr>
-              <a:t>.</a:t>
-            </a:r>
-          </a:p>
-          <a:p>
-            <a:pPr marL="171450" indent="-171450">
-              <a:buFontTx/>
-              <a:buChar char="-"/>
-            </a:pPr>
-            <a:r>
-              <a:rPr lang="de-DE" b="0" dirty="0">
-                <a:latin typeface="Aptos Narrow" panose="020B0004020202020204" pitchFamily="34" charset="0"/>
-              </a:rPr>
-              <a:t>Analyse 1: Überblick über die Gesamtsammlung (bzw. die aufgenommenen Objekte) → Leitfrage 1</a:t>
-            </a:r>
-          </a:p>
-          <a:p>
-            <a:pPr marL="171450" indent="-171450">
-              <a:buFontTx/>
-              <a:buChar char="-"/>
-            </a:pPr>
-            <a:r>
-              <a:rPr lang="de-DE" b="0" dirty="0">
-                <a:latin typeface="Aptos Narrow" panose="020B0004020202020204" pitchFamily="34" charset="0"/>
-              </a:rPr>
-              <a:t>Analyse 2: Der iranisch-persische Kultur- bzw. Herkunftsraum im Kontext der Gesamtsammlung → Leitfrage 2.</a:t>
-            </a:r>
-          </a:p>
-          <a:p>
-            <a:pPr marL="171450" indent="-171450">
-              <a:buFontTx/>
-              <a:buChar char="-"/>
-            </a:pPr>
-            <a:r>
-              <a:rPr lang="de-DE" b="0" dirty="0">
-                <a:latin typeface="Aptos Narrow" panose="020B0004020202020204" pitchFamily="34" charset="0"/>
-              </a:rPr>
-              <a:t>Analyse 3: Zeitliche Schwerpunkte und historische Epochen → Leitfrage 3.</a:t>
-            </a:r>
-          </a:p>
-          <a:p>
-            <a:pPr marL="171450" indent="-171450">
-              <a:buFontTx/>
-              <a:buChar char="-"/>
-            </a:pPr>
-            <a:r>
-              <a:rPr lang="de-DE" b="0" dirty="0">
-                <a:latin typeface="Aptos Narrow" panose="020B0004020202020204" pitchFamily="34" charset="0"/>
-              </a:rPr>
-              <a:t>Analyse 4: Materielle und funktionale Zusammensetzung → Leitfrage 3.</a:t>
-            </a:r>
-          </a:p>
-          <a:p>
-            <a:pPr marL="171450" indent="-171450">
-              <a:buFontTx/>
-              <a:buChar char="-"/>
-            </a:pPr>
-            <a:r>
-              <a:rPr lang="de-DE" b="0" dirty="0">
-                <a:latin typeface="Aptos Narrow" panose="020B0004020202020204" pitchFamily="34" charset="0"/>
-              </a:rPr>
-              <a:t>Analyse 5: Institutionelle Schwerpunkte und Muster → Leitfrage 3.</a:t>
-            </a:r>
             <a:endParaRPr lang="en-US" dirty="0">
               <a:latin typeface="Aptos Narrow" panose="020B0004020202020204" pitchFamily="34" charset="0"/>
             </a:endParaRPr>
@@ -11911,6 +11653,39 @@
           <a:chExt cx="0" cy="0"/>
         </a:xfrm>
       </p:grpSpPr>
+      <p:pic>
+        <p:nvPicPr>
+          <p:cNvPr id="6" name="Grafik 5">
+            <a:extLst>
+              <a:ext uri="{FF2B5EF4-FFF2-40B4-BE49-F238E27FC236}">
+                <a16:creationId xmlns:a16="http://schemas.microsoft.com/office/drawing/2014/main" id="{916D657E-C984-29DB-EF4A-CF59CF318C41}"/>
+              </a:ext>
+            </a:extLst>
+          </p:cNvPr>
+          <p:cNvPicPr>
+            <a:picLocks noChangeAspect="1"/>
+          </p:cNvPicPr>
+          <p:nvPr/>
+        </p:nvPicPr>
+        <p:blipFill>
+          <a:blip r:embed="rId3"/>
+          <a:stretch>
+            <a:fillRect/>
+          </a:stretch>
+        </p:blipFill>
+        <p:spPr>
+          <a:xfrm>
+            <a:off x="7381152" y="0"/>
+            <a:ext cx="4853412" cy="6858000"/>
+          </a:xfrm>
+          <a:prstGeom prst="rect">
+            <a:avLst/>
+          </a:prstGeom>
+          <a:ln w="38100">
+            <a:noFill/>
+          </a:ln>
+        </p:spPr>
+      </p:pic>
       <p:sp>
         <p:nvSpPr>
           <p:cNvPr id="2" name="Text 0">
@@ -11959,40 +11734,6 @@
           </a:p>
         </p:txBody>
       </p:sp>
-      <p:pic>
-        <p:nvPicPr>
-          <p:cNvPr id="3" name="Image 0">
-            <a:extLst>
-              <a:ext uri="{FF2B5EF4-FFF2-40B4-BE49-F238E27FC236}">
-                <a16:creationId xmlns:a16="http://schemas.microsoft.com/office/drawing/2014/main" id="{75B90D79-2DC5-AC01-4A78-7AF9F2A8C2DD}"/>
-              </a:ext>
-            </a:extLst>
-          </p:cNvPr>
-          <p:cNvPicPr>
-            <a:picLocks noChangeAspect="1"/>
-          </p:cNvPicPr>
-          <p:nvPr/>
-        </p:nvPicPr>
-        <p:blipFill rotWithShape="1">
-          <a:blip r:embed="rId3"/>
-          <a:srcRect t="13" b="13"/>
-          <a:stretch>
-            <a:fillRect/>
-          </a:stretch>
-        </p:blipFill>
-        <p:spPr>
-          <a:xfrm>
-            <a:off x="7441814" y="0"/>
-            <a:ext cx="4750186" cy="6858000"/>
-          </a:xfrm>
-          <a:prstGeom prst="rect">
-            <a:avLst/>
-          </a:prstGeom>
-          <a:ln w="28575">
-            <a:noFill/>
-          </a:ln>
-        </p:spPr>
-      </p:pic>
       <p:sp>
         <p:nvSpPr>
           <p:cNvPr id="4" name="Text 1">
@@ -12420,7 +12161,7 @@
     </p:spTree>
     <p:extLst>
       <p:ext uri="{BB962C8B-B14F-4D97-AF65-F5344CB8AC3E}">
-        <p14:creationId xmlns:p14="http://schemas.microsoft.com/office/powerpoint/2010/main" val="1510878935"/>
+        <p14:creationId xmlns:p14="http://schemas.microsoft.com/office/powerpoint/2010/main" val="2785308825"/>
       </p:ext>
     </p:extLst>
   </p:cSld>
